--- a/cours/Module TIC/Département Français/Licence 2/Cours_TIC_01_Introduction_aux_TIC_FR.pptx
+++ b/cours/Module TIC/Département Français/Licence 2/Cours_TIC_01_Introduction_aux_TIC_FR.pptx
@@ -4,9 +4,6 @@
   <p:sldMasterIdLst>
     <p:sldMasterId id="2147483648" r:id="rId1"/>
   </p:sldMasterIdLst>
-  <p:notesMasterIdLst>
-    <p:notesMasterId r:id="rId33"/>
-  </p:notesMasterIdLst>
   <p:sldIdLst>
     <p:sldId id="256" r:id="rId7"/>
     <p:sldId id="257" r:id="rId8"/>
@@ -18,6 +15,11 @@
     <p:sldId id="263" r:id="rId14"/>
     <p:sldId id="264" r:id="rId15"/>
     <p:sldId id="265" r:id="rId16"/>
+    <p:sldId id="266" r:id="rId17"/>
+    <p:sldId id="267" r:id="rId18"/>
+    <p:sldId id="268" r:id="rId19"/>
+    <p:sldId id="269" r:id="rId20"/>
+    <p:sldId id="270" r:id="rId21"/>
   </p:sldIdLst>
   <p:sldSz cx="9144000" cy="6858000" type="screen4x3"/>
   <p:notesSz cx="6858000" cy="9144000"/>
@@ -116,372 +118,7 @@
       </a:defRPr>
     </a:lvl9pPr>
   </p:defaultTextStyle>
-  <p:extLst>
-    <p:ext uri="{EFAFB233-063F-42B5-8137-9DF3F51BA10A}">
-      <p15:sldGuideLst xmlns:p15="http://schemas.microsoft.com/office/powerpoint/2012/main">
-        <p15:guide id="1" orient="horz" pos="2160">
-          <p15:clr>
-            <a:srgbClr val="A4A3A4"/>
-          </p15:clr>
-        </p15:guide>
-        <p15:guide id="2" pos="2880">
-          <p15:clr>
-            <a:srgbClr val="A4A3A4"/>
-          </p15:clr>
-        </p15:guide>
-      </p15:sldGuideLst>
-    </p:ext>
-  </p:extLst>
 </p:presentation>
-</file>
-
-<file path=ppt/notesMasters/notesMaster1.xml><?xml version="1.0" encoding="utf-8"?>
-<p:notesMaster xmlns:a="http://schemas.openxmlformats.org/drawingml/2006/main" xmlns:r="http://schemas.openxmlformats.org/officeDocument/2006/relationships" xmlns:p="http://schemas.openxmlformats.org/presentationml/2006/main">
-  <p:cSld>
-    <p:bg>
-      <p:bgRef idx="1001">
-        <a:schemeClr val="bg1"/>
-      </p:bgRef>
-    </p:bg>
-    <p:spTree>
-      <p:nvGrpSpPr>
-        <p:cNvPr id="1" name=""/>
-        <p:cNvGrpSpPr/>
-        <p:nvPr/>
-      </p:nvGrpSpPr>
-      <p:grpSpPr>
-        <a:xfrm>
-          <a:off x="0" y="0"/>
-          <a:ext cx="0" cy="0"/>
-          <a:chOff x="0" y="0"/>
-          <a:chExt cx="0" cy="0"/>
-        </a:xfrm>
-      </p:grpSpPr>
-      <p:sp>
-        <p:nvSpPr>
-          <p:cNvPr id="2" name="Espace réservé de l'en-tête 1"/>
-          <p:cNvSpPr>
-            <a:spLocks noGrp="1"/>
-          </p:cNvSpPr>
-          <p:nvPr>
-            <p:ph type="hdr" sz="quarter"/>
-          </p:nvPr>
-        </p:nvSpPr>
-        <p:spPr>
-          <a:xfrm>
-            <a:off x="0" y="0"/>
-            <a:ext cx="2971800" cy="458788"/>
-          </a:xfrm>
-          <a:prstGeom prst="rect">
-            <a:avLst/>
-          </a:prstGeom>
-        </p:spPr>
-        <p:txBody>
-          <a:bodyPr vert="horz" lIns="91440" tIns="45720" rIns="91440" bIns="45720" rtlCol="0"/>
-          <a:lstStyle>
-            <a:lvl1pPr algn="l">
-              <a:defRPr sz="1200"/>
-            </a:lvl1pPr>
-          </a:lstStyle>
-          <a:p>
-            <a:endParaRPr lang="fr-FR"/>
-          </a:p>
-        </p:txBody>
-      </p:sp>
-      <p:sp>
-        <p:nvSpPr>
-          <p:cNvPr id="3" name="Espace réservé de la date 2"/>
-          <p:cNvSpPr>
-            <a:spLocks noGrp="1"/>
-          </p:cNvSpPr>
-          <p:nvPr>
-            <p:ph type="dt" idx="1"/>
-          </p:nvPr>
-        </p:nvSpPr>
-        <p:spPr>
-          <a:xfrm>
-            <a:off x="3884613" y="0"/>
-            <a:ext cx="2971800" cy="458788"/>
-          </a:xfrm>
-          <a:prstGeom prst="rect">
-            <a:avLst/>
-          </a:prstGeom>
-        </p:spPr>
-        <p:txBody>
-          <a:bodyPr vert="horz" lIns="91440" tIns="45720" rIns="91440" bIns="45720" rtlCol="0"/>
-          <a:lstStyle>
-            <a:lvl1pPr algn="r">
-              <a:defRPr sz="1200"/>
-            </a:lvl1pPr>
-          </a:lstStyle>
-          <a:p>
-            <a:fld id="{B8F0B2C1-4194-45A7-9834-731A4F36BABD}" type="datetimeFigureOut">
-              <a:rPr lang="fr-FR" smtClean="0"/>
-              <a:t>16/05/2026</a:t>
-            </a:fld>
-            <a:endParaRPr lang="fr-FR"/>
-          </a:p>
-        </p:txBody>
-      </p:sp>
-      <p:sp>
-        <p:nvSpPr>
-          <p:cNvPr id="4" name="Espace réservé de l'image des diapositives 3"/>
-          <p:cNvSpPr>
-            <a:spLocks noGrp="1" noRot="1" noChangeAspect="1"/>
-          </p:cNvSpPr>
-          <p:nvPr>
-            <p:ph type="sldImg" idx="2"/>
-          </p:nvPr>
-        </p:nvSpPr>
-        <p:spPr>
-          <a:xfrm>
-            <a:off x="1371600" y="1143000"/>
-            <a:ext cx="4114800" cy="3086100"/>
-          </a:xfrm>
-          <a:prstGeom prst="rect">
-            <a:avLst/>
-          </a:prstGeom>
-          <a:noFill/>
-          <a:ln w="12700">
-            <a:solidFill>
-              <a:prstClr val="black"/>
-            </a:solidFill>
-          </a:ln>
-        </p:spPr>
-        <p:txBody>
-          <a:bodyPr vert="horz" lIns="91440" tIns="45720" rIns="91440" bIns="45720" rtlCol="0" anchor="ctr"/>
-          <a:lstStyle/>
-          <a:p>
-            <a:endParaRPr lang="fr-FR"/>
-          </a:p>
-        </p:txBody>
-      </p:sp>
-      <p:sp>
-        <p:nvSpPr>
-          <p:cNvPr id="5" name="Espace réservé des notes 4"/>
-          <p:cNvSpPr>
-            <a:spLocks noGrp="1"/>
-          </p:cNvSpPr>
-          <p:nvPr>
-            <p:ph type="body" sz="quarter" idx="3"/>
-          </p:nvPr>
-        </p:nvSpPr>
-        <p:spPr>
-          <a:xfrm>
-            <a:off x="685800" y="4400550"/>
-            <a:ext cx="5486400" cy="3600450"/>
-          </a:xfrm>
-          <a:prstGeom prst="rect">
-            <a:avLst/>
-          </a:prstGeom>
-        </p:spPr>
-        <p:txBody>
-          <a:bodyPr vert="horz" lIns="91440" tIns="45720" rIns="91440" bIns="45720" rtlCol="0"/>
-          <a:lstStyle/>
-          <a:p>
-            <a:pPr lvl="0"/>
-            <a:r>
-              <a:rPr lang="fr-FR"/>
-              <a:t>Cliquez pour modifier les styles du texte du masque</a:t>
-            </a:r>
-          </a:p>
-          <a:p>
-            <a:pPr lvl="1"/>
-            <a:r>
-              <a:rPr lang="fr-FR"/>
-              <a:t>Deuxième niveau</a:t>
-            </a:r>
-          </a:p>
-          <a:p>
-            <a:pPr lvl="2"/>
-            <a:r>
-              <a:rPr lang="fr-FR"/>
-              <a:t>Troisième niveau</a:t>
-            </a:r>
-          </a:p>
-          <a:p>
-            <a:pPr lvl="3"/>
-            <a:r>
-              <a:rPr lang="fr-FR"/>
-              <a:t>Quatrième niveau</a:t>
-            </a:r>
-          </a:p>
-          <a:p>
-            <a:pPr lvl="4"/>
-            <a:r>
-              <a:rPr lang="fr-FR"/>
-              <a:t>Cinquième niveau</a:t>
-            </a:r>
-          </a:p>
-        </p:txBody>
-      </p:sp>
-      <p:sp>
-        <p:nvSpPr>
-          <p:cNvPr id="6" name="Espace réservé du pied de page 5"/>
-          <p:cNvSpPr>
-            <a:spLocks noGrp="1"/>
-          </p:cNvSpPr>
-          <p:nvPr>
-            <p:ph type="ftr" sz="quarter" idx="4"/>
-          </p:nvPr>
-        </p:nvSpPr>
-        <p:spPr>
-          <a:xfrm>
-            <a:off x="0" y="8685213"/>
-            <a:ext cx="2971800" cy="458787"/>
-          </a:xfrm>
-          <a:prstGeom prst="rect">
-            <a:avLst/>
-          </a:prstGeom>
-        </p:spPr>
-        <p:txBody>
-          <a:bodyPr vert="horz" lIns="91440" tIns="45720" rIns="91440" bIns="45720" rtlCol="0" anchor="b"/>
-          <a:lstStyle>
-            <a:lvl1pPr algn="l">
-              <a:defRPr sz="1200"/>
-            </a:lvl1pPr>
-          </a:lstStyle>
-          <a:p>
-            <a:endParaRPr lang="fr-FR"/>
-          </a:p>
-        </p:txBody>
-      </p:sp>
-      <p:sp>
-        <p:nvSpPr>
-          <p:cNvPr id="7" name="Espace réservé du numéro de diapositive 6"/>
-          <p:cNvSpPr>
-            <a:spLocks noGrp="1"/>
-          </p:cNvSpPr>
-          <p:nvPr>
-            <p:ph type="sldNum" sz="quarter" idx="5"/>
-          </p:nvPr>
-        </p:nvSpPr>
-        <p:spPr>
-          <a:xfrm>
-            <a:off x="3884613" y="8685213"/>
-            <a:ext cx="2971800" cy="458787"/>
-          </a:xfrm>
-          <a:prstGeom prst="rect">
-            <a:avLst/>
-          </a:prstGeom>
-        </p:spPr>
-        <p:txBody>
-          <a:bodyPr vert="horz" lIns="91440" tIns="45720" rIns="91440" bIns="45720" rtlCol="0" anchor="b"/>
-          <a:lstStyle>
-            <a:lvl1pPr algn="r">
-              <a:defRPr sz="1200"/>
-            </a:lvl1pPr>
-          </a:lstStyle>
-          <a:p>
-            <a:fld id="{EDB5666F-E79B-4A29-9A64-FA4855FAABBD}" type="slidenum">
-              <a:rPr lang="fr-FR" smtClean="0"/>
-              <a:t>‹N°›</a:t>
-            </a:fld>
-            <a:endParaRPr lang="fr-FR"/>
-          </a:p>
-        </p:txBody>
-      </p:sp>
-    </p:spTree>
-    <p:extLst>
-      <p:ext uri="{BB962C8B-B14F-4D97-AF65-F5344CB8AC3E}">
-        <p14:creationId xmlns:p14="http://schemas.microsoft.com/office/powerpoint/2010/main" val="4057233482"/>
-      </p:ext>
-    </p:extLst>
-  </p:cSld>
-  <p:clrMap bg1="lt1" tx1="dk1" bg2="lt2" tx2="dk2" accent1="accent1" accent2="accent2" accent3="accent3" accent4="accent4" accent5="accent5" accent6="accent6" hlink="hlink" folHlink="folHlink"/>
-  <p:notesStyle>
-    <a:lvl1pPr marL="0" algn="l" defTabSz="914400" rtl="0" eaLnBrk="1" latinLnBrk="0" hangingPunct="1">
-      <a:defRPr sz="1200" kern="1200">
-        <a:solidFill>
-          <a:schemeClr val="tx1"/>
-        </a:solidFill>
-        <a:latin typeface="+mn-lt"/>
-        <a:ea typeface="+mn-ea"/>
-        <a:cs typeface="+mn-cs"/>
-      </a:defRPr>
-    </a:lvl1pPr>
-    <a:lvl2pPr marL="457200" algn="l" defTabSz="914400" rtl="0" eaLnBrk="1" latinLnBrk="0" hangingPunct="1">
-      <a:defRPr sz="1200" kern="1200">
-        <a:solidFill>
-          <a:schemeClr val="tx1"/>
-        </a:solidFill>
-        <a:latin typeface="+mn-lt"/>
-        <a:ea typeface="+mn-ea"/>
-        <a:cs typeface="+mn-cs"/>
-      </a:defRPr>
-    </a:lvl2pPr>
-    <a:lvl3pPr marL="914400" algn="l" defTabSz="914400" rtl="0" eaLnBrk="1" latinLnBrk="0" hangingPunct="1">
-      <a:defRPr sz="1200" kern="1200">
-        <a:solidFill>
-          <a:schemeClr val="tx1"/>
-        </a:solidFill>
-        <a:latin typeface="+mn-lt"/>
-        <a:ea typeface="+mn-ea"/>
-        <a:cs typeface="+mn-cs"/>
-      </a:defRPr>
-    </a:lvl3pPr>
-    <a:lvl4pPr marL="1371600" algn="l" defTabSz="914400" rtl="0" eaLnBrk="1" latinLnBrk="0" hangingPunct="1">
-      <a:defRPr sz="1200" kern="1200">
-        <a:solidFill>
-          <a:schemeClr val="tx1"/>
-        </a:solidFill>
-        <a:latin typeface="+mn-lt"/>
-        <a:ea typeface="+mn-ea"/>
-        <a:cs typeface="+mn-cs"/>
-      </a:defRPr>
-    </a:lvl4pPr>
-    <a:lvl5pPr marL="1828800" algn="l" defTabSz="914400" rtl="0" eaLnBrk="1" latinLnBrk="0" hangingPunct="1">
-      <a:defRPr sz="1200" kern="1200">
-        <a:solidFill>
-          <a:schemeClr val="tx1"/>
-        </a:solidFill>
-        <a:latin typeface="+mn-lt"/>
-        <a:ea typeface="+mn-ea"/>
-        <a:cs typeface="+mn-cs"/>
-      </a:defRPr>
-    </a:lvl5pPr>
-    <a:lvl6pPr marL="2286000" algn="l" defTabSz="914400" rtl="0" eaLnBrk="1" latinLnBrk="0" hangingPunct="1">
-      <a:defRPr sz="1200" kern="1200">
-        <a:solidFill>
-          <a:schemeClr val="tx1"/>
-        </a:solidFill>
-        <a:latin typeface="+mn-lt"/>
-        <a:ea typeface="+mn-ea"/>
-        <a:cs typeface="+mn-cs"/>
-      </a:defRPr>
-    </a:lvl6pPr>
-    <a:lvl7pPr marL="2743200" algn="l" defTabSz="914400" rtl="0" eaLnBrk="1" latinLnBrk="0" hangingPunct="1">
-      <a:defRPr sz="1200" kern="1200">
-        <a:solidFill>
-          <a:schemeClr val="tx1"/>
-        </a:solidFill>
-        <a:latin typeface="+mn-lt"/>
-        <a:ea typeface="+mn-ea"/>
-        <a:cs typeface="+mn-cs"/>
-      </a:defRPr>
-    </a:lvl7pPr>
-    <a:lvl8pPr marL="3200400" algn="l" defTabSz="914400" rtl="0" eaLnBrk="1" latinLnBrk="0" hangingPunct="1">
-      <a:defRPr sz="1200" kern="1200">
-        <a:solidFill>
-          <a:schemeClr val="tx1"/>
-        </a:solidFill>
-        <a:latin typeface="+mn-lt"/>
-        <a:ea typeface="+mn-ea"/>
-        <a:cs typeface="+mn-cs"/>
-      </a:defRPr>
-    </a:lvl8pPr>
-    <a:lvl9pPr marL="3657600" algn="l" defTabSz="914400" rtl="0" eaLnBrk="1" latinLnBrk="0" hangingPunct="1">
-      <a:defRPr sz="1200" kern="1200">
-        <a:solidFill>
-          <a:schemeClr val="tx1"/>
-        </a:solidFill>
-        <a:latin typeface="+mn-lt"/>
-        <a:ea typeface="+mn-ea"/>
-        <a:cs typeface="+mn-cs"/>
-      </a:defRPr>
-    </a:lvl9pPr>
-  </p:notesStyle>
-</p:notesMaster>
 </file>
 
 <file path=ppt/slideLayouts/slideLayout1.xml><?xml version="1.0" encoding="utf-8"?>
@@ -522,9 +159,10 @@
           <a:lstStyle/>
           <a:p>
             <a:r>
-              <a:rPr lang="en-US"/>
+              <a:rPr lang="en-US" smtClean="0"/>
               <a:t>Click to edit Master title style</a:t>
             </a:r>
+            <a:endParaRPr lang="en-US"/>
           </a:p>
         </p:txBody>
       </p:sp>
@@ -640,9 +278,10 @@
           </a:lstStyle>
           <a:p>
             <a:r>
-              <a:rPr lang="en-US"/>
+              <a:rPr lang="en-US" smtClean="0"/>
               <a:t>Click to edit Master subtitle style</a:t>
             </a:r>
+            <a:endParaRPr lang="en-US"/>
           </a:p>
         </p:txBody>
       </p:sp>
@@ -663,7 +302,7 @@
           <a:p>
             <a:fld id="{5BCAD085-E8A6-8845-BD4E-CB4CCA059FC4}" type="datetimeFigureOut">
               <a:rPr lang="en-US" smtClean="0"/>
-              <a:t>5/16/2026</a:t>
+              <a:t>1/27/13</a:t>
             </a:fld>
             <a:endParaRPr lang="en-US"/>
           </a:p>
@@ -705,7 +344,7 @@
           <a:p>
             <a:fld id="{C1FF6DA9-008F-8B48-92A6-B652298478BF}" type="slidenum">
               <a:rPr lang="en-US" smtClean="0"/>
-              <a:t>‹N°›</a:t>
+              <a:t>‹#›</a:t>
             </a:fld>
             <a:endParaRPr lang="en-US"/>
           </a:p>
@@ -757,9 +396,10 @@
           <a:lstStyle/>
           <a:p>
             <a:r>
-              <a:rPr lang="en-US"/>
+              <a:rPr lang="en-US" smtClean="0"/>
               <a:t>Click to edit Master title style</a:t>
             </a:r>
+            <a:endParaRPr lang="en-US"/>
           </a:p>
         </p:txBody>
       </p:sp>
@@ -780,37 +420,38 @@
           <a:p>
             <a:pPr lvl="0"/>
             <a:r>
-              <a:rPr lang="en-US"/>
+              <a:rPr lang="en-US" smtClean="0"/>
               <a:t>Click to edit Master text styles</a:t>
             </a:r>
           </a:p>
           <a:p>
             <a:pPr lvl="1"/>
             <a:r>
-              <a:rPr lang="en-US"/>
+              <a:rPr lang="en-US" smtClean="0"/>
               <a:t>Second level</a:t>
             </a:r>
           </a:p>
           <a:p>
             <a:pPr lvl="2"/>
             <a:r>
-              <a:rPr lang="en-US"/>
+              <a:rPr lang="en-US" smtClean="0"/>
               <a:t>Third level</a:t>
             </a:r>
           </a:p>
           <a:p>
             <a:pPr lvl="3"/>
             <a:r>
-              <a:rPr lang="en-US"/>
+              <a:rPr lang="en-US" smtClean="0"/>
               <a:t>Fourth level</a:t>
             </a:r>
           </a:p>
           <a:p>
             <a:pPr lvl="4"/>
             <a:r>
-              <a:rPr lang="en-US"/>
+              <a:rPr lang="en-US" smtClean="0"/>
               <a:t>Fifth level</a:t>
             </a:r>
+            <a:endParaRPr lang="en-US"/>
           </a:p>
         </p:txBody>
       </p:sp>
@@ -831,7 +472,7 @@
           <a:p>
             <a:fld id="{5BCAD085-E8A6-8845-BD4E-CB4CCA059FC4}" type="datetimeFigureOut">
               <a:rPr lang="en-US" smtClean="0"/>
-              <a:t>5/16/2026</a:t>
+              <a:t>1/27/13</a:t>
             </a:fld>
             <a:endParaRPr lang="en-US"/>
           </a:p>
@@ -873,7 +514,7 @@
           <a:p>
             <a:fld id="{C1FF6DA9-008F-8B48-92A6-B652298478BF}" type="slidenum">
               <a:rPr lang="en-US" smtClean="0"/>
-              <a:t>‹N°›</a:t>
+              <a:t>‹#›</a:t>
             </a:fld>
             <a:endParaRPr lang="en-US"/>
           </a:p>
@@ -930,9 +571,10 @@
           <a:lstStyle/>
           <a:p>
             <a:r>
-              <a:rPr lang="en-US"/>
+              <a:rPr lang="en-US" smtClean="0"/>
               <a:t>Click to edit Master title style</a:t>
             </a:r>
+            <a:endParaRPr lang="en-US"/>
           </a:p>
         </p:txBody>
       </p:sp>
@@ -958,37 +600,38 @@
           <a:p>
             <a:pPr lvl="0"/>
             <a:r>
-              <a:rPr lang="en-US"/>
+              <a:rPr lang="en-US" smtClean="0"/>
               <a:t>Click to edit Master text styles</a:t>
             </a:r>
           </a:p>
           <a:p>
             <a:pPr lvl="1"/>
             <a:r>
-              <a:rPr lang="en-US"/>
+              <a:rPr lang="en-US" smtClean="0"/>
               <a:t>Second level</a:t>
             </a:r>
           </a:p>
           <a:p>
             <a:pPr lvl="2"/>
             <a:r>
-              <a:rPr lang="en-US"/>
+              <a:rPr lang="en-US" smtClean="0"/>
               <a:t>Third level</a:t>
             </a:r>
           </a:p>
           <a:p>
             <a:pPr lvl="3"/>
             <a:r>
-              <a:rPr lang="en-US"/>
+              <a:rPr lang="en-US" smtClean="0"/>
               <a:t>Fourth level</a:t>
             </a:r>
           </a:p>
           <a:p>
             <a:pPr lvl="4"/>
             <a:r>
-              <a:rPr lang="en-US"/>
+              <a:rPr lang="en-US" smtClean="0"/>
               <a:t>Fifth level</a:t>
             </a:r>
+            <a:endParaRPr lang="en-US"/>
           </a:p>
         </p:txBody>
       </p:sp>
@@ -1009,7 +652,7 @@
           <a:p>
             <a:fld id="{5BCAD085-E8A6-8845-BD4E-CB4CCA059FC4}" type="datetimeFigureOut">
               <a:rPr lang="en-US" smtClean="0"/>
-              <a:t>5/16/2026</a:t>
+              <a:t>1/27/13</a:t>
             </a:fld>
             <a:endParaRPr lang="en-US"/>
           </a:p>
@@ -1051,7 +694,7 @@
           <a:p>
             <a:fld id="{C1FF6DA9-008F-8B48-92A6-B652298478BF}" type="slidenum">
               <a:rPr lang="en-US" smtClean="0"/>
-              <a:t>‹N°›</a:t>
+              <a:t>‹#›</a:t>
             </a:fld>
             <a:endParaRPr lang="en-US"/>
           </a:p>
@@ -1103,9 +746,10 @@
           <a:lstStyle/>
           <a:p>
             <a:r>
-              <a:rPr lang="en-US"/>
+              <a:rPr lang="en-US" smtClean="0"/>
               <a:t>Click to edit Master title style</a:t>
             </a:r>
+            <a:endParaRPr lang="en-US"/>
           </a:p>
         </p:txBody>
       </p:sp>
@@ -1126,37 +770,38 @@
           <a:p>
             <a:pPr lvl="0"/>
             <a:r>
-              <a:rPr lang="en-US"/>
+              <a:rPr lang="en-US" smtClean="0"/>
               <a:t>Click to edit Master text styles</a:t>
             </a:r>
           </a:p>
           <a:p>
             <a:pPr lvl="1"/>
             <a:r>
-              <a:rPr lang="en-US"/>
+              <a:rPr lang="en-US" smtClean="0"/>
               <a:t>Second level</a:t>
             </a:r>
           </a:p>
           <a:p>
             <a:pPr lvl="2"/>
             <a:r>
-              <a:rPr lang="en-US"/>
+              <a:rPr lang="en-US" smtClean="0"/>
               <a:t>Third level</a:t>
             </a:r>
           </a:p>
           <a:p>
             <a:pPr lvl="3"/>
             <a:r>
-              <a:rPr lang="en-US"/>
+              <a:rPr lang="en-US" smtClean="0"/>
               <a:t>Fourth level</a:t>
             </a:r>
           </a:p>
           <a:p>
             <a:pPr lvl="4"/>
             <a:r>
-              <a:rPr lang="en-US"/>
+              <a:rPr lang="en-US" smtClean="0"/>
               <a:t>Fifth level</a:t>
             </a:r>
+            <a:endParaRPr lang="en-US"/>
           </a:p>
         </p:txBody>
       </p:sp>
@@ -1177,7 +822,7 @@
           <a:p>
             <a:fld id="{5BCAD085-E8A6-8845-BD4E-CB4CCA059FC4}" type="datetimeFigureOut">
               <a:rPr lang="en-US" smtClean="0"/>
-              <a:t>5/16/2026</a:t>
+              <a:t>1/27/13</a:t>
             </a:fld>
             <a:endParaRPr lang="en-US"/>
           </a:p>
@@ -1219,7 +864,7 @@
           <a:p>
             <a:fld id="{C1FF6DA9-008F-8B48-92A6-B652298478BF}" type="slidenum">
               <a:rPr lang="en-US" smtClean="0"/>
-              <a:t>‹N°›</a:t>
+              <a:t>‹#›</a:t>
             </a:fld>
             <a:endParaRPr lang="en-US"/>
           </a:p>
@@ -1280,9 +925,10 @@
           </a:lstStyle>
           <a:p>
             <a:r>
-              <a:rPr lang="en-US"/>
+              <a:rPr lang="en-US" smtClean="0"/>
               <a:t>Click to edit Master title style</a:t>
             </a:r>
+            <a:endParaRPr lang="en-US"/>
           </a:p>
         </p:txBody>
       </p:sp>
@@ -1399,7 +1045,7 @@
           <a:p>
             <a:pPr lvl="0"/>
             <a:r>
-              <a:rPr lang="en-US"/>
+              <a:rPr lang="en-US" smtClean="0"/>
               <a:t>Click to edit Master text styles</a:t>
             </a:r>
           </a:p>
@@ -1422,7 +1068,7 @@
           <a:p>
             <a:fld id="{5BCAD085-E8A6-8845-BD4E-CB4CCA059FC4}" type="datetimeFigureOut">
               <a:rPr lang="en-US" smtClean="0"/>
-              <a:t>5/16/2026</a:t>
+              <a:t>1/27/13</a:t>
             </a:fld>
             <a:endParaRPr lang="en-US"/>
           </a:p>
@@ -1464,7 +1110,7 @@
           <a:p>
             <a:fld id="{C1FF6DA9-008F-8B48-92A6-B652298478BF}" type="slidenum">
               <a:rPr lang="en-US" smtClean="0"/>
-              <a:t>‹N°›</a:t>
+              <a:t>‹#›</a:t>
             </a:fld>
             <a:endParaRPr lang="en-US"/>
           </a:p>
@@ -1516,9 +1162,10 @@
           <a:lstStyle/>
           <a:p>
             <a:r>
-              <a:rPr lang="en-US"/>
+              <a:rPr lang="en-US" smtClean="0"/>
               <a:t>Click to edit Master title style</a:t>
             </a:r>
+            <a:endParaRPr lang="en-US"/>
           </a:p>
         </p:txBody>
       </p:sp>
@@ -1572,37 +1219,38 @@
           <a:p>
             <a:pPr lvl="0"/>
             <a:r>
-              <a:rPr lang="en-US"/>
+              <a:rPr lang="en-US" smtClean="0"/>
               <a:t>Click to edit Master text styles</a:t>
             </a:r>
           </a:p>
           <a:p>
             <a:pPr lvl="1"/>
             <a:r>
-              <a:rPr lang="en-US"/>
+              <a:rPr lang="en-US" smtClean="0"/>
               <a:t>Second level</a:t>
             </a:r>
           </a:p>
           <a:p>
             <a:pPr lvl="2"/>
             <a:r>
-              <a:rPr lang="en-US"/>
+              <a:rPr lang="en-US" smtClean="0"/>
               <a:t>Third level</a:t>
             </a:r>
           </a:p>
           <a:p>
             <a:pPr lvl="3"/>
             <a:r>
-              <a:rPr lang="en-US"/>
+              <a:rPr lang="en-US" smtClean="0"/>
               <a:t>Fourth level</a:t>
             </a:r>
           </a:p>
           <a:p>
             <a:pPr lvl="4"/>
             <a:r>
-              <a:rPr lang="en-US"/>
+              <a:rPr lang="en-US" smtClean="0"/>
               <a:t>Fifth level</a:t>
             </a:r>
+            <a:endParaRPr lang="en-US"/>
           </a:p>
         </p:txBody>
       </p:sp>
@@ -1656,37 +1304,38 @@
           <a:p>
             <a:pPr lvl="0"/>
             <a:r>
-              <a:rPr lang="en-US"/>
+              <a:rPr lang="en-US" smtClean="0"/>
               <a:t>Click to edit Master text styles</a:t>
             </a:r>
           </a:p>
           <a:p>
             <a:pPr lvl="1"/>
             <a:r>
-              <a:rPr lang="en-US"/>
+              <a:rPr lang="en-US" smtClean="0"/>
               <a:t>Second level</a:t>
             </a:r>
           </a:p>
           <a:p>
             <a:pPr lvl="2"/>
             <a:r>
-              <a:rPr lang="en-US"/>
+              <a:rPr lang="en-US" smtClean="0"/>
               <a:t>Third level</a:t>
             </a:r>
           </a:p>
           <a:p>
             <a:pPr lvl="3"/>
             <a:r>
-              <a:rPr lang="en-US"/>
+              <a:rPr lang="en-US" smtClean="0"/>
               <a:t>Fourth level</a:t>
             </a:r>
           </a:p>
           <a:p>
             <a:pPr lvl="4"/>
             <a:r>
-              <a:rPr lang="en-US"/>
+              <a:rPr lang="en-US" smtClean="0"/>
               <a:t>Fifth level</a:t>
             </a:r>
+            <a:endParaRPr lang="en-US"/>
           </a:p>
         </p:txBody>
       </p:sp>
@@ -1707,7 +1356,7 @@
           <a:p>
             <a:fld id="{5BCAD085-E8A6-8845-BD4E-CB4CCA059FC4}" type="datetimeFigureOut">
               <a:rPr lang="en-US" smtClean="0"/>
-              <a:t>5/16/2026</a:t>
+              <a:t>1/27/13</a:t>
             </a:fld>
             <a:endParaRPr lang="en-US"/>
           </a:p>
@@ -1749,7 +1398,7 @@
           <a:p>
             <a:fld id="{C1FF6DA9-008F-8B48-92A6-B652298478BF}" type="slidenum">
               <a:rPr lang="en-US" smtClean="0"/>
-              <a:t>‹N°›</a:t>
+              <a:t>‹#›</a:t>
             </a:fld>
             <a:endParaRPr lang="en-US"/>
           </a:p>
@@ -1805,9 +1454,10 @@
           </a:lstStyle>
           <a:p>
             <a:r>
-              <a:rPr lang="en-US"/>
+              <a:rPr lang="en-US" smtClean="0"/>
               <a:t>Click to edit Master title style</a:t>
             </a:r>
+            <a:endParaRPr lang="en-US"/>
           </a:p>
         </p:txBody>
       </p:sp>
@@ -1870,7 +1520,7 @@
           <a:p>
             <a:pPr lvl="0"/>
             <a:r>
-              <a:rPr lang="en-US"/>
+              <a:rPr lang="en-US" smtClean="0"/>
               <a:t>Click to edit Master text styles</a:t>
             </a:r>
           </a:p>
@@ -1926,37 +1576,38 @@
           <a:p>
             <a:pPr lvl="0"/>
             <a:r>
-              <a:rPr lang="en-US"/>
+              <a:rPr lang="en-US" smtClean="0"/>
               <a:t>Click to edit Master text styles</a:t>
             </a:r>
           </a:p>
           <a:p>
             <a:pPr lvl="1"/>
             <a:r>
-              <a:rPr lang="en-US"/>
+              <a:rPr lang="en-US" smtClean="0"/>
               <a:t>Second level</a:t>
             </a:r>
           </a:p>
           <a:p>
             <a:pPr lvl="2"/>
             <a:r>
-              <a:rPr lang="en-US"/>
+              <a:rPr lang="en-US" smtClean="0"/>
               <a:t>Third level</a:t>
             </a:r>
           </a:p>
           <a:p>
             <a:pPr lvl="3"/>
             <a:r>
-              <a:rPr lang="en-US"/>
+              <a:rPr lang="en-US" smtClean="0"/>
               <a:t>Fourth level</a:t>
             </a:r>
           </a:p>
           <a:p>
             <a:pPr lvl="4"/>
             <a:r>
-              <a:rPr lang="en-US"/>
+              <a:rPr lang="en-US" smtClean="0"/>
               <a:t>Fifth level</a:t>
             </a:r>
+            <a:endParaRPr lang="en-US"/>
           </a:p>
         </p:txBody>
       </p:sp>
@@ -2019,7 +1670,7 @@
           <a:p>
             <a:pPr lvl="0"/>
             <a:r>
-              <a:rPr lang="en-US"/>
+              <a:rPr lang="en-US" smtClean="0"/>
               <a:t>Click to edit Master text styles</a:t>
             </a:r>
           </a:p>
@@ -2075,37 +1726,38 @@
           <a:p>
             <a:pPr lvl="0"/>
             <a:r>
-              <a:rPr lang="en-US"/>
+              <a:rPr lang="en-US" smtClean="0"/>
               <a:t>Click to edit Master text styles</a:t>
             </a:r>
           </a:p>
           <a:p>
             <a:pPr lvl="1"/>
             <a:r>
-              <a:rPr lang="en-US"/>
+              <a:rPr lang="en-US" smtClean="0"/>
               <a:t>Second level</a:t>
             </a:r>
           </a:p>
           <a:p>
             <a:pPr lvl="2"/>
             <a:r>
-              <a:rPr lang="en-US"/>
+              <a:rPr lang="en-US" smtClean="0"/>
               <a:t>Third level</a:t>
             </a:r>
           </a:p>
           <a:p>
             <a:pPr lvl="3"/>
             <a:r>
-              <a:rPr lang="en-US"/>
+              <a:rPr lang="en-US" smtClean="0"/>
               <a:t>Fourth level</a:t>
             </a:r>
           </a:p>
           <a:p>
             <a:pPr lvl="4"/>
             <a:r>
-              <a:rPr lang="en-US"/>
+              <a:rPr lang="en-US" smtClean="0"/>
               <a:t>Fifth level</a:t>
             </a:r>
+            <a:endParaRPr lang="en-US"/>
           </a:p>
         </p:txBody>
       </p:sp>
@@ -2126,7 +1778,7 @@
           <a:p>
             <a:fld id="{5BCAD085-E8A6-8845-BD4E-CB4CCA059FC4}" type="datetimeFigureOut">
               <a:rPr lang="en-US" smtClean="0"/>
-              <a:t>5/16/2026</a:t>
+              <a:t>1/27/13</a:t>
             </a:fld>
             <a:endParaRPr lang="en-US"/>
           </a:p>
@@ -2168,7 +1820,7 @@
           <a:p>
             <a:fld id="{C1FF6DA9-008F-8B48-92A6-B652298478BF}" type="slidenum">
               <a:rPr lang="en-US" smtClean="0"/>
-              <a:t>‹N°›</a:t>
+              <a:t>‹#›</a:t>
             </a:fld>
             <a:endParaRPr lang="en-US"/>
           </a:p>
@@ -2220,9 +1872,10 @@
           <a:lstStyle/>
           <a:p>
             <a:r>
-              <a:rPr lang="en-US"/>
+              <a:rPr lang="en-US" smtClean="0"/>
               <a:t>Click to edit Master title style</a:t>
             </a:r>
+            <a:endParaRPr lang="en-US"/>
           </a:p>
         </p:txBody>
       </p:sp>
@@ -2243,7 +1896,7 @@
           <a:p>
             <a:fld id="{5BCAD085-E8A6-8845-BD4E-CB4CCA059FC4}" type="datetimeFigureOut">
               <a:rPr lang="en-US" smtClean="0"/>
-              <a:t>5/16/2026</a:t>
+              <a:t>1/27/13</a:t>
             </a:fld>
             <a:endParaRPr lang="en-US"/>
           </a:p>
@@ -2285,7 +1938,7 @@
           <a:p>
             <a:fld id="{C1FF6DA9-008F-8B48-92A6-B652298478BF}" type="slidenum">
               <a:rPr lang="en-US" smtClean="0"/>
-              <a:t>‹N°›</a:t>
+              <a:t>‹#›</a:t>
             </a:fld>
             <a:endParaRPr lang="en-US"/>
           </a:p>
@@ -2338,7 +1991,7 @@
           <a:p>
             <a:fld id="{5BCAD085-E8A6-8845-BD4E-CB4CCA059FC4}" type="datetimeFigureOut">
               <a:rPr lang="en-US" smtClean="0"/>
-              <a:t>5/16/2026</a:t>
+              <a:t>1/27/13</a:t>
             </a:fld>
             <a:endParaRPr lang="en-US"/>
           </a:p>
@@ -2380,7 +2033,7 @@
           <a:p>
             <a:fld id="{C1FF6DA9-008F-8B48-92A6-B652298478BF}" type="slidenum">
               <a:rPr lang="en-US" smtClean="0"/>
-              <a:t>‹N°›</a:t>
+              <a:t>‹#›</a:t>
             </a:fld>
             <a:endParaRPr lang="en-US"/>
           </a:p>
@@ -2441,9 +2094,10 @@
           </a:lstStyle>
           <a:p>
             <a:r>
-              <a:rPr lang="en-US"/>
+              <a:rPr lang="en-US" smtClean="0"/>
               <a:t>Click to edit Master title style</a:t>
             </a:r>
+            <a:endParaRPr lang="en-US"/>
           </a:p>
         </p:txBody>
       </p:sp>
@@ -2497,37 +2151,38 @@
           <a:p>
             <a:pPr lvl="0"/>
             <a:r>
-              <a:rPr lang="en-US"/>
+              <a:rPr lang="en-US" smtClean="0"/>
               <a:t>Click to edit Master text styles</a:t>
             </a:r>
           </a:p>
           <a:p>
             <a:pPr lvl="1"/>
             <a:r>
-              <a:rPr lang="en-US"/>
+              <a:rPr lang="en-US" smtClean="0"/>
               <a:t>Second level</a:t>
             </a:r>
           </a:p>
           <a:p>
             <a:pPr lvl="2"/>
             <a:r>
-              <a:rPr lang="en-US"/>
+              <a:rPr lang="en-US" smtClean="0"/>
               <a:t>Third level</a:t>
             </a:r>
           </a:p>
           <a:p>
             <a:pPr lvl="3"/>
             <a:r>
-              <a:rPr lang="en-US"/>
+              <a:rPr lang="en-US" smtClean="0"/>
               <a:t>Fourth level</a:t>
             </a:r>
           </a:p>
           <a:p>
             <a:pPr lvl="4"/>
             <a:r>
-              <a:rPr lang="en-US"/>
+              <a:rPr lang="en-US" smtClean="0"/>
               <a:t>Fifth level</a:t>
             </a:r>
+            <a:endParaRPr lang="en-US"/>
           </a:p>
         </p:txBody>
       </p:sp>
@@ -2590,7 +2245,7 @@
           <a:p>
             <a:pPr lvl="0"/>
             <a:r>
-              <a:rPr lang="en-US"/>
+              <a:rPr lang="en-US" smtClean="0"/>
               <a:t>Click to edit Master text styles</a:t>
             </a:r>
           </a:p>
@@ -2613,7 +2268,7 @@
           <a:p>
             <a:fld id="{5BCAD085-E8A6-8845-BD4E-CB4CCA059FC4}" type="datetimeFigureOut">
               <a:rPr lang="en-US" smtClean="0"/>
-              <a:t>5/16/2026</a:t>
+              <a:t>1/27/13</a:t>
             </a:fld>
             <a:endParaRPr lang="en-US"/>
           </a:p>
@@ -2655,7 +2310,7 @@
           <a:p>
             <a:fld id="{C1FF6DA9-008F-8B48-92A6-B652298478BF}" type="slidenum">
               <a:rPr lang="en-US" smtClean="0"/>
-              <a:t>‹N°›</a:t>
+              <a:t>‹#›</a:t>
             </a:fld>
             <a:endParaRPr lang="en-US"/>
           </a:p>
@@ -2716,9 +2371,10 @@
           </a:lstStyle>
           <a:p>
             <a:r>
-              <a:rPr lang="en-US"/>
+              <a:rPr lang="en-US" smtClean="0"/>
               <a:t>Click to edit Master title style</a:t>
             </a:r>
+            <a:endParaRPr lang="en-US"/>
           </a:p>
         </p:txBody>
       </p:sp>
@@ -2842,7 +2498,7 @@
           <a:p>
             <a:pPr lvl="0"/>
             <a:r>
-              <a:rPr lang="en-US"/>
+              <a:rPr lang="en-US" smtClean="0"/>
               <a:t>Click to edit Master text styles</a:t>
             </a:r>
           </a:p>
@@ -2865,7 +2521,7 @@
           <a:p>
             <a:fld id="{5BCAD085-E8A6-8845-BD4E-CB4CCA059FC4}" type="datetimeFigureOut">
               <a:rPr lang="en-US" smtClean="0"/>
-              <a:t>5/16/2026</a:t>
+              <a:t>1/27/13</a:t>
             </a:fld>
             <a:endParaRPr lang="en-US"/>
           </a:p>
@@ -2907,7 +2563,7 @@
           <a:p>
             <a:fld id="{C1FF6DA9-008F-8B48-92A6-B652298478BF}" type="slidenum">
               <a:rPr lang="en-US" smtClean="0"/>
-              <a:t>‹N°›</a:t>
+              <a:t>‹#›</a:t>
             </a:fld>
             <a:endParaRPr lang="en-US"/>
           </a:p>
@@ -2974,9 +2630,10 @@
           <a:lstStyle/>
           <a:p>
             <a:r>
-              <a:rPr lang="en-US"/>
+              <a:rPr lang="en-US" smtClean="0"/>
               <a:t>Click to edit Master title style</a:t>
             </a:r>
+            <a:endParaRPr lang="en-US"/>
           </a:p>
         </p:txBody>
       </p:sp>
@@ -3007,37 +2664,38 @@
           <a:p>
             <a:pPr lvl="0"/>
             <a:r>
-              <a:rPr lang="en-US"/>
+              <a:rPr lang="en-US" smtClean="0"/>
               <a:t>Click to edit Master text styles</a:t>
             </a:r>
           </a:p>
           <a:p>
             <a:pPr lvl="1"/>
             <a:r>
-              <a:rPr lang="en-US"/>
+              <a:rPr lang="en-US" smtClean="0"/>
               <a:t>Second level</a:t>
             </a:r>
           </a:p>
           <a:p>
             <a:pPr lvl="2"/>
             <a:r>
-              <a:rPr lang="en-US"/>
+              <a:rPr lang="en-US" smtClean="0"/>
               <a:t>Third level</a:t>
             </a:r>
           </a:p>
           <a:p>
             <a:pPr lvl="3"/>
             <a:r>
-              <a:rPr lang="en-US"/>
+              <a:rPr lang="en-US" smtClean="0"/>
               <a:t>Fourth level</a:t>
             </a:r>
           </a:p>
           <a:p>
             <a:pPr lvl="4"/>
             <a:r>
-              <a:rPr lang="en-US"/>
+              <a:rPr lang="en-US" smtClean="0"/>
               <a:t>Fifth level</a:t>
             </a:r>
+            <a:endParaRPr lang="en-US"/>
           </a:p>
         </p:txBody>
       </p:sp>
@@ -3076,7 +2734,7 @@
           <a:p>
             <a:fld id="{5BCAD085-E8A6-8845-BD4E-CB4CCA059FC4}" type="datetimeFigureOut">
               <a:rPr lang="en-US" smtClean="0"/>
-              <a:t>5/16/2026</a:t>
+              <a:t>1/27/13</a:t>
             </a:fld>
             <a:endParaRPr lang="en-US"/>
           </a:p>
@@ -3154,7 +2812,7 @@
           <a:p>
             <a:fld id="{C1FF6DA9-008F-8B48-92A6-B652298478BF}" type="slidenum">
               <a:rPr lang="en-US" smtClean="0"/>
-              <a:t>‹N°›</a:t>
+              <a:t>‹#›</a:t>
             </a:fld>
             <a:endParaRPr lang="en-US"/>
           </a:p>
@@ -3437,6 +3095,14 @@
 <file path=ppt/slides/slide1.xml><?xml version="1.0" encoding="utf-8"?>
 <p:sld xmlns:a="http://schemas.openxmlformats.org/drawingml/2006/main" xmlns:p="http://schemas.openxmlformats.org/presentationml/2006/main" xmlns:r="http://schemas.openxmlformats.org/officeDocument/2006/relationships">
   <p:cSld>
+    <p:bg>
+      <p:bgPr>
+        <a:solidFill>
+          <a:srgbClr val="1A5C33"/>
+        </a:solidFill>
+        <a:effectLst/>
+      </p:bgPr>
+    </p:bg>
     <p:spTree>
       <p:nvGrpSpPr>
         <p:cNvPr id="1" name=""/>
@@ -3446,56 +3112,14 @@
       <p:grpSpPr/>
       <p:sp>
         <p:nvSpPr>
-          <p:cNvPr id="2" name="Title 1"/>
-          <p:cNvSpPr>
-            <a:spLocks noGrp="1"/>
-          </p:cNvSpPr>
-          <p:nvPr>
-            <p:ph type="ctrTitle"/>
-          </p:nvPr>
-        </p:nvSpPr>
-        <p:spPr/>
-        <p:txBody>
-          <a:bodyPr/>
-          <a:lstStyle/>
-          <a:p>
-            <a:r>
-              <a:t>Introduction aux TIC</a:t>
-            </a:r>
-          </a:p>
-        </p:txBody>
-      </p:sp>
-      <p:sp>
-        <p:nvSpPr>
-          <p:cNvPr id="3" name="Subtitle 2"/>
-          <p:cNvSpPr>
-            <a:spLocks noGrp="1"/>
-          </p:cNvSpPr>
-          <p:nvPr>
-            <p:ph type="subTitle" idx="1"/>
-          </p:nvPr>
-        </p:nvSpPr>
-        <p:spPr/>
-        <p:txBody>
-          <a:bodyPr/>
-          <a:lstStyle/>
-          <a:p>
-            <a:r>
-              <a:t>Cours TIC 01 | 1h30 (90 min) | BELACEL Madani</a:t>
-            </a:r>
-          </a:p>
-        </p:txBody>
-      </p:sp>
-      <p:sp>
-        <p:nvSpPr>
-          <p:cNvPr id="4" name="TextBox 3"/>
+          <p:cNvPr id="2" name="TextBox 1"/>
           <p:cNvSpPr txBox="1"/>
           <p:nvPr/>
         </p:nvSpPr>
         <p:spPr>
           <a:xfrm>
-            <a:off x="365760" y="6446520"/>
-            <a:ext cx="8412480" cy="320040"/>
+            <a:off x="731520" y="1371600"/>
+            <a:ext cx="7680960" cy="1371600"/>
           </a:xfrm>
           <a:prstGeom prst="rect">
             <a:avLst/>
@@ -3503,20 +3127,90 @@
           <a:noFill/>
         </p:spPr>
         <p:txBody>
-          <a:bodyPr wrap="none">
+          <a:bodyPr wrap="square">
             <a:spAutoFit/>
           </a:bodyPr>
           <a:lstStyle/>
           <a:p>
             <a:pPr algn="ctr">
-              <a:defRPr sz="900">
-                <a:solidFill>
-                  <a:srgbClr val="404040"/>
-                </a:solidFill>
-              </a:defRPr>
-            </a:pPr>
-            <a:r>
-              <a:t>Cours TIC 01  •  Diapositive 1/10</a:t>
+              <a:defRPr sz="3200" b="1">
+                <a:solidFill>
+                  <a:srgbClr val="FFFFFF"/>
+                </a:solidFill>
+              </a:defRPr>
+            </a:pPr>
+            <a:r>
+              <a:t>Cours TIC 01 — Introduction aux Techniques de l'Information et de la Communication</a:t>
+            </a:r>
+          </a:p>
+        </p:txBody>
+      </p:sp>
+      <p:sp>
+        <p:nvSpPr>
+          <p:cNvPr id="3" name="TextBox 2"/>
+          <p:cNvSpPr txBox="1"/>
+          <p:nvPr/>
+        </p:nvSpPr>
+        <p:spPr>
+          <a:xfrm>
+            <a:off x="731520" y="2926080"/>
+            <a:ext cx="7680960" cy="548640"/>
+          </a:xfrm>
+          <a:prstGeom prst="rect">
+            <a:avLst/>
+          </a:prstGeom>
+          <a:noFill/>
+        </p:spPr>
+        <p:txBody>
+          <a:bodyPr wrap="square">
+            <a:spAutoFit/>
+          </a:bodyPr>
+          <a:lstStyle/>
+          <a:p>
+            <a:pPr algn="ctr">
+              <a:defRPr sz="2000" b="0">
+                <a:solidFill>
+                  <a:srgbClr val="C5D9C7"/>
+                </a:solidFill>
+              </a:defRPr>
+            </a:pPr>
+            <a:r>
+              <a:t>Module TIC — Dr. BELACEL Madani</a:t>
+            </a:r>
+          </a:p>
+        </p:txBody>
+      </p:sp>
+      <p:sp>
+        <p:nvSpPr>
+          <p:cNvPr id="4" name="TextBox 3"/>
+          <p:cNvSpPr txBox="1"/>
+          <p:nvPr/>
+        </p:nvSpPr>
+        <p:spPr>
+          <a:xfrm>
+            <a:off x="731520" y="3657600"/>
+            <a:ext cx="7680960" cy="457200"/>
+          </a:xfrm>
+          <a:prstGeom prst="rect">
+            <a:avLst/>
+          </a:prstGeom>
+          <a:noFill/>
+        </p:spPr>
+        <p:txBody>
+          <a:bodyPr wrap="square">
+            <a:spAutoFit/>
+          </a:bodyPr>
+          <a:lstStyle/>
+          <a:p>
+            <a:pPr algn="ctr">
+              <a:defRPr sz="1600" b="0">
+                <a:solidFill>
+                  <a:srgbClr val="A0CFA0"/>
+                </a:solidFill>
+              </a:defRPr>
+            </a:pPr>
+            <a:r>
+              <a:t>Université de Mostaganem — MCB</a:t>
             </a:r>
           </a:p>
         </p:txBody>
@@ -3526,15 +3220,20 @@
   <p:clrMapOvr>
     <a:masterClrMapping/>
   </p:clrMapOvr>
-  <p:transition spd="med">
-    <p:fade/>
-  </p:transition>
 </p:sld>
 </file>
 
 <file path=ppt/slides/slide10.xml><?xml version="1.0" encoding="utf-8"?>
 <p:sld xmlns:a="http://schemas.openxmlformats.org/drawingml/2006/main" xmlns:p="http://schemas.openxmlformats.org/presentationml/2006/main" xmlns:r="http://schemas.openxmlformats.org/officeDocument/2006/relationships">
   <p:cSld>
+    <p:bg>
+      <p:bgPr>
+        <a:solidFill>
+          <a:srgbClr val="FFFFFF"/>
+        </a:solidFill>
+        <a:effectLst/>
+      </p:bgPr>
+    </p:bg>
     <p:spTree>
       <p:nvGrpSpPr>
         <p:cNvPr id="1" name=""/>
@@ -3544,83 +3243,57 @@
       <p:grpSpPr/>
       <p:sp>
         <p:nvSpPr>
-          <p:cNvPr id="2" name="Title 1"/>
-          <p:cNvSpPr>
-            <a:spLocks noGrp="1"/>
-          </p:cNvSpPr>
-          <p:nvPr>
-            <p:ph type="title"/>
-          </p:nvPr>
-        </p:nvSpPr>
-        <p:spPr/>
-        <p:txBody>
-          <a:bodyPr/>
-          <a:lstStyle/>
-          <a:p>
-            <a:r>
-              <a:t>Conclusion</a:t>
-            </a:r>
-          </a:p>
-        </p:txBody>
-      </p:sp>
-      <p:sp>
-        <p:nvSpPr>
-          <p:cNvPr id="3" name="Content Placeholder 2"/>
-          <p:cNvSpPr>
-            <a:spLocks noGrp="1"/>
-          </p:cNvSpPr>
-          <p:nvPr>
-            <p:ph idx="1"/>
-          </p:nvPr>
-        </p:nvSpPr>
-        <p:spPr/>
-        <p:txBody>
-          <a:bodyPr/>
-          <a:lstStyle/>
-          <a:p>
-            <a:pPr>
-              <a:defRPr sz="2000"/>
-            </a:pPr>
-            <a:r>
-              <a:t>✅ Compétence transversale</a:t>
-            </a:r>
-          </a:p>
-          <a:p>
-            <a:pPr>
-              <a:defRPr sz="2000"/>
-            </a:pPr>
-            <a:r>
-              <a:t>✅ TD 01 — 1h30</a:t>
-            </a:r>
-          </a:p>
-          <a:p>
-            <a:pPr>
-              <a:defRPr sz="2000"/>
-            </a:pPr>
-            <a:r>
-              <a:t>✅ Prochain : Ordinateur</a:t>
-            </a:r>
-          </a:p>
-          <a:p>
-            <a:pPr>
-              <a:defRPr sz="2000"/>
-            </a:pPr>
-            <a:r>
-              <a:t>✅ Questions ?</a:t>
-            </a:r>
-          </a:p>
-        </p:txBody>
-      </p:sp>
-      <p:sp>
-        <p:nvSpPr>
-          <p:cNvPr id="4" name="TextBox 3"/>
+          <p:cNvPr id="2" name="Rectangle 1"/>
+          <p:cNvSpPr/>
+          <p:nvPr/>
+        </p:nvSpPr>
+        <p:spPr>
+          <a:xfrm>
+            <a:off x="0" y="0"/>
+            <a:ext cx="109728" cy="6858000"/>
+          </a:xfrm>
+          <a:prstGeom prst="rect">
+            <a:avLst/>
+          </a:prstGeom>
+          <a:solidFill>
+            <a:srgbClr val="2C6E49"/>
+          </a:solidFill>
+          <a:ln>
+            <a:noFill/>
+          </a:ln>
+        </p:spPr>
+        <p:style>
+          <a:lnRef idx="1">
+            <a:schemeClr val="accent1"/>
+          </a:lnRef>
+          <a:fillRef idx="3">
+            <a:schemeClr val="accent1"/>
+          </a:fillRef>
+          <a:effectRef idx="2">
+            <a:schemeClr val="accent1"/>
+          </a:effectRef>
+          <a:fontRef idx="minor">
+            <a:schemeClr val="lt1"/>
+          </a:fontRef>
+        </p:style>
+        <p:txBody>
+          <a:bodyPr rtlCol="0" anchor="ctr"/>
+          <a:lstStyle/>
+          <a:p>
+            <a:pPr algn="ctr"/>
+          </a:p>
+        </p:txBody>
+      </p:sp>
+      <p:sp>
+        <p:nvSpPr>
+          <p:cNvPr id="3" name="TextBox 2"/>
           <p:cNvSpPr txBox="1"/>
           <p:nvPr/>
         </p:nvSpPr>
         <p:spPr>
           <a:xfrm>
-            <a:off x="365760" y="6446520"/>
-            <a:ext cx="8412480" cy="320040"/>
+            <a:off x="457200" y="365760"/>
+            <a:ext cx="8229600" cy="640080"/>
           </a:xfrm>
           <a:prstGeom prst="rect">
             <a:avLst/>
@@ -3628,20 +3301,88 @@
           <a:noFill/>
         </p:spPr>
         <p:txBody>
-          <a:bodyPr wrap="none">
+          <a:bodyPr wrap="square">
             <a:spAutoFit/>
           </a:bodyPr>
           <a:lstStyle/>
           <a:p>
-            <a:pPr algn="ctr">
-              <a:defRPr sz="900">
-                <a:solidFill>
-                  <a:srgbClr val="404040"/>
-                </a:solidFill>
-              </a:defRPr>
-            </a:pPr>
-            <a:r>
-              <a:t>Cours TIC 01  •  Diapositive 10/10</a:t>
+            <a:pPr algn="l">
+              <a:defRPr sz="2200" b="1">
+                <a:solidFill>
+                  <a:srgbClr val="1A5C33"/>
+                </a:solidFill>
+              </a:defRPr>
+            </a:pPr>
+            <a:r>
+              <a:t>Convergence de trois domaines</a:t>
+            </a:r>
+          </a:p>
+        </p:txBody>
+      </p:sp>
+      <p:sp>
+        <p:nvSpPr>
+          <p:cNvPr id="4" name="TextBox 3"/>
+          <p:cNvSpPr txBox="1"/>
+          <p:nvPr/>
+        </p:nvSpPr>
+        <p:spPr>
+          <a:xfrm>
+            <a:off x="457200" y="1371600"/>
+            <a:ext cx="7772400" cy="4572000"/>
+          </a:xfrm>
+          <a:prstGeom prst="rect">
+            <a:avLst/>
+          </a:prstGeom>
+          <a:noFill/>
+        </p:spPr>
+        <p:txBody>
+          <a:bodyPr wrap="square">
+            <a:spAutoFit/>
+          </a:bodyPr>
+          <a:lstStyle/>
+          <a:p>
+            <a:pPr>
+              <a:spcAft>
+                <a:spcPts val="600"/>
+              </a:spcAft>
+              <a:defRPr sz="1400">
+                <a:solidFill>
+                  <a:srgbClr val="222222"/>
+                </a:solidFill>
+              </a:defRPr>
+            </a:pPr>
+            <a:r>
+              <a:t>• Informatique— traitement automatique de l'information (logiciels, bases de données)</a:t>
+            </a:r>
+          </a:p>
+          <a:p>
+            <a:pPr>
+              <a:spcAft>
+                <a:spcPts val="600"/>
+              </a:spcAft>
+              <a:defRPr sz="1400">
+                <a:solidFill>
+                  <a:srgbClr val="222222"/>
+                </a:solidFill>
+              </a:defRPr>
+            </a:pPr>
+            <a:r>
+              <a:t>• Télécommunications— transmission à distance (Internet, fibre, Wi-Fi)</a:t>
+            </a:r>
+          </a:p>
+          <a:p>
+            <a:pPr>
+              <a:spcAft>
+                <a:spcPts val="600"/>
+              </a:spcAft>
+              <a:defRPr sz="1400">
+                <a:solidFill>
+                  <a:srgbClr val="222222"/>
+                </a:solidFill>
+              </a:defRPr>
+            </a:pPr>
+            <a:r>
+              <a:t>• Audiovisuel et multimédia— texte, image, son, vidéo combinés</a:t>
             </a:r>
           </a:p>
         </p:txBody>
@@ -3651,15 +3392,20 @@
   <p:clrMapOvr>
     <a:masterClrMapping/>
   </p:clrMapOvr>
-  <p:transition spd="med">
-    <p:fade/>
-  </p:transition>
 </p:sld>
 </file>
 
-<file path=ppt/slides/slide2.xml><?xml version="1.0" encoding="utf-8"?>
+<file path=ppt/slides/slide11.xml><?xml version="1.0" encoding="utf-8"?>
 <p:sld xmlns:a="http://schemas.openxmlformats.org/drawingml/2006/main" xmlns:p="http://schemas.openxmlformats.org/presentationml/2006/main" xmlns:r="http://schemas.openxmlformats.org/officeDocument/2006/relationships">
   <p:cSld>
+    <p:bg>
+      <p:bgPr>
+        <a:solidFill>
+          <a:srgbClr val="FFFFFF"/>
+        </a:solidFill>
+        <a:effectLst/>
+      </p:bgPr>
+    </p:bg>
     <p:spTree>
       <p:nvGrpSpPr>
         <p:cNvPr id="1" name=""/>
@@ -3669,83 +3415,57 @@
       <p:grpSpPr/>
       <p:sp>
         <p:nvSpPr>
-          <p:cNvPr id="2" name="Title 1"/>
-          <p:cNvSpPr>
-            <a:spLocks noGrp="1"/>
-          </p:cNvSpPr>
-          <p:nvPr>
-            <p:ph type="title"/>
-          </p:nvPr>
-        </p:nvSpPr>
-        <p:spPr/>
-        <p:txBody>
-          <a:bodyPr/>
-          <a:lstStyle/>
-          <a:p>
-            <a:r>
-              <a:t>Objectifs pédagogiques</a:t>
-            </a:r>
-          </a:p>
-        </p:txBody>
-      </p:sp>
-      <p:sp>
-        <p:nvSpPr>
-          <p:cNvPr id="3" name="Content Placeholder 2"/>
-          <p:cNvSpPr>
-            <a:spLocks noGrp="1"/>
-          </p:cNvSpPr>
-          <p:nvPr>
-            <p:ph idx="1"/>
-          </p:nvPr>
-        </p:nvSpPr>
-        <p:spPr/>
-        <p:txBody>
-          <a:bodyPr/>
-          <a:lstStyle/>
-          <a:p>
-            <a:pPr>
-              <a:defRPr sz="2000"/>
-            </a:pPr>
-            <a:r>
-              <a:t>🎯 Définir les TIC et leurs 3 dimensions</a:t>
-            </a:r>
-          </a:p>
-          <a:p>
-            <a:pPr>
-              <a:defRPr sz="2000"/>
-            </a:pPr>
-            <a:r>
-              <a:t>🎯 Comprendre traitement / transmission / sauvegarde</a:t>
-            </a:r>
-          </a:p>
-          <a:p>
-            <a:pPr>
-              <a:defRPr sz="2000"/>
-            </a:pPr>
-            <a:r>
-              <a:t>🎯 Identifier services et applications</a:t>
-            </a:r>
-          </a:p>
-          <a:p>
-            <a:pPr>
-              <a:defRPr sz="2000"/>
-            </a:pPr>
-            <a:r>
-              <a:t>🎯 Compétences numériques en langues</a:t>
-            </a:r>
-          </a:p>
-        </p:txBody>
-      </p:sp>
-      <p:sp>
-        <p:nvSpPr>
-          <p:cNvPr id="4" name="TextBox 3"/>
+          <p:cNvPr id="2" name="Rectangle 1"/>
+          <p:cNvSpPr/>
+          <p:nvPr/>
+        </p:nvSpPr>
+        <p:spPr>
+          <a:xfrm>
+            <a:off x="0" y="0"/>
+            <a:ext cx="109728" cy="6858000"/>
+          </a:xfrm>
+          <a:prstGeom prst="rect">
+            <a:avLst/>
+          </a:prstGeom>
+          <a:solidFill>
+            <a:srgbClr val="2C6E49"/>
+          </a:solidFill>
+          <a:ln>
+            <a:noFill/>
+          </a:ln>
+        </p:spPr>
+        <p:style>
+          <a:lnRef idx="1">
+            <a:schemeClr val="accent1"/>
+          </a:lnRef>
+          <a:fillRef idx="3">
+            <a:schemeClr val="accent1"/>
+          </a:fillRef>
+          <a:effectRef idx="2">
+            <a:schemeClr val="accent1"/>
+          </a:effectRef>
+          <a:fontRef idx="minor">
+            <a:schemeClr val="lt1"/>
+          </a:fontRef>
+        </p:style>
+        <p:txBody>
+          <a:bodyPr rtlCol="0" anchor="ctr"/>
+          <a:lstStyle/>
+          <a:p>
+            <a:pPr algn="ctr"/>
+          </a:p>
+        </p:txBody>
+      </p:sp>
+      <p:sp>
+        <p:nvSpPr>
+          <p:cNvPr id="3" name="TextBox 2"/>
           <p:cNvSpPr txBox="1"/>
           <p:nvPr/>
         </p:nvSpPr>
         <p:spPr>
           <a:xfrm>
-            <a:off x="365760" y="6446520"/>
-            <a:ext cx="8412480" cy="320040"/>
+            <a:off x="457200" y="365760"/>
+            <a:ext cx="8229600" cy="640080"/>
           </a:xfrm>
           <a:prstGeom prst="rect">
             <a:avLst/>
@@ -3753,20 +3473,103 @@
           <a:noFill/>
         </p:spPr>
         <p:txBody>
-          <a:bodyPr wrap="none">
+          <a:bodyPr wrap="square">
             <a:spAutoFit/>
           </a:bodyPr>
           <a:lstStyle/>
           <a:p>
-            <a:pPr algn="ctr">
-              <a:defRPr sz="900">
-                <a:solidFill>
-                  <a:srgbClr val="404040"/>
-                </a:solidFill>
-              </a:defRPr>
-            </a:pPr>
-            <a:r>
-              <a:t>Cours TIC 01  •  Diapositive 2/10</a:t>
+            <a:pPr algn="l">
+              <a:defRPr sz="2200" b="1">
+                <a:solidFill>
+                  <a:srgbClr val="1A5C33"/>
+                </a:solidFill>
+              </a:defRPr>
+            </a:pPr>
+            <a:r>
+              <a:t>Définitions de référence</a:t>
+            </a:r>
+          </a:p>
+        </p:txBody>
+      </p:sp>
+      <p:sp>
+        <p:nvSpPr>
+          <p:cNvPr id="4" name="TextBox 3"/>
+          <p:cNvSpPr txBox="1"/>
+          <p:nvPr/>
+        </p:nvSpPr>
+        <p:spPr>
+          <a:xfrm>
+            <a:off x="457200" y="1371600"/>
+            <a:ext cx="7772400" cy="4572000"/>
+          </a:xfrm>
+          <a:prstGeom prst="rect">
+            <a:avLst/>
+          </a:prstGeom>
+          <a:noFill/>
+        </p:spPr>
+        <p:txBody>
+          <a:bodyPr wrap="square">
+            <a:spAutoFit/>
+          </a:bodyPr>
+          <a:lstStyle/>
+          <a:p>
+            <a:pPr>
+              <a:spcAft>
+                <a:spcPts val="600"/>
+              </a:spcAft>
+              <a:defRPr sz="1400">
+                <a:solidFill>
+                  <a:srgbClr val="222222"/>
+                </a:solidFill>
+              </a:defRPr>
+            </a:pPr>
+            <a:r>
+              <a:t>• UIT :« Les TIC englobent tous les outils et systèmes qui permettent demanipuler,stockerettransmettrel'information sous formenumérique. »</a:t>
+            </a:r>
+          </a:p>
+          <a:p>
+            <a:pPr>
+              <a:spcAft>
+                <a:spcPts val="600"/>
+              </a:spcAft>
+              <a:defRPr sz="1400">
+                <a:solidFill>
+                  <a:srgbClr val="222222"/>
+                </a:solidFill>
+              </a:defRPr>
+            </a:pPr>
+            <a:r>
+              <a:t>• UNESCO :informatique, audiovisuel, multimédia, Internet et télécommunications.</a:t>
+            </a:r>
+          </a:p>
+          <a:p>
+            <a:pPr>
+              <a:spcAft>
+                <a:spcPts val="600"/>
+              </a:spcAft>
+              <a:defRPr sz="1400">
+                <a:solidFill>
+                  <a:srgbClr val="222222"/>
+                </a:solidFill>
+              </a:defRPr>
+            </a:pPr>
+            <a:r>
+              <a:t>• En anglais :Information and Communication Technologies(ICT).</a:t>
+            </a:r>
+          </a:p>
+          <a:p>
+            <a:pPr>
+              <a:spcAft>
+                <a:spcPts val="600"/>
+              </a:spcAft>
+              <a:defRPr sz="1400">
+                <a:solidFill>
+                  <a:srgbClr val="222222"/>
+                </a:solidFill>
+              </a:defRPr>
+            </a:pPr>
+            <a:r>
+              <a:t>• À retenir :une TIC est unsystème(matériel + logiciel + réseau) qui rend l'information utilisable et partageable.</a:t>
             </a:r>
           </a:p>
         </p:txBody>
@@ -3776,15 +3579,20 @@
   <p:clrMapOvr>
     <a:masterClrMapping/>
   </p:clrMapOvr>
-  <p:transition spd="med">
-    <p:fade/>
-  </p:transition>
 </p:sld>
 </file>
 
-<file path=ppt/slides/slide3.xml><?xml version="1.0" encoding="utf-8"?>
+<file path=ppt/slides/slide12.xml><?xml version="1.0" encoding="utf-8"?>
 <p:sld xmlns:a="http://schemas.openxmlformats.org/drawingml/2006/main" xmlns:p="http://schemas.openxmlformats.org/presentationml/2006/main" xmlns:r="http://schemas.openxmlformats.org/officeDocument/2006/relationships">
   <p:cSld>
+    <p:bg>
+      <p:bgPr>
+        <a:solidFill>
+          <a:srgbClr val="FFFFFF"/>
+        </a:solidFill>
+        <a:effectLst/>
+      </p:bgPr>
+    </p:bg>
     <p:spTree>
       <p:nvGrpSpPr>
         <p:cNvPr id="1" name=""/>
@@ -3794,83 +3602,57 @@
       <p:grpSpPr/>
       <p:sp>
         <p:nvSpPr>
-          <p:cNvPr id="2" name="Title 1"/>
-          <p:cNvSpPr>
-            <a:spLocks noGrp="1"/>
-          </p:cNvSpPr>
-          <p:nvPr>
-            <p:ph type="title"/>
-          </p:nvPr>
-        </p:nvSpPr>
-        <p:spPr/>
-        <p:txBody>
-          <a:bodyPr/>
-          <a:lstStyle/>
-          <a:p>
-            <a:r>
-              <a:t>Plan du cours (1h30)</a:t>
-            </a:r>
-          </a:p>
-        </p:txBody>
-      </p:sp>
-      <p:sp>
-        <p:nvSpPr>
-          <p:cNvPr id="3" name="Content Placeholder 2"/>
-          <p:cNvSpPr>
-            <a:spLocks noGrp="1"/>
-          </p:cNvSpPr>
-          <p:nvPr>
-            <p:ph idx="1"/>
-          </p:nvPr>
-        </p:nvSpPr>
-        <p:spPr/>
-        <p:txBody>
-          <a:bodyPr/>
-          <a:lstStyle/>
-          <a:p>
-            <a:pPr>
-              <a:defRPr sz="2000"/>
-            </a:pPr>
-            <a:r>
-              <a:t>📋 9 parties — 90 minutes</a:t>
-            </a:r>
-          </a:p>
-          <a:p>
-            <a:pPr>
-              <a:defRPr sz="2000"/>
-            </a:pPr>
-            <a:r>
-              <a:t>📋 Intro → Définition → NTIC</a:t>
-            </a:r>
-          </a:p>
-          <a:p>
-            <a:pPr>
-              <a:defRPr sz="2000"/>
-            </a:pPr>
-            <a:r>
-              <a:t>📋 Dimensions → Fonctions → Services</a:t>
-            </a:r>
-          </a:p>
-          <a:p>
-            <a:pPr>
-              <a:defRPr sz="2000"/>
-            </a:pPr>
-            <a:r>
-              <a:t>📋 Éducation → Compétences → Conclusion</a:t>
-            </a:r>
-          </a:p>
-        </p:txBody>
-      </p:sp>
-      <p:sp>
-        <p:nvSpPr>
-          <p:cNvPr id="4" name="TextBox 3"/>
+          <p:cNvPr id="2" name="Rectangle 1"/>
+          <p:cNvSpPr/>
+          <p:nvPr/>
+        </p:nvSpPr>
+        <p:spPr>
+          <a:xfrm>
+            <a:off x="0" y="0"/>
+            <a:ext cx="109728" cy="6858000"/>
+          </a:xfrm>
+          <a:prstGeom prst="rect">
+            <a:avLst/>
+          </a:prstGeom>
+          <a:solidFill>
+            <a:srgbClr val="2C6E49"/>
+          </a:solidFill>
+          <a:ln>
+            <a:noFill/>
+          </a:ln>
+        </p:spPr>
+        <p:style>
+          <a:lnRef idx="1">
+            <a:schemeClr val="accent1"/>
+          </a:lnRef>
+          <a:fillRef idx="3">
+            <a:schemeClr val="accent1"/>
+          </a:fillRef>
+          <a:effectRef idx="2">
+            <a:schemeClr val="accent1"/>
+          </a:effectRef>
+          <a:fontRef idx="minor">
+            <a:schemeClr val="lt1"/>
+          </a:fontRef>
+        </p:style>
+        <p:txBody>
+          <a:bodyPr rtlCol="0" anchor="ctr"/>
+          <a:lstStyle/>
+          <a:p>
+            <a:pPr algn="ctr"/>
+          </a:p>
+        </p:txBody>
+      </p:sp>
+      <p:sp>
+        <p:nvSpPr>
+          <p:cNvPr id="3" name="TextBox 2"/>
           <p:cNvSpPr txBox="1"/>
           <p:nvPr/>
         </p:nvSpPr>
         <p:spPr>
           <a:xfrm>
-            <a:off x="365760" y="6446520"/>
-            <a:ext cx="8412480" cy="320040"/>
+            <a:off x="457200" y="365760"/>
+            <a:ext cx="8229600" cy="640080"/>
           </a:xfrm>
           <a:prstGeom prst="rect">
             <a:avLst/>
@@ -3878,20 +3660,118 @@
           <a:noFill/>
         </p:spPr>
         <p:txBody>
-          <a:bodyPr wrap="none">
+          <a:bodyPr wrap="square">
             <a:spAutoFit/>
           </a:bodyPr>
           <a:lstStyle/>
           <a:p>
-            <a:pPr algn="ctr">
-              <a:defRPr sz="900">
-                <a:solidFill>
-                  <a:srgbClr val="404040"/>
-                </a:solidFill>
-              </a:defRPr>
-            </a:pPr>
-            <a:r>
-              <a:t>Cours TIC 01  •  Diapositive 3/10</a:t>
+            <a:pPr algn="l">
+              <a:defRPr sz="2200" b="1">
+                <a:solidFill>
+                  <a:srgbClr val="1A5C33"/>
+                </a:solidFill>
+              </a:defRPr>
+            </a:pPr>
+            <a:r>
+              <a:t>3. Évolution Historique et Terminologique (NTIC → TIC)(10 min)</a:t>
+            </a:r>
+          </a:p>
+        </p:txBody>
+      </p:sp>
+      <p:sp>
+        <p:nvSpPr>
+          <p:cNvPr id="4" name="TextBox 3"/>
+          <p:cNvSpPr txBox="1"/>
+          <p:nvPr/>
+        </p:nvSpPr>
+        <p:spPr>
+          <a:xfrm>
+            <a:off x="457200" y="1371600"/>
+            <a:ext cx="7772400" cy="4572000"/>
+          </a:xfrm>
+          <a:prstGeom prst="rect">
+            <a:avLst/>
+          </a:prstGeom>
+          <a:noFill/>
+        </p:spPr>
+        <p:txBody>
+          <a:bodyPr wrap="square">
+            <a:spAutoFit/>
+          </a:bodyPr>
+          <a:lstStyle/>
+          <a:p>
+            <a:pPr>
+              <a:spcAft>
+                <a:spcPts val="600"/>
+              </a:spcAft>
+              <a:defRPr sz="1400">
+                <a:solidFill>
+                  <a:srgbClr val="222222"/>
+                </a:solidFill>
+              </a:defRPr>
+            </a:pPr>
+            <a:r>
+              <a:t>• Concepts associés :</a:t>
+            </a:r>
+          </a:p>
+          <a:p>
+            <a:pPr>
+              <a:spcAft>
+                <a:spcPts val="600"/>
+              </a:spcAft>
+              <a:defRPr sz="1400">
+                <a:solidFill>
+                  <a:srgbClr val="222222"/>
+                </a:solidFill>
+              </a:defRPr>
+            </a:pPr>
+            <a:r>
+              <a:t>• Numérisation: conversion en fichiers numériques (PDF, MP3, JPEG)</a:t>
+            </a:r>
+          </a:p>
+          <a:p>
+            <a:pPr>
+              <a:spcAft>
+                <a:spcPts val="600"/>
+              </a:spcAft>
+              <a:defRPr sz="1400">
+                <a:solidFill>
+                  <a:srgbClr val="222222"/>
+                </a:solidFill>
+              </a:defRPr>
+            </a:pPr>
+            <a:r>
+              <a:t>• Transformation digitale: réorganisation des activités grâce au numérique</a:t>
+            </a:r>
+          </a:p>
+          <a:p>
+            <a:pPr>
+              <a:spcAft>
+                <a:spcPts val="600"/>
+              </a:spcAft>
+              <a:defRPr sz="1400">
+                <a:solidFill>
+                  <a:srgbClr val="222222"/>
+                </a:solidFill>
+              </a:defRPr>
+            </a:pPr>
+            <a:r>
+              <a:t>• Société de l'information: l'information devient une ressource centrale</a:t>
+            </a:r>
+          </a:p>
+          <a:p>
+            <a:pPr>
+              <a:spcAft>
+                <a:spcPts val="600"/>
+              </a:spcAft>
+              <a:defRPr sz="1400">
+                <a:solidFill>
+                  <a:srgbClr val="222222"/>
+                </a:solidFill>
+              </a:defRPr>
+            </a:pPr>
+            <a:r>
+              <a:t>• Exemple :cours sur Moodle + vidéo enregistrée + devoir PDF + correction en ligne.</a:t>
             </a:r>
           </a:p>
         </p:txBody>
@@ -3901,15 +3781,20 @@
   <p:clrMapOvr>
     <a:masterClrMapping/>
   </p:clrMapOvr>
-  <p:transition spd="med">
-    <p:fade/>
-  </p:transition>
 </p:sld>
 </file>
 
-<file path=ppt/slides/slide4.xml><?xml version="1.0" encoding="utf-8"?>
+<file path=ppt/slides/slide13.xml><?xml version="1.0" encoding="utf-8"?>
 <p:sld xmlns:a="http://schemas.openxmlformats.org/drawingml/2006/main" xmlns:p="http://schemas.openxmlformats.org/presentationml/2006/main" xmlns:r="http://schemas.openxmlformats.org/officeDocument/2006/relationships">
   <p:cSld>
+    <p:bg>
+      <p:bgPr>
+        <a:solidFill>
+          <a:srgbClr val="E8F0E9"/>
+        </a:solidFill>
+        <a:effectLst/>
+      </p:bgPr>
+    </p:bg>
     <p:spTree>
       <p:nvGrpSpPr>
         <p:cNvPr id="1" name=""/>
@@ -3919,83 +3804,14 @@
       <p:grpSpPr/>
       <p:sp>
         <p:nvSpPr>
-          <p:cNvPr id="2" name="Title 1"/>
-          <p:cNvSpPr>
-            <a:spLocks noGrp="1"/>
-          </p:cNvSpPr>
-          <p:nvPr>
-            <p:ph type="title"/>
-          </p:nvPr>
-        </p:nvSpPr>
-        <p:spPr/>
-        <p:txBody>
-          <a:bodyPr/>
-          <a:lstStyle/>
-          <a:p>
-            <a:r>
-              <a:t>Définition des TIC</a:t>
-            </a:r>
-          </a:p>
-        </p:txBody>
-      </p:sp>
-      <p:sp>
-        <p:nvSpPr>
-          <p:cNvPr id="3" name="Content Placeholder 2"/>
-          <p:cNvSpPr>
-            <a:spLocks noGrp="1"/>
-          </p:cNvSpPr>
-          <p:nvPr>
-            <p:ph idx="1"/>
-          </p:nvPr>
-        </p:nvSpPr>
-        <p:spPr/>
-        <p:txBody>
-          <a:bodyPr/>
-          <a:lstStyle/>
-          <a:p>
-            <a:pPr>
-              <a:defRPr sz="2000"/>
-            </a:pPr>
-            <a:r>
-              <a:t>💡 Convergence numérique</a:t>
-            </a:r>
-          </a:p>
-          <a:p>
-            <a:pPr>
-              <a:defRPr sz="2000"/>
-            </a:pPr>
-            <a:r>
-              <a:t>💡 Créer, stocker, transmettre</a:t>
-            </a:r>
-          </a:p>
-          <a:p>
-            <a:pPr>
-              <a:defRPr sz="2000"/>
-            </a:pPr>
-            <a:r>
-              <a:t>💡 Définition UIT / UNESCO</a:t>
-            </a:r>
-          </a:p>
-          <a:p>
-            <a:pPr>
-              <a:defRPr sz="2000"/>
-            </a:pPr>
-            <a:r>
-              <a:t>💡 ICT en anglais</a:t>
-            </a:r>
-          </a:p>
-        </p:txBody>
-      </p:sp>
-      <p:sp>
-        <p:nvSpPr>
-          <p:cNvPr id="4" name="TextBox 3"/>
+          <p:cNvPr id="2" name="TextBox 1"/>
           <p:cNvSpPr txBox="1"/>
           <p:nvPr/>
         </p:nvSpPr>
         <p:spPr>
           <a:xfrm>
-            <a:off x="365760" y="6446520"/>
-            <a:ext cx="8412480" cy="320040"/>
+            <a:off x="548640" y="365760"/>
+            <a:ext cx="7772400" cy="640080"/>
           </a:xfrm>
           <a:prstGeom prst="rect">
             <a:avLst/>
@@ -4003,20 +3819,126 @@
           <a:noFill/>
         </p:spPr>
         <p:txBody>
-          <a:bodyPr wrap="none">
+          <a:bodyPr wrap="square">
             <a:spAutoFit/>
           </a:bodyPr>
           <a:lstStyle/>
           <a:p>
             <a:pPr algn="ctr">
-              <a:defRPr sz="900">
-                <a:solidFill>
-                  <a:srgbClr val="404040"/>
-                </a:solidFill>
-              </a:defRPr>
-            </a:pPr>
-            <a:r>
-              <a:t>Cours TIC 01  •  Diapositive 4/10</a:t>
+              <a:defRPr sz="2600" b="1">
+                <a:solidFill>
+                  <a:srgbClr val="1A5C33"/>
+                </a:solidFill>
+              </a:defRPr>
+            </a:pPr>
+            <a:r>
+              <a:t>📝 Points clés à retenir</a:t>
+            </a:r>
+          </a:p>
+        </p:txBody>
+      </p:sp>
+      <p:sp>
+        <p:nvSpPr>
+          <p:cNvPr id="3" name="TextBox 2"/>
+          <p:cNvSpPr txBox="1"/>
+          <p:nvPr/>
+        </p:nvSpPr>
+        <p:spPr>
+          <a:xfrm>
+            <a:off x="548640" y="1828800"/>
+            <a:ext cx="7772400" cy="4572000"/>
+          </a:xfrm>
+          <a:prstGeom prst="rect">
+            <a:avLst/>
+          </a:prstGeom>
+          <a:noFill/>
+        </p:spPr>
+        <p:txBody>
+          <a:bodyPr wrap="square">
+            <a:spAutoFit/>
+          </a:bodyPr>
+          <a:lstStyle/>
+          <a:p>
+            <a:pPr>
+              <a:spcAft>
+                <a:spcPts val="600"/>
+              </a:spcAft>
+              <a:defRPr sz="1600">
+                <a:solidFill>
+                  <a:srgbClr val="222222"/>
+                </a:solidFill>
+              </a:defRPr>
+            </a:pPr>
+            <a:r>
+              <a:t>• Référentiel :titres et structure alignés sur Canvas Univ-Mosta (elearning.univ-usto.dz) ; bonnes pratiques benchmark 10 universités algériennes (voirBENCHMARK_10_UNIVERSITES_ELEARNING.md).</a:t>
+            </a:r>
+          </a:p>
+          <a:p>
+            <a:pPr>
+              <a:spcAft>
+                <a:spcPts val="600"/>
+              </a:spcAft>
+              <a:defRPr sz="1600">
+                <a:solidFill>
+                  <a:srgbClr val="222222"/>
+                </a:solidFill>
+              </a:defRPr>
+            </a:pPr>
+            <a:r>
+              <a:t>• En termes de savoir :- Définir les TIC et distinguer NTIC/TIC/ICT</a:t>
+            </a:r>
+            <a:br/>
+            <a:r>
+              <a:t>- Identifier les trois dimensions : technique, information, communication</a:t>
+            </a:r>
+            <a:br/>
+            <a:r>
+              <a:t>- Citer les fonctions : traitement, transmission, sauvegarde</a:t>
+            </a:r>
+          </a:p>
+          <a:p>
+            <a:pPr>
+              <a:spcAft>
+                <a:spcPts val="600"/>
+              </a:spcAft>
+              <a:defRPr sz="1600">
+                <a:solidFill>
+                  <a:srgbClr val="222222"/>
+                </a:solidFill>
+              </a:defRPr>
+            </a:pPr>
+            <a:r>
+              <a:t>• Ce cours s'inscrit dans le cadre réglementaire algérien de la formation des enseignants :</a:t>
+            </a:r>
+          </a:p>
+          <a:p>
+            <a:pPr>
+              <a:spcAft>
+                <a:spcPts val="600"/>
+              </a:spcAft>
+              <a:defRPr sz="1600">
+                <a:solidFill>
+                  <a:srgbClr val="222222"/>
+                </a:solidFill>
+              </a:defRPr>
+            </a:pPr>
+            <a:r>
+              <a:t>• UIT — définitions TIC ; UNESCO — compétences numériques ; Guide étudiant Moodle Univ. Boumerdès / Béjaïa</a:t>
+            </a:r>
+          </a:p>
+          <a:p>
+            <a:pPr>
+              <a:spcAft>
+                <a:spcPts val="600"/>
+              </a:spcAft>
+              <a:defRPr sz="1600">
+                <a:solidFill>
+                  <a:srgbClr val="222222"/>
+                </a:solidFill>
+              </a:defRPr>
+            </a:pPr>
+            <a:r>
+              <a:t>• Introduction et importance des TIC dans le monde contemporain</a:t>
             </a:r>
           </a:p>
         </p:txBody>
@@ -4026,15 +3948,20 @@
   <p:clrMapOvr>
     <a:masterClrMapping/>
   </p:clrMapOvr>
-  <p:transition spd="med">
-    <p:fade/>
-  </p:transition>
 </p:sld>
 </file>
 
-<file path=ppt/slides/slide5.xml><?xml version="1.0" encoding="utf-8"?>
+<file path=ppt/slides/slide14.xml><?xml version="1.0" encoding="utf-8"?>
 <p:sld xmlns:a="http://schemas.openxmlformats.org/drawingml/2006/main" xmlns:p="http://schemas.openxmlformats.org/presentationml/2006/main" xmlns:r="http://schemas.openxmlformats.org/officeDocument/2006/relationships">
   <p:cSld>
+    <p:bg>
+      <p:bgPr>
+        <a:solidFill>
+          <a:srgbClr val="FFFFFF"/>
+        </a:solidFill>
+        <a:effectLst/>
+      </p:bgPr>
+    </p:bg>
     <p:spTree>
       <p:nvGrpSpPr>
         <p:cNvPr id="1" name=""/>
@@ -4044,83 +3971,14 @@
       <p:grpSpPr/>
       <p:sp>
         <p:nvSpPr>
-          <p:cNvPr id="2" name="Title 1"/>
-          <p:cNvSpPr>
-            <a:spLocks noGrp="1"/>
-          </p:cNvSpPr>
-          <p:nvPr>
-            <p:ph type="title"/>
-          </p:nvPr>
-        </p:nvSpPr>
-        <p:spPr/>
-        <p:txBody>
-          <a:bodyPr/>
-          <a:lstStyle/>
-          <a:p>
-            <a:r>
-              <a:t>NTIC → TIC</a:t>
-            </a:r>
-          </a:p>
-        </p:txBody>
-      </p:sp>
-      <p:sp>
-        <p:nvSpPr>
-          <p:cNvPr id="3" name="Content Placeholder 2"/>
-          <p:cNvSpPr>
-            <a:spLocks noGrp="1"/>
-          </p:cNvSpPr>
-          <p:nvPr>
-            <p:ph idx="1"/>
-          </p:nvPr>
-        </p:nvSpPr>
-        <p:spPr/>
-        <p:txBody>
-          <a:bodyPr/>
-          <a:lstStyle/>
-          <a:p>
-            <a:pPr>
-              <a:defRPr sz="2000"/>
-            </a:pPr>
-            <a:r>
-              <a:t>📖 1990-2005 : NTIC</a:t>
-            </a:r>
-          </a:p>
-          <a:p>
-            <a:pPr>
-              <a:defRPr sz="2000"/>
-            </a:pPr>
-            <a:r>
-              <a:t>📖 Aujourd'hui : TIC</a:t>
-            </a:r>
-          </a:p>
-          <a:p>
-            <a:pPr>
-              <a:defRPr sz="2000"/>
-            </a:pPr>
-            <a:r>
-              <a:t>📖 Transformation digitale</a:t>
-            </a:r>
-          </a:p>
-          <a:p>
-            <a:pPr>
-              <a:defRPr sz="2000"/>
-            </a:pPr>
-            <a:r>
-              <a:t>📖 Société de l'information</a:t>
-            </a:r>
-          </a:p>
-        </p:txBody>
-      </p:sp>
-      <p:sp>
-        <p:nvSpPr>
-          <p:cNvPr id="4" name="TextBox 3"/>
+          <p:cNvPr id="2" name="TextBox 1"/>
           <p:cNvSpPr txBox="1"/>
           <p:nvPr/>
         </p:nvSpPr>
         <p:spPr>
           <a:xfrm>
-            <a:off x="365760" y="6446520"/>
-            <a:ext cx="8412480" cy="320040"/>
+            <a:off x="548640" y="365760"/>
+            <a:ext cx="7772400" cy="640080"/>
           </a:xfrm>
           <a:prstGeom prst="rect">
             <a:avLst/>
@@ -4128,20 +3986,118 @@
           <a:noFill/>
         </p:spPr>
         <p:txBody>
-          <a:bodyPr wrap="none">
+          <a:bodyPr wrap="square">
             <a:spAutoFit/>
           </a:bodyPr>
           <a:lstStyle/>
           <a:p>
             <a:pPr algn="ctr">
-              <a:defRPr sz="900">
-                <a:solidFill>
-                  <a:srgbClr val="404040"/>
-                </a:solidFill>
-              </a:defRPr>
-            </a:pPr>
-            <a:r>
-              <a:t>Cours TIC 01  •  Diapositive 5/10</a:t>
+              <a:defRPr sz="2600" b="1">
+                <a:solidFill>
+                  <a:srgbClr val="1A5C33"/>
+                </a:solidFill>
+              </a:defRPr>
+            </a:pPr>
+            <a:r>
+              <a:t>✏️ Exercices d'application</a:t>
+            </a:r>
+          </a:p>
+        </p:txBody>
+      </p:sp>
+      <p:sp>
+        <p:nvSpPr>
+          <p:cNvPr id="3" name="TextBox 2"/>
+          <p:cNvSpPr txBox="1"/>
+          <p:nvPr/>
+        </p:nvSpPr>
+        <p:spPr>
+          <a:xfrm>
+            <a:off x="548640" y="1828800"/>
+            <a:ext cx="7772400" cy="4572000"/>
+          </a:xfrm>
+          <a:prstGeom prst="rect">
+            <a:avLst/>
+          </a:prstGeom>
+          <a:noFill/>
+        </p:spPr>
+        <p:txBody>
+          <a:bodyPr wrap="square">
+            <a:spAutoFit/>
+          </a:bodyPr>
+          <a:lstStyle/>
+          <a:p>
+            <a:pPr>
+              <a:spcAft>
+                <a:spcPts val="600"/>
+              </a:spcAft>
+              <a:defRPr sz="1500">
+                <a:solidFill>
+                  <a:srgbClr val="222222"/>
+                </a:solidFill>
+              </a:defRPr>
+            </a:pPr>
+            <a:r>
+              <a:t>• Définir les concepts principaux du cours</a:t>
+            </a:r>
+          </a:p>
+          <a:p>
+            <a:pPr>
+              <a:spcAft>
+                <a:spcPts val="600"/>
+              </a:spcAft>
+              <a:defRPr sz="1500">
+                <a:solidFill>
+                  <a:srgbClr val="222222"/>
+                </a:solidFill>
+              </a:defRPr>
+            </a:pPr>
+            <a:r>
+              <a:t>• Identifier les applications pratiques</a:t>
+            </a:r>
+          </a:p>
+          <a:p>
+            <a:pPr>
+              <a:spcAft>
+                <a:spcPts val="600"/>
+              </a:spcAft>
+              <a:defRPr sz="1500">
+                <a:solidFill>
+                  <a:srgbClr val="222222"/>
+                </a:solidFill>
+              </a:defRPr>
+            </a:pPr>
+            <a:r>
+              <a:t>• Résoudre les exercices du TD</a:t>
+            </a:r>
+          </a:p>
+          <a:p>
+            <a:pPr>
+              <a:spcAft>
+                <a:spcPts val="600"/>
+              </a:spcAft>
+              <a:defRPr sz="1500">
+                <a:solidFill>
+                  <a:srgbClr val="222222"/>
+                </a:solidFill>
+              </a:defRPr>
+            </a:pPr>
+            <a:r>
+              <a:t>• Synthétiser les points clés en un paragraphe</a:t>
+            </a:r>
+          </a:p>
+          <a:p>
+            <a:pPr>
+              <a:spcAft>
+                <a:spcPts val="600"/>
+              </a:spcAft>
+              <a:defRPr sz="1500">
+                <a:solidFill>
+                  <a:srgbClr val="222222"/>
+                </a:solidFill>
+              </a:defRPr>
+            </a:pPr>
+            <a:r>
+              <a:t>• Préparer une courte présentation orale</a:t>
             </a:r>
           </a:p>
         </p:txBody>
@@ -4151,15 +4107,20 @@
   <p:clrMapOvr>
     <a:masterClrMapping/>
   </p:clrMapOvr>
-  <p:transition spd="med">
-    <p:fade/>
-  </p:transition>
 </p:sld>
 </file>
 
-<file path=ppt/slides/slide6.xml><?xml version="1.0" encoding="utf-8"?>
+<file path=ppt/slides/slide15.xml><?xml version="1.0" encoding="utf-8"?>
 <p:sld xmlns:a="http://schemas.openxmlformats.org/drawingml/2006/main" xmlns:p="http://schemas.openxmlformats.org/presentationml/2006/main" xmlns:r="http://schemas.openxmlformats.org/officeDocument/2006/relationships">
   <p:cSld>
+    <p:bg>
+      <p:bgPr>
+        <a:solidFill>
+          <a:srgbClr val="1A5C33"/>
+        </a:solidFill>
+        <a:effectLst/>
+      </p:bgPr>
+    </p:bg>
     <p:spTree>
       <p:nvGrpSpPr>
         <p:cNvPr id="1" name=""/>
@@ -4169,83 +4130,14 @@
       <p:grpSpPr/>
       <p:sp>
         <p:nvSpPr>
-          <p:cNvPr id="2" name="Title 1"/>
-          <p:cNvSpPr>
-            <a:spLocks noGrp="1"/>
-          </p:cNvSpPr>
-          <p:nvPr>
-            <p:ph type="title"/>
-          </p:nvPr>
-        </p:nvSpPr>
-        <p:spPr/>
-        <p:txBody>
-          <a:bodyPr/>
-          <a:lstStyle/>
-          <a:p>
-            <a:r>
-              <a:t>Trois dimensions</a:t>
-            </a:r>
-          </a:p>
-        </p:txBody>
-      </p:sp>
-      <p:sp>
-        <p:nvSpPr>
-          <p:cNvPr id="3" name="Content Placeholder 2"/>
-          <p:cNvSpPr>
-            <a:spLocks noGrp="1"/>
-          </p:cNvSpPr>
-          <p:nvPr>
-            <p:ph idx="1"/>
-          </p:nvPr>
-        </p:nvSpPr>
-        <p:spPr/>
-        <p:txBody>
-          <a:bodyPr/>
-          <a:lstStyle/>
-          <a:p>
-            <a:pPr>
-              <a:defRPr sz="2000"/>
-            </a:pPr>
-            <a:r>
-              <a:t>🔺 Techniques (outils)</a:t>
-            </a:r>
-          </a:p>
-          <a:p>
-            <a:pPr>
-              <a:defRPr sz="2000"/>
-            </a:pPr>
-            <a:r>
-              <a:t>🔺 Information (données)</a:t>
-            </a:r>
-          </a:p>
-          <a:p>
-            <a:pPr>
-              <a:defRPr sz="2000"/>
-            </a:pPr>
-            <a:r>
-              <a:t>🔺 Communication (échange)</a:t>
-            </a:r>
-          </a:p>
-          <a:p>
-            <a:pPr>
-              <a:defRPr sz="2000"/>
-            </a:pPr>
-            <a:r>
-              <a:t>🔺 Schéma triangulaire</a:t>
-            </a:r>
-          </a:p>
-        </p:txBody>
-      </p:sp>
-      <p:sp>
-        <p:nvSpPr>
-          <p:cNvPr id="4" name="TextBox 3"/>
+          <p:cNvPr id="2" name="TextBox 1"/>
           <p:cNvSpPr txBox="1"/>
           <p:nvPr/>
         </p:nvSpPr>
         <p:spPr>
           <a:xfrm>
-            <a:off x="365760" y="6446520"/>
-            <a:ext cx="8412480" cy="320040"/>
+            <a:off x="731520" y="1371600"/>
+            <a:ext cx="7680960" cy="914400"/>
           </a:xfrm>
           <a:prstGeom prst="rect">
             <a:avLst/>
@@ -4253,20 +4145,67 @@
           <a:noFill/>
         </p:spPr>
         <p:txBody>
-          <a:bodyPr wrap="none">
+          <a:bodyPr wrap="square">
             <a:spAutoFit/>
           </a:bodyPr>
           <a:lstStyle/>
           <a:p>
             <a:pPr algn="ctr">
-              <a:defRPr sz="900">
-                <a:solidFill>
-                  <a:srgbClr val="404040"/>
-                </a:solidFill>
-              </a:defRPr>
-            </a:pPr>
-            <a:r>
-              <a:t>Cours TIC 01  •  Diapositive 6/10</a:t>
+              <a:defRPr sz="2800" b="1">
+                <a:solidFill>
+                  <a:srgbClr val="FFFFFF"/>
+                </a:solidFill>
+              </a:defRPr>
+            </a:pPr>
+            <a:r>
+              <a:t>🎓 Conclusion</a:t>
+            </a:r>
+          </a:p>
+        </p:txBody>
+      </p:sp>
+      <p:sp>
+        <p:nvSpPr>
+          <p:cNvPr id="3" name="TextBox 2"/>
+          <p:cNvSpPr txBox="1"/>
+          <p:nvPr/>
+        </p:nvSpPr>
+        <p:spPr>
+          <a:xfrm>
+            <a:off x="731520" y="2743200"/>
+            <a:ext cx="7680960" cy="1828800"/>
+          </a:xfrm>
+          <a:prstGeom prst="rect">
+            <a:avLst/>
+          </a:prstGeom>
+          <a:noFill/>
+        </p:spPr>
+        <p:txBody>
+          <a:bodyPr wrap="square">
+            <a:spAutoFit/>
+          </a:bodyPr>
+          <a:lstStyle/>
+          <a:p>
+            <a:pPr algn="ctr">
+              <a:defRPr sz="1800" b="0">
+                <a:solidFill>
+                  <a:srgbClr val="C5D9C7"/>
+                </a:solidFill>
+              </a:defRPr>
+            </a:pPr>
+            <a:r>
+              <a:t>Dr. BELACEL Madani</a:t>
+            </a:r>
+            <a:br/>
+            <a:r>
+              <a:t>Maître de Conférences B</a:t>
+            </a:r>
+            <a:br/>
+            <a:r>
+              <a:t>Université de Mostaganem</a:t>
+            </a:r>
+            <a:br/>
+            <a:r>
+              <a:t>madani.belacel@univ-mosta.dz</a:t>
             </a:r>
           </a:p>
         </p:txBody>
@@ -4276,15 +4215,20 @@
   <p:clrMapOvr>
     <a:masterClrMapping/>
   </p:clrMapOvr>
-  <p:transition spd="med">
-    <p:fade/>
-  </p:transition>
 </p:sld>
 </file>
 
-<file path=ppt/slides/slide7.xml><?xml version="1.0" encoding="utf-8"?>
+<file path=ppt/slides/slide2.xml><?xml version="1.0" encoding="utf-8"?>
 <p:sld xmlns:a="http://schemas.openxmlformats.org/drawingml/2006/main" xmlns:p="http://schemas.openxmlformats.org/presentationml/2006/main" xmlns:r="http://schemas.openxmlformats.org/officeDocument/2006/relationships">
   <p:cSld>
+    <p:bg>
+      <p:bgPr>
+        <a:solidFill>
+          <a:srgbClr val="FFFFFF"/>
+        </a:solidFill>
+        <a:effectLst/>
+      </p:bgPr>
+    </p:bg>
     <p:spTree>
       <p:nvGrpSpPr>
         <p:cNvPr id="1" name=""/>
@@ -4294,83 +4238,14 @@
       <p:grpSpPr/>
       <p:sp>
         <p:nvSpPr>
-          <p:cNvPr id="2" name="Title 1"/>
-          <p:cNvSpPr>
-            <a:spLocks noGrp="1"/>
-          </p:cNvSpPr>
-          <p:nvPr>
-            <p:ph type="title"/>
-          </p:nvPr>
-        </p:nvSpPr>
-        <p:spPr/>
-        <p:txBody>
-          <a:bodyPr/>
-          <a:lstStyle/>
-          <a:p>
-            <a:r>
-              <a:t>Trois fonctions</a:t>
-            </a:r>
-          </a:p>
-        </p:txBody>
-      </p:sp>
-      <p:sp>
-        <p:nvSpPr>
-          <p:cNvPr id="3" name="Content Placeholder 2"/>
-          <p:cNvSpPr>
-            <a:spLocks noGrp="1"/>
-          </p:cNvSpPr>
-          <p:nvPr>
-            <p:ph idx="1"/>
-          </p:nvPr>
-        </p:nvSpPr>
-        <p:spPr/>
-        <p:txBody>
-          <a:bodyPr/>
-          <a:lstStyle/>
-          <a:p>
-            <a:pPr>
-              <a:defRPr sz="2000"/>
-            </a:pPr>
-            <a:r>
-              <a:t>⚙️ Traitement (Word)</a:t>
-            </a:r>
-          </a:p>
-          <a:p>
-            <a:pPr>
-              <a:defRPr sz="2000"/>
-            </a:pPr>
-            <a:r>
-              <a:t>⚙️ Transmission (email)</a:t>
-            </a:r>
-          </a:p>
-          <a:p>
-            <a:pPr>
-              <a:defRPr sz="2000"/>
-            </a:pPr>
-            <a:r>
-              <a:t>⚙️ Sauvegarde (cloud)</a:t>
-            </a:r>
-          </a:p>
-          <a:p>
-            <a:pPr>
-              <a:defRPr sz="2000"/>
-            </a:pPr>
-            <a:r>
-              <a:t>⚙️ Exemple étudiant</a:t>
-            </a:r>
-          </a:p>
-        </p:txBody>
-      </p:sp>
-      <p:sp>
-        <p:nvSpPr>
-          <p:cNvPr id="4" name="TextBox 3"/>
+          <p:cNvPr id="2" name="TextBox 1"/>
           <p:cNvSpPr txBox="1"/>
           <p:nvPr/>
         </p:nvSpPr>
         <p:spPr>
           <a:xfrm>
-            <a:off x="365760" y="6446520"/>
-            <a:ext cx="8412480" cy="320040"/>
+            <a:off x="548640" y="365760"/>
+            <a:ext cx="7772400" cy="640080"/>
           </a:xfrm>
           <a:prstGeom prst="rect">
             <a:avLst/>
@@ -4378,20 +4253,123 @@
           <a:noFill/>
         </p:spPr>
         <p:txBody>
-          <a:bodyPr wrap="none">
+          <a:bodyPr wrap="square">
             <a:spAutoFit/>
           </a:bodyPr>
           <a:lstStyle/>
           <a:p>
-            <a:pPr algn="ctr">
-              <a:defRPr sz="900">
-                <a:solidFill>
-                  <a:srgbClr val="404040"/>
-                </a:solidFill>
-              </a:defRPr>
-            </a:pPr>
-            <a:r>
-              <a:t>Cours TIC 01  •  Diapositive 7/10</a:t>
+            <a:pPr algn="l">
+              <a:defRPr sz="2600" b="1">
+                <a:solidFill>
+                  <a:srgbClr val="1A5C33"/>
+                </a:solidFill>
+              </a:defRPr>
+            </a:pPr>
+            <a:r>
+              <a:t>🎯 Objectifs pédagogiques</a:t>
+            </a:r>
+          </a:p>
+        </p:txBody>
+      </p:sp>
+      <p:sp>
+        <p:nvSpPr>
+          <p:cNvPr id="3" name="TextBox 2"/>
+          <p:cNvSpPr txBox="1"/>
+          <p:nvPr/>
+        </p:nvSpPr>
+        <p:spPr>
+          <a:xfrm>
+            <a:off x="548640" y="1828800"/>
+            <a:ext cx="7772400" cy="4572000"/>
+          </a:xfrm>
+          <a:prstGeom prst="rect">
+            <a:avLst/>
+          </a:prstGeom>
+          <a:noFill/>
+        </p:spPr>
+        <p:txBody>
+          <a:bodyPr wrap="square">
+            <a:spAutoFit/>
+          </a:bodyPr>
+          <a:lstStyle/>
+          <a:p>
+            <a:pPr>
+              <a:spcAft>
+                <a:spcPts val="600"/>
+              </a:spcAft>
+              <a:defRPr sz="1500">
+                <a:solidFill>
+                  <a:srgbClr val="222222"/>
+                </a:solidFill>
+              </a:defRPr>
+            </a:pPr>
+            <a:r>
+              <a:t>• En termes de savoir :- Définir les TIC et distinguer NTIC/TIC/ICT</a:t>
+            </a:r>
+            <a:br/>
+            <a:r>
+              <a:t>- Identifier les trois dimensions : technique, information, communication</a:t>
+            </a:r>
+            <a:br/>
+            <a:r>
+              <a:t>- Citer les fonctions : traitement, transmission, sauvegarde</a:t>
+            </a:r>
+          </a:p>
+          <a:p>
+            <a:pPr>
+              <a:spcAft>
+                <a:spcPts val="600"/>
+              </a:spcAft>
+              <a:defRPr sz="1500">
+                <a:solidFill>
+                  <a:srgbClr val="222222"/>
+                </a:solidFill>
+              </a:defRPr>
+            </a:pPr>
+            <a:r>
+              <a:t>• En termes de savoir-faire :- Utiliser Moodle et le courriel institutionnel</a:t>
+            </a:r>
+            <a:br/>
+            <a:r>
+              <a:t>- Nommer et classer des outils numériques par fonction</a:t>
+            </a:r>
+            <a:br/>
+            <a:r>
+              <a:t>- Évaluer la fiabilité d'une source en ligne (introduction CRAP)</a:t>
+            </a:r>
+          </a:p>
+          <a:p>
+            <a:pPr>
+              <a:spcAft>
+                <a:spcPts val="600"/>
+              </a:spcAft>
+              <a:defRPr sz="1500">
+                <a:solidFill>
+                  <a:srgbClr val="222222"/>
+                </a:solidFill>
+              </a:defRPr>
+            </a:pPr>
+            <a:r>
+              <a:t>• En termes de savoir-être :- Adopter une posture critique face au numérique</a:t>
+            </a:r>
+            <a:br/>
+            <a:r>
+              <a:t>- Respecter l'éthique académique (plagiat, vie privée)</a:t>
+            </a:r>
+          </a:p>
+          <a:p>
+            <a:pPr>
+              <a:spcAft>
+                <a:spcPts val="600"/>
+              </a:spcAft>
+              <a:defRPr sz="1500">
+                <a:solidFill>
+                  <a:srgbClr val="222222"/>
+                </a:solidFill>
+              </a:defRPr>
+            </a:pPr>
+            <a:r>
+              <a:t>• Mode d'évaluation :TD 40 % (5 exercices) + QCM Moodle 20 % + participation 10 % + examen 30 %</a:t>
             </a:r>
           </a:p>
         </p:txBody>
@@ -4401,15 +4379,20 @@
   <p:clrMapOvr>
     <a:masterClrMapping/>
   </p:clrMapOvr>
-  <p:transition spd="med">
-    <p:fade/>
-  </p:transition>
 </p:sld>
 </file>
 
-<file path=ppt/slides/slide8.xml><?xml version="1.0" encoding="utf-8"?>
+<file path=ppt/slides/slide3.xml><?xml version="1.0" encoding="utf-8"?>
 <p:sld xmlns:a="http://schemas.openxmlformats.org/drawingml/2006/main" xmlns:p="http://schemas.openxmlformats.org/presentationml/2006/main" xmlns:r="http://schemas.openxmlformats.org/officeDocument/2006/relationships">
   <p:cSld>
+    <p:bg>
+      <p:bgPr>
+        <a:solidFill>
+          <a:srgbClr val="FFFFFF"/>
+        </a:solidFill>
+        <a:effectLst/>
+      </p:bgPr>
+    </p:bg>
     <p:spTree>
       <p:nvGrpSpPr>
         <p:cNvPr id="1" name=""/>
@@ -4419,83 +4402,14 @@
       <p:grpSpPr/>
       <p:sp>
         <p:nvSpPr>
-          <p:cNvPr id="2" name="Title 1"/>
-          <p:cNvSpPr>
-            <a:spLocks noGrp="1"/>
-          </p:cNvSpPr>
-          <p:nvPr>
-            <p:ph type="title"/>
-          </p:nvPr>
-        </p:nvSpPr>
-        <p:spPr/>
-        <p:txBody>
-          <a:bodyPr/>
-          <a:lstStyle/>
-          <a:p>
-            <a:r>
-              <a:t>Services et éducation</a:t>
-            </a:r>
-          </a:p>
-        </p:txBody>
-      </p:sp>
-      <p:sp>
-        <p:nvSpPr>
-          <p:cNvPr id="3" name="Content Placeholder 2"/>
-          <p:cNvSpPr>
-            <a:spLocks noGrp="1"/>
-          </p:cNvSpPr>
-          <p:nvPr>
-            <p:ph idx="1"/>
-          </p:nvPr>
-        </p:nvSpPr>
-        <p:spPr/>
-        <p:txBody>
-          <a:bodyPr/>
-          <a:lstStyle/>
-          <a:p>
-            <a:pPr>
-              <a:defRPr sz="2000"/>
-            </a:pPr>
-            <a:r>
-              <a:t>🎓 Courriel, Web, visio</a:t>
-            </a:r>
-          </a:p>
-          <a:p>
-            <a:pPr>
-              <a:defRPr sz="2000"/>
-            </a:pPr>
-            <a:r>
-              <a:t>🎓 Moodle / Classroom</a:t>
-            </a:r>
-          </a:p>
-          <a:p>
-            <a:pPr>
-              <a:defRPr sz="2000"/>
-            </a:pPr>
-            <a:r>
-              <a:t>🎓 E-learning hybride</a:t>
-            </a:r>
-          </a:p>
-          <a:p>
-            <a:pPr>
-              <a:defRPr sz="2000"/>
-            </a:pPr>
-            <a:r>
-              <a:t>🎓 Ressources multilingues</a:t>
-            </a:r>
-          </a:p>
-        </p:txBody>
-      </p:sp>
-      <p:sp>
-        <p:nvSpPr>
-          <p:cNvPr id="4" name="TextBox 3"/>
+          <p:cNvPr id="2" name="TextBox 1"/>
           <p:cNvSpPr txBox="1"/>
           <p:nvPr/>
         </p:nvSpPr>
         <p:spPr>
           <a:xfrm>
-            <a:off x="365760" y="6446520"/>
-            <a:ext cx="8412480" cy="320040"/>
+            <a:off x="548640" y="365760"/>
+            <a:ext cx="7772400" cy="640080"/>
           </a:xfrm>
           <a:prstGeom prst="rect">
             <a:avLst/>
@@ -4503,20 +4417,193 @@
           <a:noFill/>
         </p:spPr>
         <p:txBody>
-          <a:bodyPr wrap="none">
+          <a:bodyPr wrap="square">
             <a:spAutoFit/>
           </a:bodyPr>
           <a:lstStyle/>
           <a:p>
-            <a:pPr algn="ctr">
-              <a:defRPr sz="900">
-                <a:solidFill>
-                  <a:srgbClr val="404040"/>
-                </a:solidFill>
-              </a:defRPr>
-            </a:pPr>
-            <a:r>
-              <a:t>Cours TIC 01  •  Diapositive 8/10</a:t>
+            <a:pPr algn="l">
+              <a:defRPr sz="2600" b="1">
+                <a:solidFill>
+                  <a:srgbClr val="1A5C33"/>
+                </a:solidFill>
+              </a:defRPr>
+            </a:pPr>
+            <a:r>
+              <a:t>📋 Plan du cours</a:t>
+            </a:r>
+          </a:p>
+        </p:txBody>
+      </p:sp>
+      <p:sp>
+        <p:nvSpPr>
+          <p:cNvPr id="3" name="TextBox 2"/>
+          <p:cNvSpPr txBox="1"/>
+          <p:nvPr/>
+        </p:nvSpPr>
+        <p:spPr>
+          <a:xfrm>
+            <a:off x="548640" y="1828800"/>
+            <a:ext cx="7772400" cy="4572000"/>
+          </a:xfrm>
+          <a:prstGeom prst="rect">
+            <a:avLst/>
+          </a:prstGeom>
+          <a:noFill/>
+        </p:spPr>
+        <p:txBody>
+          <a:bodyPr wrap="square">
+            <a:spAutoFit/>
+          </a:bodyPr>
+          <a:lstStyle/>
+          <a:p>
+            <a:pPr>
+              <a:spcAft>
+                <a:spcPts val="600"/>
+              </a:spcAft>
+              <a:defRPr sz="1600">
+                <a:solidFill>
+                  <a:srgbClr val="222222"/>
+                </a:solidFill>
+              </a:defRPr>
+            </a:pPr>
+            <a:r>
+              <a:t>• Fiche cours — Plateforme e-learning (Moodle)</a:t>
+            </a:r>
+          </a:p>
+          <a:p>
+            <a:pPr>
+              <a:spcAft>
+                <a:spcPts val="600"/>
+              </a:spcAft>
+              <a:defRPr sz="1600">
+                <a:solidFill>
+                  <a:srgbClr val="222222"/>
+                </a:solidFill>
+              </a:defRPr>
+            </a:pPr>
+            <a:r>
+              <a:t>• Objectifs de l'enseignement</a:t>
+            </a:r>
+          </a:p>
+          <a:p>
+            <a:pPr>
+              <a:spcAft>
+                <a:spcPts val="600"/>
+              </a:spcAft>
+              <a:defRPr sz="1600">
+                <a:solidFill>
+                  <a:srgbClr val="222222"/>
+                </a:solidFill>
+              </a:defRPr>
+            </a:pPr>
+            <a:r>
+              <a:t>• Contexte réglementaire algérien</a:t>
+            </a:r>
+          </a:p>
+          <a:p>
+            <a:pPr>
+              <a:spcAft>
+                <a:spcPts val="600"/>
+              </a:spcAft>
+              <a:defRPr sz="1600">
+                <a:solidFill>
+                  <a:srgbClr val="222222"/>
+                </a:solidFill>
+              </a:defRPr>
+            </a:pPr>
+            <a:r>
+              <a:t>• Bibliographie et ressources externes</a:t>
+            </a:r>
+          </a:p>
+          <a:p>
+            <a:pPr>
+              <a:spcAft>
+                <a:spcPts val="600"/>
+              </a:spcAft>
+              <a:defRPr sz="1600">
+                <a:solidFill>
+                  <a:srgbClr val="222222"/>
+                </a:solidFill>
+              </a:defRPr>
+            </a:pPr>
+            <a:r>
+              <a:t>• Plan du Cours</a:t>
+            </a:r>
+          </a:p>
+          <a:p>
+            <a:pPr>
+              <a:spcAft>
+                <a:spcPts val="600"/>
+              </a:spcAft>
+              <a:defRPr sz="1600">
+                <a:solidFill>
+                  <a:srgbClr val="222222"/>
+                </a:solidFill>
+              </a:defRPr>
+            </a:pPr>
+            <a:r>
+              <a:t>• 1. Introduction et Importance des TIC(10 min)</a:t>
+            </a:r>
+          </a:p>
+          <a:p>
+            <a:pPr>
+              <a:spcAft>
+                <a:spcPts val="600"/>
+              </a:spcAft>
+              <a:defRPr sz="1600">
+                <a:solidFill>
+                  <a:srgbClr val="222222"/>
+                </a:solidFill>
+              </a:defRPr>
+            </a:pPr>
+            <a:r>
+              <a:t>• Convergence de trois domaines</a:t>
+            </a:r>
+          </a:p>
+          <a:p>
+            <a:pPr>
+              <a:spcAft>
+                <a:spcPts val="600"/>
+              </a:spcAft>
+              <a:defRPr sz="1600">
+                <a:solidFill>
+                  <a:srgbClr val="222222"/>
+                </a:solidFill>
+              </a:defRPr>
+            </a:pPr>
+            <a:r>
+              <a:t>• Définitions de référence</a:t>
+            </a:r>
+          </a:p>
+          <a:p>
+            <a:pPr>
+              <a:spcAft>
+                <a:spcPts val="600"/>
+              </a:spcAft>
+              <a:defRPr sz="1600">
+                <a:solidFill>
+                  <a:srgbClr val="222222"/>
+                </a:solidFill>
+              </a:defRPr>
+            </a:pPr>
+            <a:r>
+              <a:t>• 3. Évolution Historique et Terminologique (NTIC → TIC)(10 min)</a:t>
+            </a:r>
+          </a:p>
+          <a:p>
+            <a:pPr>
+              <a:spcAft>
+                <a:spcPts val="600"/>
+              </a:spcAft>
+              <a:defRPr sz="1600">
+                <a:solidFill>
+                  <a:srgbClr val="222222"/>
+                </a:solidFill>
+              </a:defRPr>
+            </a:pPr>
+            <a:r>
+              <a:t>• 4. Les Trois Dimensions Fondamentales(15 min)</a:t>
             </a:r>
           </a:p>
         </p:txBody>
@@ -4526,15 +4613,20 @@
   <p:clrMapOvr>
     <a:masterClrMapping/>
   </p:clrMapOvr>
-  <p:transition spd="med">
-    <p:fade/>
-  </p:transition>
 </p:sld>
 </file>
 
-<file path=ppt/slides/slide9.xml><?xml version="1.0" encoding="utf-8"?>
+<file path=ppt/slides/slide4.xml><?xml version="1.0" encoding="utf-8"?>
 <p:sld xmlns:a="http://schemas.openxmlformats.org/drawingml/2006/main" xmlns:p="http://schemas.openxmlformats.org/presentationml/2006/main" xmlns:r="http://schemas.openxmlformats.org/officeDocument/2006/relationships">
   <p:cSld>
+    <p:bg>
+      <p:bgPr>
+        <a:solidFill>
+          <a:srgbClr val="FFFFFF"/>
+        </a:solidFill>
+        <a:effectLst/>
+      </p:bgPr>
+    </p:bg>
     <p:spTree>
       <p:nvGrpSpPr>
         <p:cNvPr id="1" name=""/>
@@ -4544,83 +4636,57 @@
       <p:grpSpPr/>
       <p:sp>
         <p:nvSpPr>
-          <p:cNvPr id="2" name="Title 1"/>
-          <p:cNvSpPr>
-            <a:spLocks noGrp="1"/>
-          </p:cNvSpPr>
-          <p:nvPr>
-            <p:ph type="title"/>
-          </p:nvPr>
-        </p:nvSpPr>
-        <p:spPr/>
-        <p:txBody>
-          <a:bodyPr/>
-          <a:lstStyle/>
-          <a:p>
-            <a:r>
-              <a:t>Compétences attendues</a:t>
-            </a:r>
-          </a:p>
-        </p:txBody>
-      </p:sp>
-      <p:sp>
-        <p:nvSpPr>
-          <p:cNvPr id="3" name="Content Placeholder 2"/>
-          <p:cNvSpPr>
-            <a:spLocks noGrp="1"/>
-          </p:cNvSpPr>
-          <p:nvPr>
-            <p:ph idx="1"/>
-          </p:nvPr>
-        </p:nvSpPr>
-        <p:spPr/>
-        <p:txBody>
-          <a:bodyPr/>
-          <a:lstStyle/>
-          <a:p>
-            <a:pPr>
-              <a:defRPr sz="2000"/>
-            </a:pPr>
-            <a:r>
-              <a:t>✔️ Bureautique académique</a:t>
-            </a:r>
-          </a:p>
-          <a:p>
-            <a:pPr>
-              <a:defRPr sz="2000"/>
-            </a:pPr>
-            <a:r>
-              <a:t>✔️ Recherche documentaire</a:t>
-            </a:r>
-          </a:p>
-          <a:p>
-            <a:pPr>
-              <a:defRPr sz="2000"/>
-            </a:pPr>
-            <a:r>
-              <a:t>✔️ Fichiers et sauvegardes</a:t>
-            </a:r>
-          </a:p>
-          <a:p>
-            <a:pPr>
-              <a:defRPr sz="2000"/>
-            </a:pPr>
-            <a:r>
-              <a:t>✔️ Éthique numérique</a:t>
-            </a:r>
-          </a:p>
-        </p:txBody>
-      </p:sp>
-      <p:sp>
-        <p:nvSpPr>
-          <p:cNvPr id="4" name="TextBox 3"/>
+          <p:cNvPr id="2" name="Rectangle 1"/>
+          <p:cNvSpPr/>
+          <p:nvPr/>
+        </p:nvSpPr>
+        <p:spPr>
+          <a:xfrm>
+            <a:off x="0" y="0"/>
+            <a:ext cx="109728" cy="6858000"/>
+          </a:xfrm>
+          <a:prstGeom prst="rect">
+            <a:avLst/>
+          </a:prstGeom>
+          <a:solidFill>
+            <a:srgbClr val="2C6E49"/>
+          </a:solidFill>
+          <a:ln>
+            <a:noFill/>
+          </a:ln>
+        </p:spPr>
+        <p:style>
+          <a:lnRef idx="1">
+            <a:schemeClr val="accent1"/>
+          </a:lnRef>
+          <a:fillRef idx="3">
+            <a:schemeClr val="accent1"/>
+          </a:fillRef>
+          <a:effectRef idx="2">
+            <a:schemeClr val="accent1"/>
+          </a:effectRef>
+          <a:fontRef idx="minor">
+            <a:schemeClr val="lt1"/>
+          </a:fontRef>
+        </p:style>
+        <p:txBody>
+          <a:bodyPr rtlCol="0" anchor="ctr"/>
+          <a:lstStyle/>
+          <a:p>
+            <a:pPr algn="ctr"/>
+          </a:p>
+        </p:txBody>
+      </p:sp>
+      <p:sp>
+        <p:nvSpPr>
+          <p:cNvPr id="3" name="TextBox 2"/>
           <p:cNvSpPr txBox="1"/>
           <p:nvPr/>
         </p:nvSpPr>
         <p:spPr>
           <a:xfrm>
-            <a:off x="365760" y="6446520"/>
-            <a:ext cx="8412480" cy="320040"/>
+            <a:off x="457200" y="365760"/>
+            <a:ext cx="8229600" cy="640080"/>
           </a:xfrm>
           <a:prstGeom prst="rect">
             <a:avLst/>
@@ -4628,20 +4694,88 @@
           <a:noFill/>
         </p:spPr>
         <p:txBody>
-          <a:bodyPr wrap="none">
+          <a:bodyPr wrap="square">
             <a:spAutoFit/>
           </a:bodyPr>
           <a:lstStyle/>
           <a:p>
-            <a:pPr algn="ctr">
-              <a:defRPr sz="900">
-                <a:solidFill>
-                  <a:srgbClr val="404040"/>
-                </a:solidFill>
-              </a:defRPr>
-            </a:pPr>
-            <a:r>
-              <a:t>Cours TIC 01  •  Diapositive 9/10</a:t>
+            <a:pPr algn="l">
+              <a:defRPr sz="2200" b="1">
+                <a:solidFill>
+                  <a:srgbClr val="1A5C33"/>
+                </a:solidFill>
+              </a:defRPr>
+            </a:pPr>
+            <a:r>
+              <a:t>Fiche cours — Plateforme e-learning (Moodle)</a:t>
+            </a:r>
+          </a:p>
+        </p:txBody>
+      </p:sp>
+      <p:sp>
+        <p:nvSpPr>
+          <p:cNvPr id="4" name="TextBox 3"/>
+          <p:cNvSpPr txBox="1"/>
+          <p:nvPr/>
+        </p:nvSpPr>
+        <p:spPr>
+          <a:xfrm>
+            <a:off x="457200" y="1371600"/>
+            <a:ext cx="7772400" cy="4572000"/>
+          </a:xfrm>
+          <a:prstGeom prst="rect">
+            <a:avLst/>
+          </a:prstGeom>
+          <a:noFill/>
+        </p:spPr>
+        <p:txBody>
+          <a:bodyPr wrap="square">
+            <a:spAutoFit/>
+          </a:bodyPr>
+          <a:lstStyle/>
+          <a:p>
+            <a:pPr>
+              <a:spcAft>
+                <a:spcPts val="600"/>
+              </a:spcAft>
+              <a:defRPr sz="1400">
+                <a:solidFill>
+                  <a:srgbClr val="222222"/>
+                </a:solidFill>
+              </a:defRPr>
+            </a:pPr>
+            <a:r>
+              <a:t>• Référentiel :titres et structure alignés sur Canvas Univ-Mosta (elearning.univ-usto.dz) ; bonnes pratiques benchmark 10 universités algériennes (voirBENCHMARK_10_UNIVERSITES_ELEARNING.md).</a:t>
+            </a:r>
+          </a:p>
+          <a:p>
+            <a:pPr>
+              <a:spcAft>
+                <a:spcPts val="600"/>
+              </a:spcAft>
+              <a:defRPr sz="1400">
+                <a:solidFill>
+                  <a:srgbClr val="222222"/>
+                </a:solidFill>
+              </a:defRPr>
+            </a:pPr>
+            <a:r>
+              <a:t>• Public visé :Étudiants Licence 1 — Département Langues (FR/AN), ENS 1ère année</a:t>
+            </a:r>
+          </a:p>
+          <a:p>
+            <a:pPr>
+              <a:spcAft>
+                <a:spcPts val="600"/>
+              </a:spcAft>
+              <a:defRPr sz="1400">
+                <a:solidFill>
+                  <a:srgbClr val="222222"/>
+                </a:solidFill>
+              </a:defRPr>
+            </a:pPr>
+            <a:r>
+              <a:t>• Compétences pré-requises :Aucun prérequis informatique ; maîtrise minimale du français académique</a:t>
             </a:r>
           </a:p>
         </p:txBody>
@@ -4651,9 +4785,1081 @@
   <p:clrMapOvr>
     <a:masterClrMapping/>
   </p:clrMapOvr>
-  <p:transition spd="med">
-    <p:fade/>
-  </p:transition>
+</p:sld>
+</file>
+
+<file path=ppt/slides/slide5.xml><?xml version="1.0" encoding="utf-8"?>
+<p:sld xmlns:a="http://schemas.openxmlformats.org/drawingml/2006/main" xmlns:p="http://schemas.openxmlformats.org/presentationml/2006/main" xmlns:r="http://schemas.openxmlformats.org/officeDocument/2006/relationships">
+  <p:cSld>
+    <p:bg>
+      <p:bgPr>
+        <a:solidFill>
+          <a:srgbClr val="FFFFFF"/>
+        </a:solidFill>
+        <a:effectLst/>
+      </p:bgPr>
+    </p:bg>
+    <p:spTree>
+      <p:nvGrpSpPr>
+        <p:cNvPr id="1" name=""/>
+        <p:cNvGrpSpPr/>
+        <p:nvPr/>
+      </p:nvGrpSpPr>
+      <p:grpSpPr/>
+      <p:sp>
+        <p:nvSpPr>
+          <p:cNvPr id="2" name="Rectangle 1"/>
+          <p:cNvSpPr/>
+          <p:nvPr/>
+        </p:nvSpPr>
+        <p:spPr>
+          <a:xfrm>
+            <a:off x="0" y="0"/>
+            <a:ext cx="109728" cy="6858000"/>
+          </a:xfrm>
+          <a:prstGeom prst="rect">
+            <a:avLst/>
+          </a:prstGeom>
+          <a:solidFill>
+            <a:srgbClr val="2C6E49"/>
+          </a:solidFill>
+          <a:ln>
+            <a:noFill/>
+          </a:ln>
+        </p:spPr>
+        <p:style>
+          <a:lnRef idx="1">
+            <a:schemeClr val="accent1"/>
+          </a:lnRef>
+          <a:fillRef idx="3">
+            <a:schemeClr val="accent1"/>
+          </a:fillRef>
+          <a:effectRef idx="2">
+            <a:schemeClr val="accent1"/>
+          </a:effectRef>
+          <a:fontRef idx="minor">
+            <a:schemeClr val="lt1"/>
+          </a:fontRef>
+        </p:style>
+        <p:txBody>
+          <a:bodyPr rtlCol="0" anchor="ctr"/>
+          <a:lstStyle/>
+          <a:p>
+            <a:pPr algn="ctr"/>
+          </a:p>
+        </p:txBody>
+      </p:sp>
+      <p:sp>
+        <p:nvSpPr>
+          <p:cNvPr id="3" name="TextBox 2"/>
+          <p:cNvSpPr txBox="1"/>
+          <p:nvPr/>
+        </p:nvSpPr>
+        <p:spPr>
+          <a:xfrm>
+            <a:off x="457200" y="365760"/>
+            <a:ext cx="8229600" cy="640080"/>
+          </a:xfrm>
+          <a:prstGeom prst="rect">
+            <a:avLst/>
+          </a:prstGeom>
+          <a:noFill/>
+        </p:spPr>
+        <p:txBody>
+          <a:bodyPr wrap="square">
+            <a:spAutoFit/>
+          </a:bodyPr>
+          <a:lstStyle/>
+          <a:p>
+            <a:pPr algn="l">
+              <a:defRPr sz="2200" b="1">
+                <a:solidFill>
+                  <a:srgbClr val="1A5C33"/>
+                </a:solidFill>
+              </a:defRPr>
+            </a:pPr>
+            <a:r>
+              <a:t>Objectifs de l'enseignement</a:t>
+            </a:r>
+          </a:p>
+        </p:txBody>
+      </p:sp>
+      <p:sp>
+        <p:nvSpPr>
+          <p:cNvPr id="4" name="TextBox 3"/>
+          <p:cNvSpPr txBox="1"/>
+          <p:nvPr/>
+        </p:nvSpPr>
+        <p:spPr>
+          <a:xfrm>
+            <a:off x="457200" y="1371600"/>
+            <a:ext cx="7772400" cy="4572000"/>
+          </a:xfrm>
+          <a:prstGeom prst="rect">
+            <a:avLst/>
+          </a:prstGeom>
+          <a:noFill/>
+        </p:spPr>
+        <p:txBody>
+          <a:bodyPr wrap="square">
+            <a:spAutoFit/>
+          </a:bodyPr>
+          <a:lstStyle/>
+          <a:p>
+            <a:pPr>
+              <a:spcAft>
+                <a:spcPts val="600"/>
+              </a:spcAft>
+              <a:defRPr sz="1400">
+                <a:solidFill>
+                  <a:srgbClr val="222222"/>
+                </a:solidFill>
+              </a:defRPr>
+            </a:pPr>
+            <a:r>
+              <a:t>• En termes de savoir :- Définir les TIC et distinguer NTIC/TIC/ICT</a:t>
+            </a:r>
+            <a:br/>
+            <a:r>
+              <a:t>- Identifier les trois dimensions : technique, information, communication</a:t>
+            </a:r>
+            <a:br/>
+            <a:r>
+              <a:t>- Citer les fonctions : traitement, transmission, sauvegarde</a:t>
+            </a:r>
+          </a:p>
+          <a:p>
+            <a:pPr>
+              <a:spcAft>
+                <a:spcPts val="600"/>
+              </a:spcAft>
+              <a:defRPr sz="1400">
+                <a:solidFill>
+                  <a:srgbClr val="222222"/>
+                </a:solidFill>
+              </a:defRPr>
+            </a:pPr>
+            <a:r>
+              <a:t>• En termes de savoir-faire :- Utiliser Moodle et le courriel institutionnel</a:t>
+            </a:r>
+            <a:br/>
+            <a:r>
+              <a:t>- Nommer et classer des outils numériques par fonction</a:t>
+            </a:r>
+            <a:br/>
+            <a:r>
+              <a:t>- Évaluer la fiabilité d'une source en ligne (introduction CRAP)</a:t>
+            </a:r>
+          </a:p>
+          <a:p>
+            <a:pPr>
+              <a:spcAft>
+                <a:spcPts val="600"/>
+              </a:spcAft>
+              <a:defRPr sz="1400">
+                <a:solidFill>
+                  <a:srgbClr val="222222"/>
+                </a:solidFill>
+              </a:defRPr>
+            </a:pPr>
+            <a:r>
+              <a:t>• En termes de savoir-être :- Adopter une posture critique face au numérique</a:t>
+            </a:r>
+            <a:br/>
+            <a:r>
+              <a:t>- Respecter l'éthique académique (plagiat, vie privée)</a:t>
+            </a:r>
+          </a:p>
+          <a:p>
+            <a:pPr>
+              <a:spcAft>
+                <a:spcPts val="600"/>
+              </a:spcAft>
+              <a:defRPr sz="1400">
+                <a:solidFill>
+                  <a:srgbClr val="222222"/>
+                </a:solidFill>
+              </a:defRPr>
+            </a:pPr>
+            <a:r>
+              <a:t>• Mode d'évaluation :TD 40 % (5 exercices) + QCM Moodle 20 % + participation 10 % + examen 30 %</a:t>
+            </a:r>
+          </a:p>
+        </p:txBody>
+      </p:sp>
+    </p:spTree>
+  </p:cSld>
+  <p:clrMapOvr>
+    <a:masterClrMapping/>
+  </p:clrMapOvr>
+</p:sld>
+</file>
+
+<file path=ppt/slides/slide6.xml><?xml version="1.0" encoding="utf-8"?>
+<p:sld xmlns:a="http://schemas.openxmlformats.org/drawingml/2006/main" xmlns:p="http://schemas.openxmlformats.org/presentationml/2006/main" xmlns:r="http://schemas.openxmlformats.org/officeDocument/2006/relationships">
+  <p:cSld>
+    <p:bg>
+      <p:bgPr>
+        <a:solidFill>
+          <a:srgbClr val="FFFFFF"/>
+        </a:solidFill>
+        <a:effectLst/>
+      </p:bgPr>
+    </p:bg>
+    <p:spTree>
+      <p:nvGrpSpPr>
+        <p:cNvPr id="1" name=""/>
+        <p:cNvGrpSpPr/>
+        <p:nvPr/>
+      </p:nvGrpSpPr>
+      <p:grpSpPr/>
+      <p:sp>
+        <p:nvSpPr>
+          <p:cNvPr id="2" name="Rectangle 1"/>
+          <p:cNvSpPr/>
+          <p:nvPr/>
+        </p:nvSpPr>
+        <p:spPr>
+          <a:xfrm>
+            <a:off x="0" y="0"/>
+            <a:ext cx="109728" cy="6858000"/>
+          </a:xfrm>
+          <a:prstGeom prst="rect">
+            <a:avLst/>
+          </a:prstGeom>
+          <a:solidFill>
+            <a:srgbClr val="2C6E49"/>
+          </a:solidFill>
+          <a:ln>
+            <a:noFill/>
+          </a:ln>
+        </p:spPr>
+        <p:style>
+          <a:lnRef idx="1">
+            <a:schemeClr val="accent1"/>
+          </a:lnRef>
+          <a:fillRef idx="3">
+            <a:schemeClr val="accent1"/>
+          </a:fillRef>
+          <a:effectRef idx="2">
+            <a:schemeClr val="accent1"/>
+          </a:effectRef>
+          <a:fontRef idx="minor">
+            <a:schemeClr val="lt1"/>
+          </a:fontRef>
+        </p:style>
+        <p:txBody>
+          <a:bodyPr rtlCol="0" anchor="ctr"/>
+          <a:lstStyle/>
+          <a:p>
+            <a:pPr algn="ctr"/>
+          </a:p>
+        </p:txBody>
+      </p:sp>
+      <p:sp>
+        <p:nvSpPr>
+          <p:cNvPr id="3" name="TextBox 2"/>
+          <p:cNvSpPr txBox="1"/>
+          <p:nvPr/>
+        </p:nvSpPr>
+        <p:spPr>
+          <a:xfrm>
+            <a:off x="457200" y="365760"/>
+            <a:ext cx="8229600" cy="640080"/>
+          </a:xfrm>
+          <a:prstGeom prst="rect">
+            <a:avLst/>
+          </a:prstGeom>
+          <a:noFill/>
+        </p:spPr>
+        <p:txBody>
+          <a:bodyPr wrap="square">
+            <a:spAutoFit/>
+          </a:bodyPr>
+          <a:lstStyle/>
+          <a:p>
+            <a:pPr algn="l">
+              <a:defRPr sz="2200" b="1">
+                <a:solidFill>
+                  <a:srgbClr val="1A5C33"/>
+                </a:solidFill>
+              </a:defRPr>
+            </a:pPr>
+            <a:r>
+              <a:t>Contexte réglementaire algérien</a:t>
+            </a:r>
+          </a:p>
+        </p:txBody>
+      </p:sp>
+      <p:sp>
+        <p:nvSpPr>
+          <p:cNvPr id="4" name="TextBox 3"/>
+          <p:cNvSpPr txBox="1"/>
+          <p:nvPr/>
+        </p:nvSpPr>
+        <p:spPr>
+          <a:xfrm>
+            <a:off x="457200" y="1371600"/>
+            <a:ext cx="7772400" cy="4572000"/>
+          </a:xfrm>
+          <a:prstGeom prst="rect">
+            <a:avLst/>
+          </a:prstGeom>
+          <a:noFill/>
+        </p:spPr>
+        <p:txBody>
+          <a:bodyPr wrap="square">
+            <a:spAutoFit/>
+          </a:bodyPr>
+          <a:lstStyle/>
+          <a:p>
+            <a:pPr>
+              <a:spcAft>
+                <a:spcPts val="600"/>
+              </a:spcAft>
+              <a:defRPr sz="1400">
+                <a:solidFill>
+                  <a:srgbClr val="222222"/>
+                </a:solidFill>
+              </a:defRPr>
+            </a:pPr>
+            <a:r>
+              <a:t>• Ce cours s'inscrit dans le cadre réglementaire algérien de la formation des enseignants :</a:t>
+            </a:r>
+          </a:p>
+          <a:p>
+            <a:pPr>
+              <a:spcAft>
+                <a:spcPts val="600"/>
+              </a:spcAft>
+              <a:defRPr sz="1400">
+                <a:solidFill>
+                  <a:srgbClr val="222222"/>
+                </a:solidFill>
+              </a:defRPr>
+            </a:pPr>
+            <a:r>
+              <a:t>• Arrêté ministériel portant création des ENS (cycle Licence/Master)— définit le cadre institutionnel.</a:t>
+            </a:r>
+          </a:p>
+          <a:p>
+            <a:pPr>
+              <a:spcAft>
+                <a:spcPts val="600"/>
+              </a:spcAft>
+              <a:defRPr sz="1400">
+                <a:solidFill>
+                  <a:srgbClr val="222222"/>
+                </a:solidFill>
+              </a:defRPr>
+            </a:pPr>
+            <a:r>
+              <a:t>• Arrêté 712 fixant le programme des concours ENS— programme des concours.</a:t>
+            </a:r>
+          </a:p>
+          <a:p>
+            <a:pPr>
+              <a:spcAft>
+                <a:spcPts val="600"/>
+              </a:spcAft>
+              <a:defRPr sz="1400">
+                <a:solidFill>
+                  <a:srgbClr val="222222"/>
+                </a:solidFill>
+              </a:defRPr>
+            </a:pPr>
+            <a:r>
+              <a:t>• Programme national de TIC pour les filières de langues étrangères— objectifs et contenus.</a:t>
+            </a:r>
+          </a:p>
+          <a:p>
+            <a:pPr>
+              <a:spcAft>
+                <a:spcPts val="600"/>
+              </a:spcAft>
+              <a:defRPr sz="1400">
+                <a:solidFill>
+                  <a:srgbClr val="222222"/>
+                </a:solidFill>
+              </a:defRPr>
+            </a:pPr>
+            <a:r>
+              <a:t>• Référentiel des compétences numériques algérien— compétences attendues.</a:t>
+            </a:r>
+          </a:p>
+          <a:p>
+            <a:pPr>
+              <a:spcAft>
+                <a:spcPts val="600"/>
+              </a:spcAft>
+              <a:defRPr sz="1400">
+                <a:solidFill>
+                  <a:srgbClr val="222222"/>
+                </a:solidFill>
+              </a:defRPr>
+            </a:pPr>
+            <a:r>
+              <a:t>• Benchmark des 10 universités algériennes— standards nationaux (BENCHMARK_10_UNIVERSITES_ELEARNING.md).</a:t>
+            </a:r>
+          </a:p>
+        </p:txBody>
+      </p:sp>
+    </p:spTree>
+  </p:cSld>
+  <p:clrMapOvr>
+    <a:masterClrMapping/>
+  </p:clrMapOvr>
+</p:sld>
+</file>
+
+<file path=ppt/slides/slide7.xml><?xml version="1.0" encoding="utf-8"?>
+<p:sld xmlns:a="http://schemas.openxmlformats.org/drawingml/2006/main" xmlns:p="http://schemas.openxmlformats.org/presentationml/2006/main" xmlns:r="http://schemas.openxmlformats.org/officeDocument/2006/relationships">
+  <p:cSld>
+    <p:bg>
+      <p:bgPr>
+        <a:solidFill>
+          <a:srgbClr val="FFFFFF"/>
+        </a:solidFill>
+        <a:effectLst/>
+      </p:bgPr>
+    </p:bg>
+    <p:spTree>
+      <p:nvGrpSpPr>
+        <p:cNvPr id="1" name=""/>
+        <p:cNvGrpSpPr/>
+        <p:nvPr/>
+      </p:nvGrpSpPr>
+      <p:grpSpPr/>
+      <p:sp>
+        <p:nvSpPr>
+          <p:cNvPr id="2" name="Rectangle 1"/>
+          <p:cNvSpPr/>
+          <p:nvPr/>
+        </p:nvSpPr>
+        <p:spPr>
+          <a:xfrm>
+            <a:off x="0" y="0"/>
+            <a:ext cx="109728" cy="6858000"/>
+          </a:xfrm>
+          <a:prstGeom prst="rect">
+            <a:avLst/>
+          </a:prstGeom>
+          <a:solidFill>
+            <a:srgbClr val="2C6E49"/>
+          </a:solidFill>
+          <a:ln>
+            <a:noFill/>
+          </a:ln>
+        </p:spPr>
+        <p:style>
+          <a:lnRef idx="1">
+            <a:schemeClr val="accent1"/>
+          </a:lnRef>
+          <a:fillRef idx="3">
+            <a:schemeClr val="accent1"/>
+          </a:fillRef>
+          <a:effectRef idx="2">
+            <a:schemeClr val="accent1"/>
+          </a:effectRef>
+          <a:fontRef idx="minor">
+            <a:schemeClr val="lt1"/>
+          </a:fontRef>
+        </p:style>
+        <p:txBody>
+          <a:bodyPr rtlCol="0" anchor="ctr"/>
+          <a:lstStyle/>
+          <a:p>
+            <a:pPr algn="ctr"/>
+          </a:p>
+        </p:txBody>
+      </p:sp>
+      <p:sp>
+        <p:nvSpPr>
+          <p:cNvPr id="3" name="TextBox 2"/>
+          <p:cNvSpPr txBox="1"/>
+          <p:nvPr/>
+        </p:nvSpPr>
+        <p:spPr>
+          <a:xfrm>
+            <a:off x="457200" y="365760"/>
+            <a:ext cx="8229600" cy="640080"/>
+          </a:xfrm>
+          <a:prstGeom prst="rect">
+            <a:avLst/>
+          </a:prstGeom>
+          <a:noFill/>
+        </p:spPr>
+        <p:txBody>
+          <a:bodyPr wrap="square">
+            <a:spAutoFit/>
+          </a:bodyPr>
+          <a:lstStyle/>
+          <a:p>
+            <a:pPr algn="l">
+              <a:defRPr sz="2200" b="1">
+                <a:solidFill>
+                  <a:srgbClr val="1A5C33"/>
+                </a:solidFill>
+              </a:defRPr>
+            </a:pPr>
+            <a:r>
+              <a:t>Bibliographie et ressources externes</a:t>
+            </a:r>
+          </a:p>
+        </p:txBody>
+      </p:sp>
+      <p:sp>
+        <p:nvSpPr>
+          <p:cNvPr id="4" name="TextBox 3"/>
+          <p:cNvSpPr txBox="1"/>
+          <p:nvPr/>
+        </p:nvSpPr>
+        <p:spPr>
+          <a:xfrm>
+            <a:off x="457200" y="1371600"/>
+            <a:ext cx="7772400" cy="4572000"/>
+          </a:xfrm>
+          <a:prstGeom prst="rect">
+            <a:avLst/>
+          </a:prstGeom>
+          <a:noFill/>
+        </p:spPr>
+        <p:txBody>
+          <a:bodyPr wrap="square">
+            <a:spAutoFit/>
+          </a:bodyPr>
+          <a:lstStyle/>
+          <a:p>
+            <a:pPr>
+              <a:spcAft>
+                <a:spcPts val="600"/>
+              </a:spcAft>
+              <a:defRPr sz="1400">
+                <a:solidFill>
+                  <a:srgbClr val="222222"/>
+                </a:solidFill>
+              </a:defRPr>
+            </a:pPr>
+            <a:r>
+              <a:t>• UIT — définitions TIC ; UNESCO — compétences numériques ; Guide étudiant Moodle Univ. Boumerdès / Béjaïa</a:t>
+            </a:r>
+          </a:p>
+          <a:p>
+            <a:pPr>
+              <a:spcAft>
+                <a:spcPts val="600"/>
+              </a:spcAft>
+              <a:defRPr sz="1400">
+                <a:solidFill>
+                  <a:srgbClr val="222222"/>
+                </a:solidFill>
+              </a:defRPr>
+            </a:pPr>
+            <a:r>
+              <a:t>• Contact enseignant :BELACEL Madani —madani.belacel@univ-mosta.dz</a:t>
+            </a:r>
+          </a:p>
+        </p:txBody>
+      </p:sp>
+    </p:spTree>
+  </p:cSld>
+  <p:clrMapOvr>
+    <a:masterClrMapping/>
+  </p:clrMapOvr>
+</p:sld>
+</file>
+
+<file path=ppt/slides/slide8.xml><?xml version="1.0" encoding="utf-8"?>
+<p:sld xmlns:a="http://schemas.openxmlformats.org/drawingml/2006/main" xmlns:p="http://schemas.openxmlformats.org/presentationml/2006/main" xmlns:r="http://schemas.openxmlformats.org/officeDocument/2006/relationships">
+  <p:cSld>
+    <p:bg>
+      <p:bgPr>
+        <a:solidFill>
+          <a:srgbClr val="FFFFFF"/>
+        </a:solidFill>
+        <a:effectLst/>
+      </p:bgPr>
+    </p:bg>
+    <p:spTree>
+      <p:nvGrpSpPr>
+        <p:cNvPr id="1" name=""/>
+        <p:cNvGrpSpPr/>
+        <p:nvPr/>
+      </p:nvGrpSpPr>
+      <p:grpSpPr/>
+      <p:sp>
+        <p:nvSpPr>
+          <p:cNvPr id="2" name="Rectangle 1"/>
+          <p:cNvSpPr/>
+          <p:nvPr/>
+        </p:nvSpPr>
+        <p:spPr>
+          <a:xfrm>
+            <a:off x="0" y="0"/>
+            <a:ext cx="109728" cy="6858000"/>
+          </a:xfrm>
+          <a:prstGeom prst="rect">
+            <a:avLst/>
+          </a:prstGeom>
+          <a:solidFill>
+            <a:srgbClr val="2C6E49"/>
+          </a:solidFill>
+          <a:ln>
+            <a:noFill/>
+          </a:ln>
+        </p:spPr>
+        <p:style>
+          <a:lnRef idx="1">
+            <a:schemeClr val="accent1"/>
+          </a:lnRef>
+          <a:fillRef idx="3">
+            <a:schemeClr val="accent1"/>
+          </a:fillRef>
+          <a:effectRef idx="2">
+            <a:schemeClr val="accent1"/>
+          </a:effectRef>
+          <a:fontRef idx="minor">
+            <a:schemeClr val="lt1"/>
+          </a:fontRef>
+        </p:style>
+        <p:txBody>
+          <a:bodyPr rtlCol="0" anchor="ctr"/>
+          <a:lstStyle/>
+          <a:p>
+            <a:pPr algn="ctr"/>
+          </a:p>
+        </p:txBody>
+      </p:sp>
+      <p:sp>
+        <p:nvSpPr>
+          <p:cNvPr id="3" name="TextBox 2"/>
+          <p:cNvSpPr txBox="1"/>
+          <p:nvPr/>
+        </p:nvSpPr>
+        <p:spPr>
+          <a:xfrm>
+            <a:off x="457200" y="365760"/>
+            <a:ext cx="8229600" cy="640080"/>
+          </a:xfrm>
+          <a:prstGeom prst="rect">
+            <a:avLst/>
+          </a:prstGeom>
+          <a:noFill/>
+        </p:spPr>
+        <p:txBody>
+          <a:bodyPr wrap="square">
+            <a:spAutoFit/>
+          </a:bodyPr>
+          <a:lstStyle/>
+          <a:p>
+            <a:pPr algn="l">
+              <a:defRPr sz="2200" b="1">
+                <a:solidFill>
+                  <a:srgbClr val="1A5C33"/>
+                </a:solidFill>
+              </a:defRPr>
+            </a:pPr>
+            <a:r>
+              <a:t>Plan du Cours</a:t>
+            </a:r>
+          </a:p>
+        </p:txBody>
+      </p:sp>
+      <p:sp>
+        <p:nvSpPr>
+          <p:cNvPr id="4" name="TextBox 3"/>
+          <p:cNvSpPr txBox="1"/>
+          <p:nvPr/>
+        </p:nvSpPr>
+        <p:spPr>
+          <a:xfrm>
+            <a:off x="457200" y="1371600"/>
+            <a:ext cx="7772400" cy="4572000"/>
+          </a:xfrm>
+          <a:prstGeom prst="rect">
+            <a:avLst/>
+          </a:prstGeom>
+          <a:noFill/>
+        </p:spPr>
+        <p:txBody>
+          <a:bodyPr wrap="square">
+            <a:spAutoFit/>
+          </a:bodyPr>
+          <a:lstStyle/>
+          <a:p>
+            <a:pPr>
+              <a:spcAft>
+                <a:spcPts val="600"/>
+              </a:spcAft>
+              <a:defRPr sz="1400">
+                <a:solidFill>
+                  <a:srgbClr val="222222"/>
+                </a:solidFill>
+              </a:defRPr>
+            </a:pPr>
+            <a:r>
+              <a:t>• Introduction et importance des TIC dans le monde contemporain</a:t>
+            </a:r>
+          </a:p>
+          <a:p>
+            <a:pPr>
+              <a:spcAft>
+                <a:spcPts val="600"/>
+              </a:spcAft>
+              <a:defRPr sz="1400">
+                <a:solidFill>
+                  <a:srgbClr val="222222"/>
+                </a:solidFill>
+              </a:defRPr>
+            </a:pPr>
+            <a:r>
+              <a:t>• Définition détaillée des TIC</a:t>
+            </a:r>
+          </a:p>
+          <a:p>
+            <a:pPr>
+              <a:spcAft>
+                <a:spcPts val="600"/>
+              </a:spcAft>
+              <a:defRPr sz="1400">
+                <a:solidFill>
+                  <a:srgbClr val="222222"/>
+                </a:solidFill>
+              </a:defRPr>
+            </a:pPr>
+            <a:r>
+              <a:t>• Évolution historique et terminologique (NTIC → TIC)</a:t>
+            </a:r>
+          </a:p>
+          <a:p>
+            <a:pPr>
+              <a:spcAft>
+                <a:spcPts val="600"/>
+              </a:spcAft>
+              <a:defRPr sz="1400">
+                <a:solidFill>
+                  <a:srgbClr val="222222"/>
+                </a:solidFill>
+              </a:defRPr>
+            </a:pPr>
+            <a:r>
+              <a:t>• Les trois dimensions fondamentales des TIC</a:t>
+            </a:r>
+          </a:p>
+          <a:p>
+            <a:pPr>
+              <a:spcAft>
+                <a:spcPts val="600"/>
+              </a:spcAft>
+              <a:defRPr sz="1400">
+                <a:solidFill>
+                  <a:srgbClr val="222222"/>
+                </a:solidFill>
+              </a:defRPr>
+            </a:pPr>
+            <a:r>
+              <a:t>• Rôle et fonctions des TIC (traitement, transmission, sauvegarde)</a:t>
+            </a:r>
+          </a:p>
+          <a:p>
+            <a:pPr>
+              <a:spcAft>
+                <a:spcPts val="600"/>
+              </a:spcAft>
+              <a:defRPr sz="1400">
+                <a:solidFill>
+                  <a:srgbClr val="222222"/>
+                </a:solidFill>
+              </a:defRPr>
+            </a:pPr>
+            <a:r>
+              <a:t>• Services offerts par les TIC</a:t>
+            </a:r>
+          </a:p>
+          <a:p>
+            <a:pPr>
+              <a:spcAft>
+                <a:spcPts val="600"/>
+              </a:spcAft>
+              <a:defRPr sz="1400">
+                <a:solidFill>
+                  <a:srgbClr val="222222"/>
+                </a:solidFill>
+              </a:defRPr>
+            </a:pPr>
+            <a:r>
+              <a:t>• Domaines d'application avec focus sur l'éducation</a:t>
+            </a:r>
+          </a:p>
+          <a:p>
+            <a:pPr>
+              <a:spcAft>
+                <a:spcPts val="600"/>
+              </a:spcAft>
+              <a:defRPr sz="1400">
+                <a:solidFill>
+                  <a:srgbClr val="222222"/>
+                </a:solidFill>
+              </a:defRPr>
+            </a:pPr>
+            <a:r>
+              <a:t>• Compétences numériques attendues en Licence Langues</a:t>
+            </a:r>
+          </a:p>
+          <a:p>
+            <a:pPr>
+              <a:spcAft>
+                <a:spcPts val="600"/>
+              </a:spcAft>
+              <a:defRPr sz="1400">
+                <a:solidFill>
+                  <a:srgbClr val="222222"/>
+                </a:solidFill>
+              </a:defRPr>
+            </a:pPr>
+            <a:r>
+              <a:t>• Conclusion et transition vers le cours suivant</a:t>
+            </a:r>
+          </a:p>
+        </p:txBody>
+      </p:sp>
+    </p:spTree>
+  </p:cSld>
+  <p:clrMapOvr>
+    <a:masterClrMapping/>
+  </p:clrMapOvr>
+</p:sld>
+</file>
+
+<file path=ppt/slides/slide9.xml><?xml version="1.0" encoding="utf-8"?>
+<p:sld xmlns:a="http://schemas.openxmlformats.org/drawingml/2006/main" xmlns:p="http://schemas.openxmlformats.org/presentationml/2006/main" xmlns:r="http://schemas.openxmlformats.org/officeDocument/2006/relationships">
+  <p:cSld>
+    <p:bg>
+      <p:bgPr>
+        <a:solidFill>
+          <a:srgbClr val="FFFFFF"/>
+        </a:solidFill>
+        <a:effectLst/>
+      </p:bgPr>
+    </p:bg>
+    <p:spTree>
+      <p:nvGrpSpPr>
+        <p:cNvPr id="1" name=""/>
+        <p:cNvGrpSpPr/>
+        <p:nvPr/>
+      </p:nvGrpSpPr>
+      <p:grpSpPr/>
+      <p:sp>
+        <p:nvSpPr>
+          <p:cNvPr id="2" name="Rectangle 1"/>
+          <p:cNvSpPr/>
+          <p:nvPr/>
+        </p:nvSpPr>
+        <p:spPr>
+          <a:xfrm>
+            <a:off x="0" y="0"/>
+            <a:ext cx="109728" cy="6858000"/>
+          </a:xfrm>
+          <a:prstGeom prst="rect">
+            <a:avLst/>
+          </a:prstGeom>
+          <a:solidFill>
+            <a:srgbClr val="2C6E49"/>
+          </a:solidFill>
+          <a:ln>
+            <a:noFill/>
+          </a:ln>
+        </p:spPr>
+        <p:style>
+          <a:lnRef idx="1">
+            <a:schemeClr val="accent1"/>
+          </a:lnRef>
+          <a:fillRef idx="3">
+            <a:schemeClr val="accent1"/>
+          </a:fillRef>
+          <a:effectRef idx="2">
+            <a:schemeClr val="accent1"/>
+          </a:effectRef>
+          <a:fontRef idx="minor">
+            <a:schemeClr val="lt1"/>
+          </a:fontRef>
+        </p:style>
+        <p:txBody>
+          <a:bodyPr rtlCol="0" anchor="ctr"/>
+          <a:lstStyle/>
+          <a:p>
+            <a:pPr algn="ctr"/>
+          </a:p>
+        </p:txBody>
+      </p:sp>
+      <p:sp>
+        <p:nvSpPr>
+          <p:cNvPr id="3" name="TextBox 2"/>
+          <p:cNvSpPr txBox="1"/>
+          <p:nvPr/>
+        </p:nvSpPr>
+        <p:spPr>
+          <a:xfrm>
+            <a:off x="457200" y="365760"/>
+            <a:ext cx="8229600" cy="640080"/>
+          </a:xfrm>
+          <a:prstGeom prst="rect">
+            <a:avLst/>
+          </a:prstGeom>
+          <a:noFill/>
+        </p:spPr>
+        <p:txBody>
+          <a:bodyPr wrap="square">
+            <a:spAutoFit/>
+          </a:bodyPr>
+          <a:lstStyle/>
+          <a:p>
+            <a:pPr algn="l">
+              <a:defRPr sz="2200" b="1">
+                <a:solidFill>
+                  <a:srgbClr val="1A5C33"/>
+                </a:solidFill>
+              </a:defRPr>
+            </a:pPr>
+            <a:r>
+              <a:t>1. Introduction et Importance des TIC(10 min)</a:t>
+            </a:r>
+          </a:p>
+        </p:txBody>
+      </p:sp>
+      <p:sp>
+        <p:nvSpPr>
+          <p:cNvPr id="4" name="TextBox 3"/>
+          <p:cNvSpPr txBox="1"/>
+          <p:nvPr/>
+        </p:nvSpPr>
+        <p:spPr>
+          <a:xfrm>
+            <a:off x="457200" y="1371600"/>
+            <a:ext cx="7772400" cy="4572000"/>
+          </a:xfrm>
+          <a:prstGeom prst="rect">
+            <a:avLst/>
+          </a:prstGeom>
+          <a:noFill/>
+        </p:spPr>
+        <p:txBody>
+          <a:bodyPr wrap="square">
+            <a:spAutoFit/>
+          </a:bodyPr>
+          <a:lstStyle/>
+          <a:p>
+            <a:pPr>
+              <a:spcAft>
+                <a:spcPts val="600"/>
+              </a:spcAft>
+              <a:defRPr sz="1400">
+                <a:solidFill>
+                  <a:srgbClr val="222222"/>
+                </a:solidFill>
+              </a:defRPr>
+            </a:pPr>
+            <a:r>
+              <a:t>• LesTechniques de l'Information et de la Communication(TIC) désignent l'ensemble des outils numériques qui permettent de créer, traiter, stocker, transmettre et partager l'information. Elles incluent ordinateurs, smartphones, réseaux sans fil et plateformes en ligne.</a:t>
+            </a:r>
+          </a:p>
+          <a:p>
+            <a:pPr>
+              <a:spcAft>
+                <a:spcPts val="600"/>
+              </a:spcAft>
+              <a:defRPr sz="1400">
+                <a:solidFill>
+                  <a:srgbClr val="222222"/>
+                </a:solidFill>
+              </a:defRPr>
+            </a:pPr>
+            <a:r>
+              <a:t>• Pourquoi ce cours en Licence 1 ?Dès la première année, vous utilisez les TIC pour :</a:t>
+            </a:r>
+          </a:p>
+          <a:p>
+            <a:pPr>
+              <a:spcAft>
+                <a:spcPts val="600"/>
+              </a:spcAft>
+              <a:defRPr sz="1400">
+                <a:solidFill>
+                  <a:srgbClr val="222222"/>
+                </a:solidFill>
+              </a:defRPr>
+            </a:pPr>
+            <a:r>
+              <a:t>• Accéder aux ressources: Moodle, bibliothèque numérique, polycopiés PDF</a:t>
+            </a:r>
+          </a:p>
+          <a:p>
+            <a:pPr>
+              <a:spcAft>
+                <a:spcPts val="600"/>
+              </a:spcAft>
+              <a:defRPr sz="1400">
+                <a:solidFill>
+                  <a:srgbClr val="222222"/>
+                </a:solidFill>
+              </a:defRPr>
+            </a:pPr>
+            <a:r>
+              <a:t>• Communiquer: courriel institutionnel, forums de TD</a:t>
+            </a:r>
+          </a:p>
+          <a:p>
+            <a:pPr>
+              <a:spcAft>
+                <a:spcPts val="600"/>
+              </a:spcAft>
+              <a:defRPr sz="1400">
+                <a:solidFill>
+                  <a:srgbClr val="222222"/>
+                </a:solidFill>
+              </a:defRPr>
+            </a:pPr>
+            <a:r>
+              <a:t>• Rechercher: bases documentaires, corpus linguistiques multilingues</a:t>
+            </a:r>
+          </a:p>
+          <a:p>
+            <a:pPr>
+              <a:spcAft>
+                <a:spcPts val="600"/>
+              </a:spcAft>
+              <a:defRPr sz="1400">
+                <a:solidFill>
+                  <a:srgbClr val="222222"/>
+                </a:solidFill>
+              </a:defRPr>
+            </a:pPr>
+            <a:r>
+              <a:t>• Produire: devoirs Word, présentations PowerPoint, exposés</a:t>
+            </a:r>
+          </a:p>
+          <a:p>
+            <a:pPr>
+              <a:spcAft>
+                <a:spcPts val="600"/>
+              </a:spcAft>
+              <a:defRPr sz="1400">
+                <a:solidFill>
+                  <a:srgbClr val="222222"/>
+                </a:solidFill>
+              </a:defRPr>
+            </a:pPr>
+            <a:r>
+              <a:t>• Objectif pédagogique :développer uneculture numériquesolide — savoir utiliser les outils, mais aussi comprendre leurs limites (fiabilité des sources, plagiat, vie privée).</a:t>
+            </a:r>
+          </a:p>
+        </p:txBody>
+      </p:sp>
+    </p:spTree>
+  </p:cSld>
+  <p:clrMapOvr>
+    <a:masterClrMapping/>
+  </p:clrMapOvr>
 </p:sld>
 </file>
 
@@ -4975,319 +6181,4 @@
   </a:objectDefaults>
   <a:extraClrSchemeLst/>
 </a:theme>
-</file>
-
-<file path=ppt/theme/theme2.xml><?xml version="1.0" encoding="utf-8"?>
-<a:theme xmlns:a="http://schemas.openxmlformats.org/drawingml/2006/main" name="Thème Office">
-  <a:themeElements>
-    <a:clrScheme name="Office">
-      <a:dk1>
-        <a:sysClr val="windowText" lastClr="000000"/>
-      </a:dk1>
-      <a:lt1>
-        <a:sysClr val="window" lastClr="FFFFFF"/>
-      </a:lt1>
-      <a:dk2>
-        <a:srgbClr val="0E2841"/>
-      </a:dk2>
-      <a:lt2>
-        <a:srgbClr val="E8E8E8"/>
-      </a:lt2>
-      <a:accent1>
-        <a:srgbClr val="156082"/>
-      </a:accent1>
-      <a:accent2>
-        <a:srgbClr val="E97132"/>
-      </a:accent2>
-      <a:accent3>
-        <a:srgbClr val="196B24"/>
-      </a:accent3>
-      <a:accent4>
-        <a:srgbClr val="0F9ED5"/>
-      </a:accent4>
-      <a:accent5>
-        <a:srgbClr val="A02B93"/>
-      </a:accent5>
-      <a:accent6>
-        <a:srgbClr val="4EA72E"/>
-      </a:accent6>
-      <a:hlink>
-        <a:srgbClr val="467886"/>
-      </a:hlink>
-      <a:folHlink>
-        <a:srgbClr val="96607D"/>
-      </a:folHlink>
-    </a:clrScheme>
-    <a:fontScheme name="Office">
-      <a:majorFont>
-        <a:latin typeface="Aptos Display" panose="02110004020202020204"/>
-        <a:ea typeface=""/>
-        <a:cs typeface=""/>
-        <a:font script="Jpan" typeface="游ゴシック Light"/>
-        <a:font script="Hang" typeface="맑은 고딕"/>
-        <a:font script="Hans" typeface="等线 Light"/>
-        <a:font script="Hant" typeface="新細明體"/>
-        <a:font script="Arab" typeface="Times New Roman"/>
-        <a:font script="Hebr" typeface="Times New Roman"/>
-        <a:font script="Thai" typeface="Angsana New"/>
-        <a:font script="Ethi" typeface="Nyala"/>
-        <a:font script="Beng" typeface="Vrinda"/>
-        <a:font script="Gujr" typeface="Shruti"/>
-        <a:font script="Khmr" typeface="MoolBoran"/>
-        <a:font script="Knda" typeface="Tunga"/>
-        <a:font script="Guru" typeface="Raavi"/>
-        <a:font script="Cans" typeface="Euphemia"/>
-        <a:font script="Cher" typeface="Plantagenet Cherokee"/>
-        <a:font script="Yiii" typeface="Microsoft Yi Baiti"/>
-        <a:font script="Tibt" typeface="Microsoft Himalaya"/>
-        <a:font script="Thaa" typeface="MV Boli"/>
-        <a:font script="Deva" typeface="Mangal"/>
-        <a:font script="Telu" typeface="Gautami"/>
-        <a:font script="Taml" typeface="Latha"/>
-        <a:font script="Syrc" typeface="Estrangelo Edessa"/>
-        <a:font script="Orya" typeface="Kalinga"/>
-        <a:font script="Mlym" typeface="Kartika"/>
-        <a:font script="Laoo" typeface="DokChampa"/>
-        <a:font script="Sinh" typeface="Iskoola Pota"/>
-        <a:font script="Mong" typeface="Mongolian Baiti"/>
-        <a:font script="Viet" typeface="Times New Roman"/>
-        <a:font script="Uigh" typeface="Microsoft Uighur"/>
-        <a:font script="Geor" typeface="Sylfaen"/>
-        <a:font script="Armn" typeface="Arial"/>
-        <a:font script="Bugi" typeface="Leelawadee UI"/>
-        <a:font script="Bopo" typeface="Microsoft JhengHei"/>
-        <a:font script="Java" typeface="Javanese Text"/>
-        <a:font script="Lisu" typeface="Segoe UI"/>
-        <a:font script="Mymr" typeface="Myanmar Text"/>
-        <a:font script="Nkoo" typeface="Ebrima"/>
-        <a:font script="Olck" typeface="Nirmala UI"/>
-        <a:font script="Osma" typeface="Ebrima"/>
-        <a:font script="Phag" typeface="Phagspa"/>
-        <a:font script="Syrn" typeface="Estrangelo Edessa"/>
-        <a:font script="Syrj" typeface="Estrangelo Edessa"/>
-        <a:font script="Syre" typeface="Estrangelo Edessa"/>
-        <a:font script="Sora" typeface="Nirmala UI"/>
-        <a:font script="Tale" typeface="Microsoft Tai Le"/>
-        <a:font script="Talu" typeface="Microsoft New Tai Lue"/>
-        <a:font script="Tfng" typeface="Ebrima"/>
-      </a:majorFont>
-      <a:minorFont>
-        <a:latin typeface="Aptos" panose="02110004020202020204"/>
-        <a:ea typeface=""/>
-        <a:cs typeface=""/>
-        <a:font script="Jpan" typeface="游ゴシック"/>
-        <a:font script="Hang" typeface="맑은 고딕"/>
-        <a:font script="Hans" typeface="等线"/>
-        <a:font script="Hant" typeface="新細明體"/>
-        <a:font script="Arab" typeface="Arial"/>
-        <a:font script="Hebr" typeface="Arial"/>
-        <a:font script="Thai" typeface="Cordia New"/>
-        <a:font script="Ethi" typeface="Nyala"/>
-        <a:font script="Beng" typeface="Vrinda"/>
-        <a:font script="Gujr" typeface="Shruti"/>
-        <a:font script="Khmr" typeface="DaunPenh"/>
-        <a:font script="Knda" typeface="Tunga"/>
-        <a:font script="Guru" typeface="Raavi"/>
-        <a:font script="Cans" typeface="Euphemia"/>
-        <a:font script="Cher" typeface="Plantagenet Cherokee"/>
-        <a:font script="Yiii" typeface="Microsoft Yi Baiti"/>
-        <a:font script="Tibt" typeface="Microsoft Himalaya"/>
-        <a:font script="Thaa" typeface="MV Boli"/>
-        <a:font script="Deva" typeface="Mangal"/>
-        <a:font script="Telu" typeface="Gautami"/>
-        <a:font script="Taml" typeface="Latha"/>
-        <a:font script="Syrc" typeface="Estrangelo Edessa"/>
-        <a:font script="Orya" typeface="Kalinga"/>
-        <a:font script="Mlym" typeface="Kartika"/>
-        <a:font script="Laoo" typeface="DokChampa"/>
-        <a:font script="Sinh" typeface="Iskoola Pota"/>
-        <a:font script="Mong" typeface="Mongolian Baiti"/>
-        <a:font script="Viet" typeface="Arial"/>
-        <a:font script="Uigh" typeface="Microsoft Uighur"/>
-        <a:font script="Geor" typeface="Sylfaen"/>
-        <a:font script="Armn" typeface="Arial"/>
-        <a:font script="Bugi" typeface="Leelawadee UI"/>
-        <a:font script="Bopo" typeface="Microsoft JhengHei"/>
-        <a:font script="Java" typeface="Javanese Text"/>
-        <a:font script="Lisu" typeface="Segoe UI"/>
-        <a:font script="Mymr" typeface="Myanmar Text"/>
-        <a:font script="Nkoo" typeface="Ebrima"/>
-        <a:font script="Olck" typeface="Nirmala UI"/>
-        <a:font script="Osma" typeface="Ebrima"/>
-        <a:font script="Phag" typeface="Phagspa"/>
-        <a:font script="Syrn" typeface="Estrangelo Edessa"/>
-        <a:font script="Syrj" typeface="Estrangelo Edessa"/>
-        <a:font script="Syre" typeface="Estrangelo Edessa"/>
-        <a:font script="Sora" typeface="Nirmala UI"/>
-        <a:font script="Tale" typeface="Microsoft Tai Le"/>
-        <a:font script="Talu" typeface="Microsoft New Tai Lue"/>
-        <a:font script="Tfng" typeface="Ebrima"/>
-      </a:minorFont>
-    </a:fontScheme>
-    <a:fmtScheme name="Office">
-      <a:fillStyleLst>
-        <a:solidFill>
-          <a:schemeClr val="phClr"/>
-        </a:solidFill>
-        <a:gradFill rotWithShape="1">
-          <a:gsLst>
-            <a:gs pos="0">
-              <a:schemeClr val="phClr">
-                <a:lumMod val="110000"/>
-                <a:satMod val="105000"/>
-                <a:tint val="67000"/>
-              </a:schemeClr>
-            </a:gs>
-            <a:gs pos="50000">
-              <a:schemeClr val="phClr">
-                <a:lumMod val="105000"/>
-                <a:satMod val="103000"/>
-                <a:tint val="73000"/>
-              </a:schemeClr>
-            </a:gs>
-            <a:gs pos="100000">
-              <a:schemeClr val="phClr">
-                <a:lumMod val="105000"/>
-                <a:satMod val="109000"/>
-                <a:tint val="81000"/>
-              </a:schemeClr>
-            </a:gs>
-          </a:gsLst>
-          <a:lin ang="5400000" scaled="0"/>
-        </a:gradFill>
-        <a:gradFill rotWithShape="1">
-          <a:gsLst>
-            <a:gs pos="0">
-              <a:schemeClr val="phClr">
-                <a:satMod val="103000"/>
-                <a:lumMod val="102000"/>
-                <a:tint val="94000"/>
-              </a:schemeClr>
-            </a:gs>
-            <a:gs pos="50000">
-              <a:schemeClr val="phClr">
-                <a:satMod val="110000"/>
-                <a:lumMod val="100000"/>
-                <a:shade val="100000"/>
-              </a:schemeClr>
-            </a:gs>
-            <a:gs pos="100000">
-              <a:schemeClr val="phClr">
-                <a:lumMod val="99000"/>
-                <a:satMod val="120000"/>
-                <a:shade val="78000"/>
-              </a:schemeClr>
-            </a:gs>
-          </a:gsLst>
-          <a:lin ang="5400000" scaled="0"/>
-        </a:gradFill>
-      </a:fillStyleLst>
-      <a:lnStyleLst>
-        <a:ln w="12700" cap="flat" cmpd="sng" algn="ctr">
-          <a:solidFill>
-            <a:schemeClr val="phClr"/>
-          </a:solidFill>
-          <a:prstDash val="solid"/>
-          <a:miter lim="800000"/>
-        </a:ln>
-        <a:ln w="19050" cap="flat" cmpd="sng" algn="ctr">
-          <a:solidFill>
-            <a:schemeClr val="phClr"/>
-          </a:solidFill>
-          <a:prstDash val="solid"/>
-          <a:miter lim="800000"/>
-        </a:ln>
-        <a:ln w="25400" cap="flat" cmpd="sng" algn="ctr">
-          <a:solidFill>
-            <a:schemeClr val="phClr"/>
-          </a:solidFill>
-          <a:prstDash val="solid"/>
-          <a:miter lim="800000"/>
-        </a:ln>
-      </a:lnStyleLst>
-      <a:effectStyleLst>
-        <a:effectStyle>
-          <a:effectLst/>
-        </a:effectStyle>
-        <a:effectStyle>
-          <a:effectLst/>
-        </a:effectStyle>
-        <a:effectStyle>
-          <a:effectLst>
-            <a:outerShdw blurRad="57150" dist="19050" dir="5400000" algn="ctr" rotWithShape="0">
-              <a:srgbClr val="000000">
-                <a:alpha val="63000"/>
-              </a:srgbClr>
-            </a:outerShdw>
-          </a:effectLst>
-        </a:effectStyle>
-      </a:effectStyleLst>
-      <a:bgFillStyleLst>
-        <a:solidFill>
-          <a:schemeClr val="phClr"/>
-        </a:solidFill>
-        <a:solidFill>
-          <a:schemeClr val="phClr">
-            <a:tint val="95000"/>
-            <a:satMod val="170000"/>
-          </a:schemeClr>
-        </a:solidFill>
-        <a:gradFill rotWithShape="1">
-          <a:gsLst>
-            <a:gs pos="0">
-              <a:schemeClr val="phClr">
-                <a:tint val="93000"/>
-                <a:satMod val="150000"/>
-                <a:shade val="98000"/>
-                <a:lumMod val="102000"/>
-              </a:schemeClr>
-            </a:gs>
-            <a:gs pos="50000">
-              <a:schemeClr val="phClr">
-                <a:tint val="98000"/>
-                <a:satMod val="130000"/>
-                <a:shade val="90000"/>
-                <a:lumMod val="103000"/>
-              </a:schemeClr>
-            </a:gs>
-            <a:gs pos="100000">
-              <a:schemeClr val="phClr">
-                <a:shade val="63000"/>
-                <a:satMod val="120000"/>
-              </a:schemeClr>
-            </a:gs>
-          </a:gsLst>
-          <a:lin ang="5400000" scaled="0"/>
-        </a:gradFill>
-      </a:bgFillStyleLst>
-    </a:fmtScheme>
-  </a:themeElements>
-  <a:objectDefaults>
-    <a:lnDef>
-      <a:spPr/>
-      <a:bodyPr/>
-      <a:lstStyle/>
-      <a:style>
-        <a:lnRef idx="2">
-          <a:schemeClr val="accent1"/>
-        </a:lnRef>
-        <a:fillRef idx="0">
-          <a:schemeClr val="accent1"/>
-        </a:fillRef>
-        <a:effectRef idx="1">
-          <a:schemeClr val="accent1"/>
-        </a:effectRef>
-        <a:fontRef idx="minor">
-          <a:schemeClr val="tx1"/>
-        </a:fontRef>
-      </a:style>
-    </a:lnDef>
-  </a:objectDefaults>
-  <a:extraClrSchemeLst/>
-  <a:extLst>
-    <a:ext uri="{05A4C25C-085E-4340-85A3-A5531E510DB2}">
-      <thm15:themeFamily xmlns:thm15="http://schemas.microsoft.com/office/thememl/2012/main" name="Office Theme" id="{2E142A2C-CD16-42D6-873A-C26D2A0506FA}" vid="{1BDDFF52-6CD6-40A5-AB3C-68EB2F1E4D0A}"/>
-    </a:ext>
-  </a:extLst>
-</a:theme>
 </file>
--- a/cours/Module TIC/Département Français/Licence 2/Cours_TIC_01_Introduction_aux_TIC_FR.pptx
+++ b/cours/Module TIC/Département Français/Licence 2/Cours_TIC_01_Introduction_aux_TIC_FR.pptx
@@ -2850,7 +2850,7 @@
           <a:solidFill>
             <a:schemeClr val="tx1"/>
           </a:solidFill>
-          <a:latin typeface="+mj-lt"/>
+          <a:latin typeface="Poppins"/>
           <a:ea typeface="+mj-ea"/>
           <a:cs typeface="+mj-cs"/>
         </a:defRPr>
@@ -2867,7 +2867,7 @@
           <a:solidFill>
             <a:schemeClr val="tx1"/>
           </a:solidFill>
-          <a:latin typeface="+mn-lt"/>
+          <a:latin typeface="Poppins"/>
           <a:ea typeface="+mn-ea"/>
           <a:cs typeface="+mn-cs"/>
         </a:defRPr>
@@ -2882,7 +2882,7 @@
           <a:solidFill>
             <a:schemeClr val="tx1"/>
           </a:solidFill>
-          <a:latin typeface="+mn-lt"/>
+          <a:latin typeface="Poppins"/>
           <a:ea typeface="+mn-ea"/>
           <a:cs typeface="+mn-cs"/>
         </a:defRPr>
@@ -2897,7 +2897,7 @@
           <a:solidFill>
             <a:schemeClr val="tx1"/>
           </a:solidFill>
-          <a:latin typeface="+mn-lt"/>
+          <a:latin typeface="Poppins"/>
           <a:ea typeface="+mn-ea"/>
           <a:cs typeface="+mn-cs"/>
         </a:defRPr>
@@ -2912,7 +2912,7 @@
           <a:solidFill>
             <a:schemeClr val="tx1"/>
           </a:solidFill>
-          <a:latin typeface="+mn-lt"/>
+          <a:latin typeface="Poppins"/>
           <a:ea typeface="+mn-ea"/>
           <a:cs typeface="+mn-cs"/>
         </a:defRPr>
@@ -2927,7 +2927,7 @@
           <a:solidFill>
             <a:schemeClr val="tx1"/>
           </a:solidFill>
-          <a:latin typeface="+mn-lt"/>
+          <a:latin typeface="Poppins"/>
           <a:ea typeface="+mn-ea"/>
           <a:cs typeface="+mn-cs"/>
         </a:defRPr>
@@ -2942,7 +2942,7 @@
           <a:solidFill>
             <a:schemeClr val="tx1"/>
           </a:solidFill>
-          <a:latin typeface="+mn-lt"/>
+          <a:latin typeface="Poppins"/>
           <a:ea typeface="+mn-ea"/>
           <a:cs typeface="+mn-cs"/>
         </a:defRPr>
@@ -2957,7 +2957,7 @@
           <a:solidFill>
             <a:schemeClr val="tx1"/>
           </a:solidFill>
-          <a:latin typeface="+mn-lt"/>
+          <a:latin typeface="Poppins"/>
           <a:ea typeface="+mn-ea"/>
           <a:cs typeface="+mn-cs"/>
         </a:defRPr>
@@ -2972,7 +2972,7 @@
           <a:solidFill>
             <a:schemeClr val="tx1"/>
           </a:solidFill>
-          <a:latin typeface="+mn-lt"/>
+          <a:latin typeface="Poppins"/>
           <a:ea typeface="+mn-ea"/>
           <a:cs typeface="+mn-cs"/>
         </a:defRPr>
@@ -2987,7 +2987,7 @@
           <a:solidFill>
             <a:schemeClr val="tx1"/>
           </a:solidFill>
-          <a:latin typeface="+mn-lt"/>
+          <a:latin typeface="Poppins"/>
           <a:ea typeface="+mn-ea"/>
           <a:cs typeface="+mn-cs"/>
         </a:defRPr>
@@ -3002,7 +3002,7 @@
           <a:solidFill>
             <a:schemeClr val="tx1"/>
           </a:solidFill>
-          <a:latin typeface="+mn-lt"/>
+          <a:latin typeface="Poppins"/>
           <a:ea typeface="+mn-ea"/>
           <a:cs typeface="+mn-cs"/>
         </a:defRPr>
@@ -3012,7 +3012,7 @@
           <a:solidFill>
             <a:schemeClr val="tx1"/>
           </a:solidFill>
-          <a:latin typeface="+mn-lt"/>
+          <a:latin typeface="Poppins"/>
           <a:ea typeface="+mn-ea"/>
           <a:cs typeface="+mn-cs"/>
         </a:defRPr>
@@ -3022,7 +3022,7 @@
           <a:solidFill>
             <a:schemeClr val="tx1"/>
           </a:solidFill>
-          <a:latin typeface="+mn-lt"/>
+          <a:latin typeface="Poppins"/>
           <a:ea typeface="+mn-ea"/>
           <a:cs typeface="+mn-cs"/>
         </a:defRPr>
@@ -3032,7 +3032,7 @@
           <a:solidFill>
             <a:schemeClr val="tx1"/>
           </a:solidFill>
-          <a:latin typeface="+mn-lt"/>
+          <a:latin typeface="Poppins"/>
           <a:ea typeface="+mn-ea"/>
           <a:cs typeface="+mn-cs"/>
         </a:defRPr>
@@ -3042,7 +3042,7 @@
           <a:solidFill>
             <a:schemeClr val="tx1"/>
           </a:solidFill>
-          <a:latin typeface="+mn-lt"/>
+          <a:latin typeface="Poppins"/>
           <a:ea typeface="+mn-ea"/>
           <a:cs typeface="+mn-cs"/>
         </a:defRPr>
@@ -3052,7 +3052,7 @@
           <a:solidFill>
             <a:schemeClr val="tx1"/>
           </a:solidFill>
-          <a:latin typeface="+mn-lt"/>
+          <a:latin typeface="Poppins"/>
           <a:ea typeface="+mn-ea"/>
           <a:cs typeface="+mn-cs"/>
         </a:defRPr>
@@ -3062,7 +3062,7 @@
           <a:solidFill>
             <a:schemeClr val="tx1"/>
           </a:solidFill>
-          <a:latin typeface="+mn-lt"/>
+          <a:latin typeface="Poppins"/>
           <a:ea typeface="+mn-ea"/>
           <a:cs typeface="+mn-cs"/>
         </a:defRPr>
@@ -3072,7 +3072,7 @@
           <a:solidFill>
             <a:schemeClr val="tx1"/>
           </a:solidFill>
-          <a:latin typeface="+mn-lt"/>
+          <a:latin typeface="Poppins"/>
           <a:ea typeface="+mn-ea"/>
           <a:cs typeface="+mn-cs"/>
         </a:defRPr>
@@ -3082,7 +3082,7 @@
           <a:solidFill>
             <a:schemeClr val="tx1"/>
           </a:solidFill>
-          <a:latin typeface="+mn-lt"/>
+          <a:latin typeface="Poppins"/>
           <a:ea typeface="+mn-ea"/>
           <a:cs typeface="+mn-cs"/>
         </a:defRPr>
@@ -3097,9 +3097,7 @@
   <p:cSld>
     <p:bg>
       <p:bgPr>
-        <a:solidFill>
-          <a:srgbClr val="1A5C33"/>
-        </a:solidFill>
+        <a:solidFill>val="006847"/&gt;</a:solidFill>
         <a:effectLst/>
       </p:bgPr>
     </p:bg>
@@ -3134,9 +3132,7 @@
           <a:p>
             <a:pPr algn="ctr">
               <a:defRPr sz="3200" b="1">
-                <a:solidFill>
-                  <a:srgbClr val="FFFFFF"/>
-                </a:solidFill>
+                <a:solidFill>val="FFFFFF"/&gt;</a:solidFill>
               </a:defRPr>
             </a:pPr>
             <a:r>
@@ -3169,9 +3165,7 @@
           <a:p>
             <a:pPr algn="ctr">
               <a:defRPr sz="2000" b="0">
-                <a:solidFill>
-                  <a:srgbClr val="C5D9C7"/>
-                </a:solidFill>
+                <a:solidFill>val="DFE5EA"/&gt;</a:solidFill>
               </a:defRPr>
             </a:pPr>
             <a:r>
@@ -3204,13 +3198,52 @@
           <a:p>
             <a:pPr algn="ctr">
               <a:defRPr sz="1600" b="0">
+                <a:solidFill>val="B7C9BE"/&gt;</a:solidFill>
+              </a:defRPr>
+            </a:pPr>
+            <a:r>
+              <a:t>Université de Mostaganem — MCB</a:t>
+            </a:r>
+          </a:p>
+        </p:txBody>
+      </p:sp>
+      <p:sp>
+        <p:nvSpPr>
+          <p:cNvPr id="990001" name="Pied de page FLE"/>
+          <p:cNvSpPr>
+            <a:spLocks noGrp="1"/>
+          </p:cNvSpPr>
+          <p:nvPr/>
+        </p:nvSpPr>
+        <p:spPr>
+          <a:xfrm>
+            <a:off x="2880360" y="914400"/>
+            <a:ext cx="4572000" cy="274320"/>
+          </a:xfrm>
+          <a:prstGeom prst="rect">
+            <a:avLst/>
+          </a:prstGeom>
+        </p:spPr>
+        <p:txBody>
+          <a:bodyPr anchor="b"/>
+          <a:lstStyle/>
+          <a:p>
+            <a:pPr algn="r">
+              <a:defRPr sz="900">
                 <a:solidFill>
-                  <a:srgbClr val="A0CFA0"/>
+                  <a:srgbClr val="9AA7B6"/>
                 </a:solidFill>
-              </a:defRPr>
-            </a:pPr>
-            <a:r>
-              <a:t>Université de Mostaganem — MCB</a:t>
+                <a:latin typeface="Poppins"/>
+              </a:defRPr>
+            </a:pPr>
+            <a:r>
+              <a:rPr lang="fr-FR" sz="900">
+                <a:solidFill>
+                  <a:srgbClr val="9AA7B6"/>
+                </a:solidFill>
+                <a:latin typeface="Poppins"/>
+              </a:rPr>
+              <a:t>Université de Mostaganem — Dr. Madani BELACEL</a:t>
             </a:r>
           </a:p>
         </p:txBody>
@@ -3228,9 +3261,7 @@
   <p:cSld>
     <p:bg>
       <p:bgPr>
-        <a:solidFill>
-          <a:srgbClr val="FFFFFF"/>
-        </a:solidFill>
+        <a:solidFill>val="FFFFFF"/&gt;</a:solidFill>
         <a:effectLst/>
       </p:bgPr>
     </p:bg>
@@ -3255,9 +3286,7 @@
           <a:prstGeom prst="rect">
             <a:avLst/>
           </a:prstGeom>
-          <a:solidFill>
-            <a:srgbClr val="2C6E49"/>
-          </a:solidFill>
+          <a:solidFill>val="00875B"/&gt;</a:solidFill>
           <a:ln>
             <a:noFill/>
           </a:ln>
@@ -3308,9 +3337,7 @@
           <a:p>
             <a:pPr algn="l">
               <a:defRPr sz="2200" b="1">
-                <a:solidFill>
-                  <a:srgbClr val="1A5C33"/>
-                </a:solidFill>
+                <a:solidFill>val="006847"/&gt;</a:solidFill>
               </a:defRPr>
             </a:pPr>
             <a:r>
@@ -3346,43 +3373,78 @@
                 <a:spcPts val="600"/>
               </a:spcAft>
               <a:defRPr sz="1400">
+                <a:solidFill>val="22344A"/&gt;</a:solidFill>
+              </a:defRPr>
+            </a:pPr>
+            <a:r>
+              <a:t>• Informatique— traitement automatique de l'information (logiciels, bases de données)</a:t>
+            </a:r>
+          </a:p>
+          <a:p>
+            <a:pPr>
+              <a:spcAft>
+                <a:spcPts val="600"/>
+              </a:spcAft>
+              <a:defRPr sz="1400">
+                <a:solidFill>val="22344A"/&gt;</a:solidFill>
+              </a:defRPr>
+            </a:pPr>
+            <a:r>
+              <a:t>• Télécommunications— transmission à distance (Internet, fibre, Wi-Fi)</a:t>
+            </a:r>
+          </a:p>
+          <a:p>
+            <a:pPr>
+              <a:spcAft>
+                <a:spcPts val="600"/>
+              </a:spcAft>
+              <a:defRPr sz="1400">
+                <a:solidFill>val="22344A"/&gt;</a:solidFill>
+              </a:defRPr>
+            </a:pPr>
+            <a:r>
+              <a:t>• Audiovisuel et multimédia— texte, image, son, vidéo combinés</a:t>
+            </a:r>
+          </a:p>
+        </p:txBody>
+      </p:sp>
+      <p:sp>
+        <p:nvSpPr>
+          <p:cNvPr id="990001" name="Pied de page FLE"/>
+          <p:cNvSpPr>
+            <a:spLocks noGrp="1"/>
+          </p:cNvSpPr>
+          <p:nvPr/>
+        </p:nvSpPr>
+        <p:spPr>
+          <a:xfrm>
+            <a:off x="-228600" y="6400800"/>
+            <a:ext cx="109728" cy="274320"/>
+          </a:xfrm>
+          <a:prstGeom prst="rect">
+            <a:avLst/>
+          </a:prstGeom>
+        </p:spPr>
+        <p:txBody>
+          <a:bodyPr anchor="b"/>
+          <a:lstStyle/>
+          <a:p>
+            <a:pPr algn="r">
+              <a:defRPr sz="900">
                 <a:solidFill>
-                  <a:srgbClr val="222222"/>
+                  <a:srgbClr val="9AA7B6"/>
                 </a:solidFill>
-              </a:defRPr>
-            </a:pPr>
-            <a:r>
-              <a:t>• Informatique— traitement automatique de l'information (logiciels, bases de données)</a:t>
-            </a:r>
-          </a:p>
-          <a:p>
-            <a:pPr>
-              <a:spcAft>
-                <a:spcPts val="600"/>
-              </a:spcAft>
-              <a:defRPr sz="1400">
+                <a:latin typeface="Poppins"/>
+              </a:defRPr>
+            </a:pPr>
+            <a:r>
+              <a:rPr lang="fr-FR" sz="900">
                 <a:solidFill>
-                  <a:srgbClr val="222222"/>
+                  <a:srgbClr val="9AA7B6"/>
                 </a:solidFill>
-              </a:defRPr>
-            </a:pPr>
-            <a:r>
-              <a:t>• Télécommunications— transmission à distance (Internet, fibre, Wi-Fi)</a:t>
-            </a:r>
-          </a:p>
-          <a:p>
-            <a:pPr>
-              <a:spcAft>
-                <a:spcPts val="600"/>
-              </a:spcAft>
-              <a:defRPr sz="1400">
-                <a:solidFill>
-                  <a:srgbClr val="222222"/>
-                </a:solidFill>
-              </a:defRPr>
-            </a:pPr>
-            <a:r>
-              <a:t>• Audiovisuel et multimédia— texte, image, son, vidéo combinés</a:t>
+                <a:latin typeface="Poppins"/>
+              </a:rPr>
+              <a:t>Université de Mostaganem — Dr. Madani BELACEL</a:t>
             </a:r>
           </a:p>
         </p:txBody>
@@ -3400,9 +3462,7 @@
   <p:cSld>
     <p:bg>
       <p:bgPr>
-        <a:solidFill>
-          <a:srgbClr val="FFFFFF"/>
-        </a:solidFill>
+        <a:solidFill>val="FFFFFF"/&gt;</a:solidFill>
         <a:effectLst/>
       </p:bgPr>
     </p:bg>
@@ -3427,9 +3487,7 @@
           <a:prstGeom prst="rect">
             <a:avLst/>
           </a:prstGeom>
-          <a:solidFill>
-            <a:srgbClr val="2C6E49"/>
-          </a:solidFill>
+          <a:solidFill>val="00875B"/&gt;</a:solidFill>
           <a:ln>
             <a:noFill/>
           </a:ln>
@@ -3480,9 +3538,7 @@
           <a:p>
             <a:pPr algn="l">
               <a:defRPr sz="2200" b="1">
-                <a:solidFill>
-                  <a:srgbClr val="1A5C33"/>
-                </a:solidFill>
+                <a:solidFill>val="006847"/&gt;</a:solidFill>
               </a:defRPr>
             </a:pPr>
             <a:r>
@@ -3518,58 +3574,91 @@
                 <a:spcPts val="600"/>
               </a:spcAft>
               <a:defRPr sz="1400">
+                <a:solidFill>val="22344A"/&gt;</a:solidFill>
+              </a:defRPr>
+            </a:pPr>
+            <a:r>
+              <a:t>• UIT :« Les TIC englobent tous les outils et systèmes qui permettent demanipuler,stockerettransmettrel'information sous formenumérique. »</a:t>
+            </a:r>
+          </a:p>
+          <a:p>
+            <a:pPr>
+              <a:spcAft>
+                <a:spcPts val="600"/>
+              </a:spcAft>
+              <a:defRPr sz="1400">
+                <a:solidFill>val="22344A"/&gt;</a:solidFill>
+              </a:defRPr>
+            </a:pPr>
+            <a:r>
+              <a:t>• UNESCO :informatique, audiovisuel, multimédia, Internet et télécommunications.</a:t>
+            </a:r>
+          </a:p>
+          <a:p>
+            <a:pPr>
+              <a:spcAft>
+                <a:spcPts val="600"/>
+              </a:spcAft>
+              <a:defRPr sz="1400">
+                <a:solidFill>val="22344A"/&gt;</a:solidFill>
+              </a:defRPr>
+            </a:pPr>
+            <a:r>
+              <a:t>• En anglais :Information and Communication Technologies(ICT).</a:t>
+            </a:r>
+          </a:p>
+          <a:p>
+            <a:pPr>
+              <a:spcAft>
+                <a:spcPts val="600"/>
+              </a:spcAft>
+              <a:defRPr sz="1400">
+                <a:solidFill>val="22344A"/&gt;</a:solidFill>
+              </a:defRPr>
+            </a:pPr>
+            <a:r>
+              <a:t>• À retenir :une TIC est unsystème(matériel + logiciel + réseau) qui rend l'information utilisable et partageable.</a:t>
+            </a:r>
+          </a:p>
+        </p:txBody>
+      </p:sp>
+      <p:sp>
+        <p:nvSpPr>
+          <p:cNvPr id="990001" name="Pied de page FLE"/>
+          <p:cNvSpPr>
+            <a:spLocks noGrp="1"/>
+          </p:cNvSpPr>
+          <p:nvPr/>
+        </p:nvSpPr>
+        <p:spPr>
+          <a:xfrm>
+            <a:off x="-228600" y="6400800"/>
+            <a:ext cx="109728" cy="274320"/>
+          </a:xfrm>
+          <a:prstGeom prst="rect">
+            <a:avLst/>
+          </a:prstGeom>
+        </p:spPr>
+        <p:txBody>
+          <a:bodyPr anchor="b"/>
+          <a:lstStyle/>
+          <a:p>
+            <a:pPr algn="r">
+              <a:defRPr sz="900">
                 <a:solidFill>
-                  <a:srgbClr val="222222"/>
+                  <a:srgbClr val="9AA7B6"/>
                 </a:solidFill>
-              </a:defRPr>
-            </a:pPr>
-            <a:r>
-              <a:t>• UIT :« Les TIC englobent tous les outils et systèmes qui permettent demanipuler,stockerettransmettrel'information sous formenumérique. »</a:t>
-            </a:r>
-          </a:p>
-          <a:p>
-            <a:pPr>
-              <a:spcAft>
-                <a:spcPts val="600"/>
-              </a:spcAft>
-              <a:defRPr sz="1400">
+                <a:latin typeface="Poppins"/>
+              </a:defRPr>
+            </a:pPr>
+            <a:r>
+              <a:rPr lang="fr-FR" sz="900">
                 <a:solidFill>
-                  <a:srgbClr val="222222"/>
+                  <a:srgbClr val="9AA7B6"/>
                 </a:solidFill>
-              </a:defRPr>
-            </a:pPr>
-            <a:r>
-              <a:t>• UNESCO :informatique, audiovisuel, multimédia, Internet et télécommunications.</a:t>
-            </a:r>
-          </a:p>
-          <a:p>
-            <a:pPr>
-              <a:spcAft>
-                <a:spcPts val="600"/>
-              </a:spcAft>
-              <a:defRPr sz="1400">
-                <a:solidFill>
-                  <a:srgbClr val="222222"/>
-                </a:solidFill>
-              </a:defRPr>
-            </a:pPr>
-            <a:r>
-              <a:t>• En anglais :Information and Communication Technologies(ICT).</a:t>
-            </a:r>
-          </a:p>
-          <a:p>
-            <a:pPr>
-              <a:spcAft>
-                <a:spcPts val="600"/>
-              </a:spcAft>
-              <a:defRPr sz="1400">
-                <a:solidFill>
-                  <a:srgbClr val="222222"/>
-                </a:solidFill>
-              </a:defRPr>
-            </a:pPr>
-            <a:r>
-              <a:t>• À retenir :une TIC est unsystème(matériel + logiciel + réseau) qui rend l'information utilisable et partageable.</a:t>
+                <a:latin typeface="Poppins"/>
+              </a:rPr>
+              <a:t>Université de Mostaganem — Dr. Madani BELACEL</a:t>
             </a:r>
           </a:p>
         </p:txBody>
@@ -3587,9 +3676,7 @@
   <p:cSld>
     <p:bg>
       <p:bgPr>
-        <a:solidFill>
-          <a:srgbClr val="FFFFFF"/>
-        </a:solidFill>
+        <a:solidFill>val="FFFFFF"/&gt;</a:solidFill>
         <a:effectLst/>
       </p:bgPr>
     </p:bg>
@@ -3614,9 +3701,7 @@
           <a:prstGeom prst="rect">
             <a:avLst/>
           </a:prstGeom>
-          <a:solidFill>
-            <a:srgbClr val="2C6E49"/>
-          </a:solidFill>
+          <a:solidFill>val="00875B"/&gt;</a:solidFill>
           <a:ln>
             <a:noFill/>
           </a:ln>
@@ -3667,9 +3752,7 @@
           <a:p>
             <a:pPr algn="l">
               <a:defRPr sz="2200" b="1">
-                <a:solidFill>
-                  <a:srgbClr val="1A5C33"/>
-                </a:solidFill>
+                <a:solidFill>val="006847"/&gt;</a:solidFill>
               </a:defRPr>
             </a:pPr>
             <a:r>
@@ -3705,73 +3788,104 @@
                 <a:spcPts val="600"/>
               </a:spcAft>
               <a:defRPr sz="1400">
+                <a:solidFill>val="22344A"/&gt;</a:solidFill>
+              </a:defRPr>
+            </a:pPr>
+            <a:r>
+              <a:t>• Concepts associés :</a:t>
+            </a:r>
+          </a:p>
+          <a:p>
+            <a:pPr>
+              <a:spcAft>
+                <a:spcPts val="600"/>
+              </a:spcAft>
+              <a:defRPr sz="1400">
+                <a:solidFill>val="22344A"/&gt;</a:solidFill>
+              </a:defRPr>
+            </a:pPr>
+            <a:r>
+              <a:t>• Numérisation: conversion en fichiers numériques (PDF, MP3, JPEG)</a:t>
+            </a:r>
+          </a:p>
+          <a:p>
+            <a:pPr>
+              <a:spcAft>
+                <a:spcPts val="600"/>
+              </a:spcAft>
+              <a:defRPr sz="1400">
+                <a:solidFill>val="22344A"/&gt;</a:solidFill>
+              </a:defRPr>
+            </a:pPr>
+            <a:r>
+              <a:t>• Transformation digitale: réorganisation des activités grâce au numérique</a:t>
+            </a:r>
+          </a:p>
+          <a:p>
+            <a:pPr>
+              <a:spcAft>
+                <a:spcPts val="600"/>
+              </a:spcAft>
+              <a:defRPr sz="1400">
+                <a:solidFill>val="22344A"/&gt;</a:solidFill>
+              </a:defRPr>
+            </a:pPr>
+            <a:r>
+              <a:t>• Société de l'information: l'information devient une ressource centrale</a:t>
+            </a:r>
+          </a:p>
+          <a:p>
+            <a:pPr>
+              <a:spcAft>
+                <a:spcPts val="600"/>
+              </a:spcAft>
+              <a:defRPr sz="1400">
+                <a:solidFill>val="22344A"/&gt;</a:solidFill>
+              </a:defRPr>
+            </a:pPr>
+            <a:r>
+              <a:t>• Exemple :cours sur Moodle + vidéo enregistrée + devoir PDF + correction en ligne.</a:t>
+            </a:r>
+          </a:p>
+        </p:txBody>
+      </p:sp>
+      <p:sp>
+        <p:nvSpPr>
+          <p:cNvPr id="990001" name="Pied de page FLE"/>
+          <p:cNvSpPr>
+            <a:spLocks noGrp="1"/>
+          </p:cNvSpPr>
+          <p:nvPr/>
+        </p:nvSpPr>
+        <p:spPr>
+          <a:xfrm>
+            <a:off x="-228600" y="6400800"/>
+            <a:ext cx="109728" cy="274320"/>
+          </a:xfrm>
+          <a:prstGeom prst="rect">
+            <a:avLst/>
+          </a:prstGeom>
+        </p:spPr>
+        <p:txBody>
+          <a:bodyPr anchor="b"/>
+          <a:lstStyle/>
+          <a:p>
+            <a:pPr algn="r">
+              <a:defRPr sz="900">
                 <a:solidFill>
-                  <a:srgbClr val="222222"/>
+                  <a:srgbClr val="9AA7B6"/>
                 </a:solidFill>
-              </a:defRPr>
-            </a:pPr>
-            <a:r>
-              <a:t>• Concepts associés :</a:t>
-            </a:r>
-          </a:p>
-          <a:p>
-            <a:pPr>
-              <a:spcAft>
-                <a:spcPts val="600"/>
-              </a:spcAft>
-              <a:defRPr sz="1400">
+                <a:latin typeface="Poppins"/>
+              </a:defRPr>
+            </a:pPr>
+            <a:r>
+              <a:rPr lang="fr-FR" sz="900">
                 <a:solidFill>
-                  <a:srgbClr val="222222"/>
+                  <a:srgbClr val="9AA7B6"/>
                 </a:solidFill>
-              </a:defRPr>
-            </a:pPr>
-            <a:r>
-              <a:t>• Numérisation: conversion en fichiers numériques (PDF, MP3, JPEG)</a:t>
-            </a:r>
-          </a:p>
-          <a:p>
-            <a:pPr>
-              <a:spcAft>
-                <a:spcPts val="600"/>
-              </a:spcAft>
-              <a:defRPr sz="1400">
-                <a:solidFill>
-                  <a:srgbClr val="222222"/>
-                </a:solidFill>
-              </a:defRPr>
-            </a:pPr>
-            <a:r>
-              <a:t>• Transformation digitale: réorganisation des activités grâce au numérique</a:t>
-            </a:r>
-          </a:p>
-          <a:p>
-            <a:pPr>
-              <a:spcAft>
-                <a:spcPts val="600"/>
-              </a:spcAft>
-              <a:defRPr sz="1400">
-                <a:solidFill>
-                  <a:srgbClr val="222222"/>
-                </a:solidFill>
-              </a:defRPr>
-            </a:pPr>
-            <a:r>
-              <a:t>• Société de l'information: l'information devient une ressource centrale</a:t>
-            </a:r>
-          </a:p>
-          <a:p>
-            <a:pPr>
-              <a:spcAft>
-                <a:spcPts val="600"/>
-              </a:spcAft>
-              <a:defRPr sz="1400">
-                <a:solidFill>
-                  <a:srgbClr val="222222"/>
-                </a:solidFill>
-              </a:defRPr>
-            </a:pPr>
-            <a:r>
-              <a:t>• Exemple :cours sur Moodle + vidéo enregistrée + devoir PDF + correction en ligne.</a:t>
+                <a:latin typeface="Poppins"/>
+              </a:rPr>
+              <a:t>Université de Mostaganem — Dr. Madani BELACEL</a:t>
             </a:r>
           </a:p>
         </p:txBody>
@@ -3789,9 +3903,7 @@
   <p:cSld>
     <p:bg>
       <p:bgPr>
-        <a:solidFill>
-          <a:srgbClr val="E8F0E9"/>
-        </a:solidFill>
+        <a:solidFill>val="F4F6F8"/&gt;</a:solidFill>
         <a:effectLst/>
       </p:bgPr>
     </p:bg>
@@ -3826,9 +3938,7 @@
           <a:p>
             <a:pPr algn="ctr">
               <a:defRPr sz="2600" b="1">
-                <a:solidFill>
-                  <a:srgbClr val="1A5C33"/>
-                </a:solidFill>
+                <a:solidFill>val="006847"/&gt;</a:solidFill>
               </a:defRPr>
             </a:pPr>
             <a:r>
@@ -3864,81 +3974,112 @@
                 <a:spcPts val="600"/>
               </a:spcAft>
               <a:defRPr sz="1600">
+                <a:solidFill>val="22344A"/&gt;</a:solidFill>
+              </a:defRPr>
+            </a:pPr>
+            <a:r>
+              <a:t>• Référentiel :titres et structure alignés sur Canvas Univ-Mosta (elearning.univ-usto.dz) ; bonnes pratiques benchmark 10 universités algériennes (voirBENCHMARK_10_UNIVERSITES_ELEARNING.md).</a:t>
+            </a:r>
+          </a:p>
+          <a:p>
+            <a:pPr>
+              <a:spcAft>
+                <a:spcPts val="600"/>
+              </a:spcAft>
+              <a:defRPr sz="1600">
+                <a:solidFill>val="22344A"/&gt;</a:solidFill>
+              </a:defRPr>
+            </a:pPr>
+            <a:r>
+              <a:t>• En termes de savoir :- Définir les TIC et distinguer NTIC/TIC/ICT</a:t>
+            </a:r>
+            <a:br/>
+            <a:r>
+              <a:t>- Identifier les trois dimensions : technique, information, communication</a:t>
+            </a:r>
+            <a:br/>
+            <a:r>
+              <a:t>- Citer les fonctions : traitement, transmission, sauvegarde</a:t>
+            </a:r>
+          </a:p>
+          <a:p>
+            <a:pPr>
+              <a:spcAft>
+                <a:spcPts val="600"/>
+              </a:spcAft>
+              <a:defRPr sz="1600">
+                <a:solidFill>val="22344A"/&gt;</a:solidFill>
+              </a:defRPr>
+            </a:pPr>
+            <a:r>
+              <a:t>• Ce cours s'inscrit dans le cadre réglementaire algérien de la formation des enseignants :</a:t>
+            </a:r>
+          </a:p>
+          <a:p>
+            <a:pPr>
+              <a:spcAft>
+                <a:spcPts val="600"/>
+              </a:spcAft>
+              <a:defRPr sz="1600">
+                <a:solidFill>val="22344A"/&gt;</a:solidFill>
+              </a:defRPr>
+            </a:pPr>
+            <a:r>
+              <a:t>• UIT — définitions TIC ; UNESCO — compétences numériques ; Guide étudiant Moodle Univ. Boumerdès / Béjaïa</a:t>
+            </a:r>
+          </a:p>
+          <a:p>
+            <a:pPr>
+              <a:spcAft>
+                <a:spcPts val="600"/>
+              </a:spcAft>
+              <a:defRPr sz="1600">
+                <a:solidFill>val="22344A"/&gt;</a:solidFill>
+              </a:defRPr>
+            </a:pPr>
+            <a:r>
+              <a:t>• Introduction et importance des TIC dans le monde contemporain</a:t>
+            </a:r>
+          </a:p>
+        </p:txBody>
+      </p:sp>
+      <p:sp>
+        <p:nvSpPr>
+          <p:cNvPr id="990001" name="Pied de page FLE"/>
+          <p:cNvSpPr>
+            <a:spLocks noGrp="1"/>
+          </p:cNvSpPr>
+          <p:nvPr/>
+        </p:nvSpPr>
+        <p:spPr>
+          <a:xfrm>
+            <a:off x="2971800" y="182880"/>
+            <a:ext cx="4572000" cy="274320"/>
+          </a:xfrm>
+          <a:prstGeom prst="rect">
+            <a:avLst/>
+          </a:prstGeom>
+        </p:spPr>
+        <p:txBody>
+          <a:bodyPr anchor="b"/>
+          <a:lstStyle/>
+          <a:p>
+            <a:pPr algn="r">
+              <a:defRPr sz="900">
                 <a:solidFill>
-                  <a:srgbClr val="222222"/>
+                  <a:srgbClr val="9AA7B6"/>
                 </a:solidFill>
-              </a:defRPr>
-            </a:pPr>
-            <a:r>
-              <a:t>• Référentiel :titres et structure alignés sur Canvas Univ-Mosta (elearning.univ-usto.dz) ; bonnes pratiques benchmark 10 universités algériennes (voirBENCHMARK_10_UNIVERSITES_ELEARNING.md).</a:t>
-            </a:r>
-          </a:p>
-          <a:p>
-            <a:pPr>
-              <a:spcAft>
-                <a:spcPts val="600"/>
-              </a:spcAft>
-              <a:defRPr sz="1600">
+                <a:latin typeface="Poppins"/>
+              </a:defRPr>
+            </a:pPr>
+            <a:r>
+              <a:rPr lang="fr-FR" sz="900">
                 <a:solidFill>
-                  <a:srgbClr val="222222"/>
+                  <a:srgbClr val="9AA7B6"/>
                 </a:solidFill>
-              </a:defRPr>
-            </a:pPr>
-            <a:r>
-              <a:t>• En termes de savoir :- Définir les TIC et distinguer NTIC/TIC/ICT</a:t>
-            </a:r>
-            <a:br/>
-            <a:r>
-              <a:t>- Identifier les trois dimensions : technique, information, communication</a:t>
-            </a:r>
-            <a:br/>
-            <a:r>
-              <a:t>- Citer les fonctions : traitement, transmission, sauvegarde</a:t>
-            </a:r>
-          </a:p>
-          <a:p>
-            <a:pPr>
-              <a:spcAft>
-                <a:spcPts val="600"/>
-              </a:spcAft>
-              <a:defRPr sz="1600">
-                <a:solidFill>
-                  <a:srgbClr val="222222"/>
-                </a:solidFill>
-              </a:defRPr>
-            </a:pPr>
-            <a:r>
-              <a:t>• Ce cours s'inscrit dans le cadre réglementaire algérien de la formation des enseignants :</a:t>
-            </a:r>
-          </a:p>
-          <a:p>
-            <a:pPr>
-              <a:spcAft>
-                <a:spcPts val="600"/>
-              </a:spcAft>
-              <a:defRPr sz="1600">
-                <a:solidFill>
-                  <a:srgbClr val="222222"/>
-                </a:solidFill>
-              </a:defRPr>
-            </a:pPr>
-            <a:r>
-              <a:t>• UIT — définitions TIC ; UNESCO — compétences numériques ; Guide étudiant Moodle Univ. Boumerdès / Béjaïa</a:t>
-            </a:r>
-          </a:p>
-          <a:p>
-            <a:pPr>
-              <a:spcAft>
-                <a:spcPts val="600"/>
-              </a:spcAft>
-              <a:defRPr sz="1600">
-                <a:solidFill>
-                  <a:srgbClr val="222222"/>
-                </a:solidFill>
-              </a:defRPr>
-            </a:pPr>
-            <a:r>
-              <a:t>• Introduction et importance des TIC dans le monde contemporain</a:t>
+                <a:latin typeface="Poppins"/>
+              </a:rPr>
+              <a:t>Université de Mostaganem — Dr. Madani BELACEL</a:t>
             </a:r>
           </a:p>
         </p:txBody>
@@ -3956,9 +4097,7 @@
   <p:cSld>
     <p:bg>
       <p:bgPr>
-        <a:solidFill>
-          <a:srgbClr val="FFFFFF"/>
-        </a:solidFill>
+        <a:solidFill>val="FFFFFF"/&gt;</a:solidFill>
         <a:effectLst/>
       </p:bgPr>
     </p:bg>
@@ -3993,9 +4132,7 @@
           <a:p>
             <a:pPr algn="ctr">
               <a:defRPr sz="2600" b="1">
-                <a:solidFill>
-                  <a:srgbClr val="1A5C33"/>
-                </a:solidFill>
+                <a:solidFill>val="006847"/&gt;</a:solidFill>
               </a:defRPr>
             </a:pPr>
             <a:r>
@@ -4031,73 +4168,104 @@
                 <a:spcPts val="600"/>
               </a:spcAft>
               <a:defRPr sz="1500">
+                <a:solidFill>val="22344A"/&gt;</a:solidFill>
+              </a:defRPr>
+            </a:pPr>
+            <a:r>
+              <a:t>• Définir les concepts principaux du cours</a:t>
+            </a:r>
+          </a:p>
+          <a:p>
+            <a:pPr>
+              <a:spcAft>
+                <a:spcPts val="600"/>
+              </a:spcAft>
+              <a:defRPr sz="1500">
+                <a:solidFill>val="22344A"/&gt;</a:solidFill>
+              </a:defRPr>
+            </a:pPr>
+            <a:r>
+              <a:t>• Identifier les applications pratiques</a:t>
+            </a:r>
+          </a:p>
+          <a:p>
+            <a:pPr>
+              <a:spcAft>
+                <a:spcPts val="600"/>
+              </a:spcAft>
+              <a:defRPr sz="1500">
+                <a:solidFill>val="22344A"/&gt;</a:solidFill>
+              </a:defRPr>
+            </a:pPr>
+            <a:r>
+              <a:t>• Résoudre les exercices du TD</a:t>
+            </a:r>
+          </a:p>
+          <a:p>
+            <a:pPr>
+              <a:spcAft>
+                <a:spcPts val="600"/>
+              </a:spcAft>
+              <a:defRPr sz="1500">
+                <a:solidFill>val="22344A"/&gt;</a:solidFill>
+              </a:defRPr>
+            </a:pPr>
+            <a:r>
+              <a:t>• Synthétiser les points clés en un paragraphe</a:t>
+            </a:r>
+          </a:p>
+          <a:p>
+            <a:pPr>
+              <a:spcAft>
+                <a:spcPts val="600"/>
+              </a:spcAft>
+              <a:defRPr sz="1500">
+                <a:solidFill>val="22344A"/&gt;</a:solidFill>
+              </a:defRPr>
+            </a:pPr>
+            <a:r>
+              <a:t>• Préparer une courte présentation orale</a:t>
+            </a:r>
+          </a:p>
+        </p:txBody>
+      </p:sp>
+      <p:sp>
+        <p:nvSpPr>
+          <p:cNvPr id="990001" name="Pied de page FLE"/>
+          <p:cNvSpPr>
+            <a:spLocks noGrp="1"/>
+          </p:cNvSpPr>
+          <p:nvPr/>
+        </p:nvSpPr>
+        <p:spPr>
+          <a:xfrm>
+            <a:off x="2971800" y="182880"/>
+            <a:ext cx="4572000" cy="274320"/>
+          </a:xfrm>
+          <a:prstGeom prst="rect">
+            <a:avLst/>
+          </a:prstGeom>
+        </p:spPr>
+        <p:txBody>
+          <a:bodyPr anchor="b"/>
+          <a:lstStyle/>
+          <a:p>
+            <a:pPr algn="r">
+              <a:defRPr sz="900">
                 <a:solidFill>
-                  <a:srgbClr val="222222"/>
+                  <a:srgbClr val="9AA7B6"/>
                 </a:solidFill>
-              </a:defRPr>
-            </a:pPr>
-            <a:r>
-              <a:t>• Définir les concepts principaux du cours</a:t>
-            </a:r>
-          </a:p>
-          <a:p>
-            <a:pPr>
-              <a:spcAft>
-                <a:spcPts val="600"/>
-              </a:spcAft>
-              <a:defRPr sz="1500">
+                <a:latin typeface="Poppins"/>
+              </a:defRPr>
+            </a:pPr>
+            <a:r>
+              <a:rPr lang="fr-FR" sz="900">
                 <a:solidFill>
-                  <a:srgbClr val="222222"/>
+                  <a:srgbClr val="9AA7B6"/>
                 </a:solidFill>
-              </a:defRPr>
-            </a:pPr>
-            <a:r>
-              <a:t>• Identifier les applications pratiques</a:t>
-            </a:r>
-          </a:p>
-          <a:p>
-            <a:pPr>
-              <a:spcAft>
-                <a:spcPts val="600"/>
-              </a:spcAft>
-              <a:defRPr sz="1500">
-                <a:solidFill>
-                  <a:srgbClr val="222222"/>
-                </a:solidFill>
-              </a:defRPr>
-            </a:pPr>
-            <a:r>
-              <a:t>• Résoudre les exercices du TD</a:t>
-            </a:r>
-          </a:p>
-          <a:p>
-            <a:pPr>
-              <a:spcAft>
-                <a:spcPts val="600"/>
-              </a:spcAft>
-              <a:defRPr sz="1500">
-                <a:solidFill>
-                  <a:srgbClr val="222222"/>
-                </a:solidFill>
-              </a:defRPr>
-            </a:pPr>
-            <a:r>
-              <a:t>• Synthétiser les points clés en un paragraphe</a:t>
-            </a:r>
-          </a:p>
-          <a:p>
-            <a:pPr>
-              <a:spcAft>
-                <a:spcPts val="600"/>
-              </a:spcAft>
-              <a:defRPr sz="1500">
-                <a:solidFill>
-                  <a:srgbClr val="222222"/>
-                </a:solidFill>
-              </a:defRPr>
-            </a:pPr>
-            <a:r>
-              <a:t>• Préparer une courte présentation orale</a:t>
+                <a:latin typeface="Poppins"/>
+              </a:rPr>
+              <a:t>Université de Mostaganem — Dr. Madani BELACEL</a:t>
             </a:r>
           </a:p>
         </p:txBody>
@@ -4115,9 +4283,7 @@
   <p:cSld>
     <p:bg>
       <p:bgPr>
-        <a:solidFill>
-          <a:srgbClr val="1A5C33"/>
-        </a:solidFill>
+        <a:solidFill>val="006847"/&gt;</a:solidFill>
         <a:effectLst/>
       </p:bgPr>
     </p:bg>
@@ -4152,9 +4318,7 @@
           <a:p>
             <a:pPr algn="ctr">
               <a:defRPr sz="2800" b="1">
-                <a:solidFill>
-                  <a:srgbClr val="FFFFFF"/>
-                </a:solidFill>
+                <a:solidFill>val="FFFFFF"/&gt;</a:solidFill>
               </a:defRPr>
             </a:pPr>
             <a:r>
@@ -4187,25 +4351,64 @@
           <a:p>
             <a:pPr algn="ctr">
               <a:defRPr sz="1800" b="0">
+                <a:solidFill>val="DFE5EA"/&gt;</a:solidFill>
+              </a:defRPr>
+            </a:pPr>
+            <a:r>
+              <a:t>Dr. BELACEL Madani</a:t>
+            </a:r>
+            <a:br/>
+            <a:r>
+              <a:t>Maître de Conférences B</a:t>
+            </a:r>
+            <a:br/>
+            <a:r>
+              <a:t>Université de Mostaganem</a:t>
+            </a:r>
+            <a:br/>
+            <a:r>
+              <a:t>madani.belacel@univ-mosta.dz</a:t>
+            </a:r>
+          </a:p>
+        </p:txBody>
+      </p:sp>
+      <p:sp>
+        <p:nvSpPr>
+          <p:cNvPr id="990001" name="Pied de page FLE"/>
+          <p:cNvSpPr>
+            <a:spLocks noGrp="1"/>
+          </p:cNvSpPr>
+          <p:nvPr/>
+        </p:nvSpPr>
+        <p:spPr>
+          <a:xfrm>
+            <a:off x="2880360" y="457200"/>
+            <a:ext cx="4572000" cy="274320"/>
+          </a:xfrm>
+          <a:prstGeom prst="rect">
+            <a:avLst/>
+          </a:prstGeom>
+        </p:spPr>
+        <p:txBody>
+          <a:bodyPr anchor="b"/>
+          <a:lstStyle/>
+          <a:p>
+            <a:pPr algn="r">
+              <a:defRPr sz="900">
                 <a:solidFill>
-                  <a:srgbClr val="C5D9C7"/>
+                  <a:srgbClr val="9AA7B6"/>
                 </a:solidFill>
-              </a:defRPr>
-            </a:pPr>
-            <a:r>
-              <a:t>Dr. BELACEL Madani</a:t>
-            </a:r>
-            <a:br/>
-            <a:r>
-              <a:t>Maître de Conférences B</a:t>
-            </a:r>
-            <a:br/>
-            <a:r>
-              <a:t>Université de Mostaganem</a:t>
-            </a:r>
-            <a:br/>
-            <a:r>
-              <a:t>madani.belacel@univ-mosta.dz</a:t>
+                <a:latin typeface="Poppins"/>
+              </a:defRPr>
+            </a:pPr>
+            <a:r>
+              <a:rPr lang="fr-FR" sz="900">
+                <a:solidFill>
+                  <a:srgbClr val="9AA7B6"/>
+                </a:solidFill>
+                <a:latin typeface="Poppins"/>
+              </a:rPr>
+              <a:t>Université de Mostaganem — Dr. Madani BELACEL</a:t>
             </a:r>
           </a:p>
         </p:txBody>
@@ -4223,9 +4426,7 @@
   <p:cSld>
     <p:bg>
       <p:bgPr>
-        <a:solidFill>
-          <a:srgbClr val="FFFFFF"/>
-        </a:solidFill>
+        <a:solidFill>val="FFFFFF"/&gt;</a:solidFill>
         <a:effectLst/>
       </p:bgPr>
     </p:bg>
@@ -4260,9 +4461,7 @@
           <a:p>
             <a:pPr algn="l">
               <a:defRPr sz="2600" b="1">
-                <a:solidFill>
-                  <a:srgbClr val="1A5C33"/>
-                </a:solidFill>
+                <a:solidFill>val="006847"/&gt;</a:solidFill>
               </a:defRPr>
             </a:pPr>
             <a:r>
@@ -4298,78 +4497,111 @@
                 <a:spcPts val="600"/>
               </a:spcAft>
               <a:defRPr sz="1500">
+                <a:solidFill>val="22344A"/&gt;</a:solidFill>
+              </a:defRPr>
+            </a:pPr>
+            <a:r>
+              <a:t>• En termes de savoir :- Définir les TIC et distinguer NTIC/TIC/ICT</a:t>
+            </a:r>
+            <a:br/>
+            <a:r>
+              <a:t>- Identifier les trois dimensions : technique, information, communication</a:t>
+            </a:r>
+            <a:br/>
+            <a:r>
+              <a:t>- Citer les fonctions : traitement, transmission, sauvegarde</a:t>
+            </a:r>
+          </a:p>
+          <a:p>
+            <a:pPr>
+              <a:spcAft>
+                <a:spcPts val="600"/>
+              </a:spcAft>
+              <a:defRPr sz="1500">
+                <a:solidFill>val="22344A"/&gt;</a:solidFill>
+              </a:defRPr>
+            </a:pPr>
+            <a:r>
+              <a:t>• En termes de savoir-faire :- Utiliser Moodle et le courriel institutionnel</a:t>
+            </a:r>
+            <a:br/>
+            <a:r>
+              <a:t>- Nommer et classer des outils numériques par fonction</a:t>
+            </a:r>
+            <a:br/>
+            <a:r>
+              <a:t>- Évaluer la fiabilité d'une source en ligne (introduction CRAP)</a:t>
+            </a:r>
+          </a:p>
+          <a:p>
+            <a:pPr>
+              <a:spcAft>
+                <a:spcPts val="600"/>
+              </a:spcAft>
+              <a:defRPr sz="1500">
+                <a:solidFill>val="22344A"/&gt;</a:solidFill>
+              </a:defRPr>
+            </a:pPr>
+            <a:r>
+              <a:t>• En termes de savoir-être :- Adopter une posture critique face au numérique</a:t>
+            </a:r>
+            <a:br/>
+            <a:r>
+              <a:t>- Respecter l'éthique académique (plagiat, vie privée)</a:t>
+            </a:r>
+          </a:p>
+          <a:p>
+            <a:pPr>
+              <a:spcAft>
+                <a:spcPts val="600"/>
+              </a:spcAft>
+              <a:defRPr sz="1500">
+                <a:solidFill>val="22344A"/&gt;</a:solidFill>
+              </a:defRPr>
+            </a:pPr>
+            <a:r>
+              <a:t>• Mode d'évaluation :TD 40 % (5 exercices) + QCM Moodle 20 % + participation 10 % + examen 30 %</a:t>
+            </a:r>
+          </a:p>
+        </p:txBody>
+      </p:sp>
+      <p:sp>
+        <p:nvSpPr>
+          <p:cNvPr id="990001" name="Pied de page FLE"/>
+          <p:cNvSpPr>
+            <a:spLocks noGrp="1"/>
+          </p:cNvSpPr>
+          <p:nvPr/>
+        </p:nvSpPr>
+        <p:spPr>
+          <a:xfrm>
+            <a:off x="2971800" y="182880"/>
+            <a:ext cx="4572000" cy="274320"/>
+          </a:xfrm>
+          <a:prstGeom prst="rect">
+            <a:avLst/>
+          </a:prstGeom>
+        </p:spPr>
+        <p:txBody>
+          <a:bodyPr anchor="b"/>
+          <a:lstStyle/>
+          <a:p>
+            <a:pPr algn="r">
+              <a:defRPr sz="900">
                 <a:solidFill>
-                  <a:srgbClr val="222222"/>
+                  <a:srgbClr val="9AA7B6"/>
                 </a:solidFill>
-              </a:defRPr>
-            </a:pPr>
-            <a:r>
-              <a:t>• En termes de savoir :- Définir les TIC et distinguer NTIC/TIC/ICT</a:t>
-            </a:r>
-            <a:br/>
-            <a:r>
-              <a:t>- Identifier les trois dimensions : technique, information, communication</a:t>
-            </a:r>
-            <a:br/>
-            <a:r>
-              <a:t>- Citer les fonctions : traitement, transmission, sauvegarde</a:t>
-            </a:r>
-          </a:p>
-          <a:p>
-            <a:pPr>
-              <a:spcAft>
-                <a:spcPts val="600"/>
-              </a:spcAft>
-              <a:defRPr sz="1500">
+                <a:latin typeface="Poppins"/>
+              </a:defRPr>
+            </a:pPr>
+            <a:r>
+              <a:rPr lang="fr-FR" sz="900">
                 <a:solidFill>
-                  <a:srgbClr val="222222"/>
+                  <a:srgbClr val="9AA7B6"/>
                 </a:solidFill>
-              </a:defRPr>
-            </a:pPr>
-            <a:r>
-              <a:t>• En termes de savoir-faire :- Utiliser Moodle et le courriel institutionnel</a:t>
-            </a:r>
-            <a:br/>
-            <a:r>
-              <a:t>- Nommer et classer des outils numériques par fonction</a:t>
-            </a:r>
-            <a:br/>
-            <a:r>
-              <a:t>- Évaluer la fiabilité d'une source en ligne (introduction CRAP)</a:t>
-            </a:r>
-          </a:p>
-          <a:p>
-            <a:pPr>
-              <a:spcAft>
-                <a:spcPts val="600"/>
-              </a:spcAft>
-              <a:defRPr sz="1500">
-                <a:solidFill>
-                  <a:srgbClr val="222222"/>
-                </a:solidFill>
-              </a:defRPr>
-            </a:pPr>
-            <a:r>
-              <a:t>• En termes de savoir-être :- Adopter une posture critique face au numérique</a:t>
-            </a:r>
-            <a:br/>
-            <a:r>
-              <a:t>- Respecter l'éthique académique (plagiat, vie privée)</a:t>
-            </a:r>
-          </a:p>
-          <a:p>
-            <a:pPr>
-              <a:spcAft>
-                <a:spcPts val="600"/>
-              </a:spcAft>
-              <a:defRPr sz="1500">
-                <a:solidFill>
-                  <a:srgbClr val="222222"/>
-                </a:solidFill>
-              </a:defRPr>
-            </a:pPr>
-            <a:r>
-              <a:t>• Mode d'évaluation :TD 40 % (5 exercices) + QCM Moodle 20 % + participation 10 % + examen 30 %</a:t>
+                <a:latin typeface="Poppins"/>
+              </a:rPr>
+              <a:t>Université de Mostaganem — Dr. Madani BELACEL</a:t>
             </a:r>
           </a:p>
         </p:txBody>
@@ -4387,9 +4619,7 @@
   <p:cSld>
     <p:bg>
       <p:bgPr>
-        <a:solidFill>
-          <a:srgbClr val="FFFFFF"/>
-        </a:solidFill>
+        <a:solidFill>val="FFFFFF"/&gt;</a:solidFill>
         <a:effectLst/>
       </p:bgPr>
     </p:bg>
@@ -4424,9 +4654,7 @@
           <a:p>
             <a:pPr algn="l">
               <a:defRPr sz="2600" b="1">
-                <a:solidFill>
-                  <a:srgbClr val="1A5C33"/>
-                </a:solidFill>
+                <a:solidFill>val="006847"/&gt;</a:solidFill>
               </a:defRPr>
             </a:pPr>
             <a:r>
@@ -4462,148 +4690,169 @@
                 <a:spcPts val="600"/>
               </a:spcAft>
               <a:defRPr sz="1600">
+                <a:solidFill>val="22344A"/&gt;</a:solidFill>
+              </a:defRPr>
+            </a:pPr>
+            <a:r>
+              <a:t>• Fiche cours — Plateforme e-learning (Moodle)</a:t>
+            </a:r>
+          </a:p>
+          <a:p>
+            <a:pPr>
+              <a:spcAft>
+                <a:spcPts val="600"/>
+              </a:spcAft>
+              <a:defRPr sz="1600">
+                <a:solidFill>val="22344A"/&gt;</a:solidFill>
+              </a:defRPr>
+            </a:pPr>
+            <a:r>
+              <a:t>• Objectifs de l'enseignement</a:t>
+            </a:r>
+          </a:p>
+          <a:p>
+            <a:pPr>
+              <a:spcAft>
+                <a:spcPts val="600"/>
+              </a:spcAft>
+              <a:defRPr sz="1600">
+                <a:solidFill>val="22344A"/&gt;</a:solidFill>
+              </a:defRPr>
+            </a:pPr>
+            <a:r>
+              <a:t>• Contexte réglementaire algérien</a:t>
+            </a:r>
+          </a:p>
+          <a:p>
+            <a:pPr>
+              <a:spcAft>
+                <a:spcPts val="600"/>
+              </a:spcAft>
+              <a:defRPr sz="1600">
+                <a:solidFill>val="22344A"/&gt;</a:solidFill>
+              </a:defRPr>
+            </a:pPr>
+            <a:r>
+              <a:t>• Bibliographie et ressources externes</a:t>
+            </a:r>
+          </a:p>
+          <a:p>
+            <a:pPr>
+              <a:spcAft>
+                <a:spcPts val="600"/>
+              </a:spcAft>
+              <a:defRPr sz="1600">
+                <a:solidFill>val="22344A"/&gt;</a:solidFill>
+              </a:defRPr>
+            </a:pPr>
+            <a:r>
+              <a:t>• Plan du Cours</a:t>
+            </a:r>
+          </a:p>
+          <a:p>
+            <a:pPr>
+              <a:spcAft>
+                <a:spcPts val="600"/>
+              </a:spcAft>
+              <a:defRPr sz="1600">
+                <a:solidFill>val="22344A"/&gt;</a:solidFill>
+              </a:defRPr>
+            </a:pPr>
+            <a:r>
+              <a:t>• 1. Introduction et Importance des TIC(10 min)</a:t>
+            </a:r>
+          </a:p>
+          <a:p>
+            <a:pPr>
+              <a:spcAft>
+                <a:spcPts val="600"/>
+              </a:spcAft>
+              <a:defRPr sz="1600">
+                <a:solidFill>val="22344A"/&gt;</a:solidFill>
+              </a:defRPr>
+            </a:pPr>
+            <a:r>
+              <a:t>• Convergence de trois domaines</a:t>
+            </a:r>
+          </a:p>
+          <a:p>
+            <a:pPr>
+              <a:spcAft>
+                <a:spcPts val="600"/>
+              </a:spcAft>
+              <a:defRPr sz="1600">
+                <a:solidFill>val="22344A"/&gt;</a:solidFill>
+              </a:defRPr>
+            </a:pPr>
+            <a:r>
+              <a:t>• Définitions de référence</a:t>
+            </a:r>
+          </a:p>
+          <a:p>
+            <a:pPr>
+              <a:spcAft>
+                <a:spcPts val="600"/>
+              </a:spcAft>
+              <a:defRPr sz="1600">
+                <a:solidFill>val="22344A"/&gt;</a:solidFill>
+              </a:defRPr>
+            </a:pPr>
+            <a:r>
+              <a:t>• 3. Évolution Historique et Terminologique (NTIC → TIC)(10 min)</a:t>
+            </a:r>
+          </a:p>
+          <a:p>
+            <a:pPr>
+              <a:spcAft>
+                <a:spcPts val="600"/>
+              </a:spcAft>
+              <a:defRPr sz="1600">
+                <a:solidFill>val="22344A"/&gt;</a:solidFill>
+              </a:defRPr>
+            </a:pPr>
+            <a:r>
+              <a:t>• 4. Les Trois Dimensions Fondamentales(15 min)</a:t>
+            </a:r>
+          </a:p>
+        </p:txBody>
+      </p:sp>
+      <p:sp>
+        <p:nvSpPr>
+          <p:cNvPr id="990001" name="Pied de page FLE"/>
+          <p:cNvSpPr>
+            <a:spLocks noGrp="1"/>
+          </p:cNvSpPr>
+          <p:nvPr/>
+        </p:nvSpPr>
+        <p:spPr>
+          <a:xfrm>
+            <a:off x="2971800" y="182880"/>
+            <a:ext cx="4572000" cy="274320"/>
+          </a:xfrm>
+          <a:prstGeom prst="rect">
+            <a:avLst/>
+          </a:prstGeom>
+        </p:spPr>
+        <p:txBody>
+          <a:bodyPr anchor="b"/>
+          <a:lstStyle/>
+          <a:p>
+            <a:pPr algn="r">
+              <a:defRPr sz="900">
                 <a:solidFill>
-                  <a:srgbClr val="222222"/>
+                  <a:srgbClr val="9AA7B6"/>
                 </a:solidFill>
-              </a:defRPr>
-            </a:pPr>
-            <a:r>
-              <a:t>• Fiche cours — Plateforme e-learning (Moodle)</a:t>
-            </a:r>
-          </a:p>
-          <a:p>
-            <a:pPr>
-              <a:spcAft>
-                <a:spcPts val="600"/>
-              </a:spcAft>
-              <a:defRPr sz="1600">
+                <a:latin typeface="Poppins"/>
+              </a:defRPr>
+            </a:pPr>
+            <a:r>
+              <a:rPr lang="fr-FR" sz="900">
                 <a:solidFill>
-                  <a:srgbClr val="222222"/>
+                  <a:srgbClr val="9AA7B6"/>
                 </a:solidFill>
-              </a:defRPr>
-            </a:pPr>
-            <a:r>
-              <a:t>• Objectifs de l'enseignement</a:t>
-            </a:r>
-          </a:p>
-          <a:p>
-            <a:pPr>
-              <a:spcAft>
-                <a:spcPts val="600"/>
-              </a:spcAft>
-              <a:defRPr sz="1600">
-                <a:solidFill>
-                  <a:srgbClr val="222222"/>
-                </a:solidFill>
-              </a:defRPr>
-            </a:pPr>
-            <a:r>
-              <a:t>• Contexte réglementaire algérien</a:t>
-            </a:r>
-          </a:p>
-          <a:p>
-            <a:pPr>
-              <a:spcAft>
-                <a:spcPts val="600"/>
-              </a:spcAft>
-              <a:defRPr sz="1600">
-                <a:solidFill>
-                  <a:srgbClr val="222222"/>
-                </a:solidFill>
-              </a:defRPr>
-            </a:pPr>
-            <a:r>
-              <a:t>• Bibliographie et ressources externes</a:t>
-            </a:r>
-          </a:p>
-          <a:p>
-            <a:pPr>
-              <a:spcAft>
-                <a:spcPts val="600"/>
-              </a:spcAft>
-              <a:defRPr sz="1600">
-                <a:solidFill>
-                  <a:srgbClr val="222222"/>
-                </a:solidFill>
-              </a:defRPr>
-            </a:pPr>
-            <a:r>
-              <a:t>• Plan du Cours</a:t>
-            </a:r>
-          </a:p>
-          <a:p>
-            <a:pPr>
-              <a:spcAft>
-                <a:spcPts val="600"/>
-              </a:spcAft>
-              <a:defRPr sz="1600">
-                <a:solidFill>
-                  <a:srgbClr val="222222"/>
-                </a:solidFill>
-              </a:defRPr>
-            </a:pPr>
-            <a:r>
-              <a:t>• 1. Introduction et Importance des TIC(10 min)</a:t>
-            </a:r>
-          </a:p>
-          <a:p>
-            <a:pPr>
-              <a:spcAft>
-                <a:spcPts val="600"/>
-              </a:spcAft>
-              <a:defRPr sz="1600">
-                <a:solidFill>
-                  <a:srgbClr val="222222"/>
-                </a:solidFill>
-              </a:defRPr>
-            </a:pPr>
-            <a:r>
-              <a:t>• Convergence de trois domaines</a:t>
-            </a:r>
-          </a:p>
-          <a:p>
-            <a:pPr>
-              <a:spcAft>
-                <a:spcPts val="600"/>
-              </a:spcAft>
-              <a:defRPr sz="1600">
-                <a:solidFill>
-                  <a:srgbClr val="222222"/>
-                </a:solidFill>
-              </a:defRPr>
-            </a:pPr>
-            <a:r>
-              <a:t>• Définitions de référence</a:t>
-            </a:r>
-          </a:p>
-          <a:p>
-            <a:pPr>
-              <a:spcAft>
-                <a:spcPts val="600"/>
-              </a:spcAft>
-              <a:defRPr sz="1600">
-                <a:solidFill>
-                  <a:srgbClr val="222222"/>
-                </a:solidFill>
-              </a:defRPr>
-            </a:pPr>
-            <a:r>
-              <a:t>• 3. Évolution Historique et Terminologique (NTIC → TIC)(10 min)</a:t>
-            </a:r>
-          </a:p>
-          <a:p>
-            <a:pPr>
-              <a:spcAft>
-                <a:spcPts val="600"/>
-              </a:spcAft>
-              <a:defRPr sz="1600">
-                <a:solidFill>
-                  <a:srgbClr val="222222"/>
-                </a:solidFill>
-              </a:defRPr>
-            </a:pPr>
-            <a:r>
-              <a:t>• 4. Les Trois Dimensions Fondamentales(15 min)</a:t>
+                <a:latin typeface="Poppins"/>
+              </a:rPr>
+              <a:t>Université de Mostaganem — Dr. Madani BELACEL</a:t>
             </a:r>
           </a:p>
         </p:txBody>
@@ -4621,9 +4870,7 @@
   <p:cSld>
     <p:bg>
       <p:bgPr>
-        <a:solidFill>
-          <a:srgbClr val="FFFFFF"/>
-        </a:solidFill>
+        <a:solidFill>val="FFFFFF"/&gt;</a:solidFill>
         <a:effectLst/>
       </p:bgPr>
     </p:bg>
@@ -4648,9 +4895,7 @@
           <a:prstGeom prst="rect">
             <a:avLst/>
           </a:prstGeom>
-          <a:solidFill>
-            <a:srgbClr val="2C6E49"/>
-          </a:solidFill>
+          <a:solidFill>val="00875B"/&gt;</a:solidFill>
           <a:ln>
             <a:noFill/>
           </a:ln>
@@ -4701,9 +4946,7 @@
           <a:p>
             <a:pPr algn="l">
               <a:defRPr sz="2200" b="1">
-                <a:solidFill>
-                  <a:srgbClr val="1A5C33"/>
-                </a:solidFill>
+                <a:solidFill>val="006847"/&gt;</a:solidFill>
               </a:defRPr>
             </a:pPr>
             <a:r>
@@ -4739,43 +4982,78 @@
                 <a:spcPts val="600"/>
               </a:spcAft>
               <a:defRPr sz="1400">
+                <a:solidFill>val="22344A"/&gt;</a:solidFill>
+              </a:defRPr>
+            </a:pPr>
+            <a:r>
+              <a:t>• Référentiel :titres et structure alignés sur Canvas Univ-Mosta (elearning.univ-usto.dz) ; bonnes pratiques benchmark 10 universités algériennes (voirBENCHMARK_10_UNIVERSITES_ELEARNING.md).</a:t>
+            </a:r>
+          </a:p>
+          <a:p>
+            <a:pPr>
+              <a:spcAft>
+                <a:spcPts val="600"/>
+              </a:spcAft>
+              <a:defRPr sz="1400">
+                <a:solidFill>val="22344A"/&gt;</a:solidFill>
+              </a:defRPr>
+            </a:pPr>
+            <a:r>
+              <a:t>• Public visé :Étudiants Licence 1 — Département Langues (FR/AN), ENS 1ère année</a:t>
+            </a:r>
+          </a:p>
+          <a:p>
+            <a:pPr>
+              <a:spcAft>
+                <a:spcPts val="600"/>
+              </a:spcAft>
+              <a:defRPr sz="1400">
+                <a:solidFill>val="22344A"/&gt;</a:solidFill>
+              </a:defRPr>
+            </a:pPr>
+            <a:r>
+              <a:t>• Compétences pré-requises :Aucun prérequis informatique ; maîtrise minimale du français académique</a:t>
+            </a:r>
+          </a:p>
+        </p:txBody>
+      </p:sp>
+      <p:sp>
+        <p:nvSpPr>
+          <p:cNvPr id="990001" name="Pied de page FLE"/>
+          <p:cNvSpPr>
+            <a:spLocks noGrp="1"/>
+          </p:cNvSpPr>
+          <p:nvPr/>
+        </p:nvSpPr>
+        <p:spPr>
+          <a:xfrm>
+            <a:off x="-228600" y="6400800"/>
+            <a:ext cx="109728" cy="274320"/>
+          </a:xfrm>
+          <a:prstGeom prst="rect">
+            <a:avLst/>
+          </a:prstGeom>
+        </p:spPr>
+        <p:txBody>
+          <a:bodyPr anchor="b"/>
+          <a:lstStyle/>
+          <a:p>
+            <a:pPr algn="r">
+              <a:defRPr sz="900">
                 <a:solidFill>
-                  <a:srgbClr val="222222"/>
+                  <a:srgbClr val="9AA7B6"/>
                 </a:solidFill>
-              </a:defRPr>
-            </a:pPr>
-            <a:r>
-              <a:t>• Référentiel :titres et structure alignés sur Canvas Univ-Mosta (elearning.univ-usto.dz) ; bonnes pratiques benchmark 10 universités algériennes (voirBENCHMARK_10_UNIVERSITES_ELEARNING.md).</a:t>
-            </a:r>
-          </a:p>
-          <a:p>
-            <a:pPr>
-              <a:spcAft>
-                <a:spcPts val="600"/>
-              </a:spcAft>
-              <a:defRPr sz="1400">
+                <a:latin typeface="Poppins"/>
+              </a:defRPr>
+            </a:pPr>
+            <a:r>
+              <a:rPr lang="fr-FR" sz="900">
                 <a:solidFill>
-                  <a:srgbClr val="222222"/>
+                  <a:srgbClr val="9AA7B6"/>
                 </a:solidFill>
-              </a:defRPr>
-            </a:pPr>
-            <a:r>
-              <a:t>• Public visé :Étudiants Licence 1 — Département Langues (FR/AN), ENS 1ère année</a:t>
-            </a:r>
-          </a:p>
-          <a:p>
-            <a:pPr>
-              <a:spcAft>
-                <a:spcPts val="600"/>
-              </a:spcAft>
-              <a:defRPr sz="1400">
-                <a:solidFill>
-                  <a:srgbClr val="222222"/>
-                </a:solidFill>
-              </a:defRPr>
-            </a:pPr>
-            <a:r>
-              <a:t>• Compétences pré-requises :Aucun prérequis informatique ; maîtrise minimale du français académique</a:t>
+                <a:latin typeface="Poppins"/>
+              </a:rPr>
+              <a:t>Université de Mostaganem — Dr. Madani BELACEL</a:t>
             </a:r>
           </a:p>
         </p:txBody>
@@ -4793,9 +5071,7 @@
   <p:cSld>
     <p:bg>
       <p:bgPr>
-        <a:solidFill>
-          <a:srgbClr val="FFFFFF"/>
-        </a:solidFill>
+        <a:solidFill>val="FFFFFF"/&gt;</a:solidFill>
         <a:effectLst/>
       </p:bgPr>
     </p:bg>
@@ -4820,9 +5096,7 @@
           <a:prstGeom prst="rect">
             <a:avLst/>
           </a:prstGeom>
-          <a:solidFill>
-            <a:srgbClr val="2C6E49"/>
-          </a:solidFill>
+          <a:solidFill>val="00875B"/&gt;</a:solidFill>
           <a:ln>
             <a:noFill/>
           </a:ln>
@@ -4873,9 +5147,7 @@
           <a:p>
             <a:pPr algn="l">
               <a:defRPr sz="2200" b="1">
-                <a:solidFill>
-                  <a:srgbClr val="1A5C33"/>
-                </a:solidFill>
+                <a:solidFill>val="006847"/&gt;</a:solidFill>
               </a:defRPr>
             </a:pPr>
             <a:r>
@@ -4911,78 +5183,111 @@
                 <a:spcPts val="600"/>
               </a:spcAft>
               <a:defRPr sz="1400">
+                <a:solidFill>val="22344A"/&gt;</a:solidFill>
+              </a:defRPr>
+            </a:pPr>
+            <a:r>
+              <a:t>• En termes de savoir :- Définir les TIC et distinguer NTIC/TIC/ICT</a:t>
+            </a:r>
+            <a:br/>
+            <a:r>
+              <a:t>- Identifier les trois dimensions : technique, information, communication</a:t>
+            </a:r>
+            <a:br/>
+            <a:r>
+              <a:t>- Citer les fonctions : traitement, transmission, sauvegarde</a:t>
+            </a:r>
+          </a:p>
+          <a:p>
+            <a:pPr>
+              <a:spcAft>
+                <a:spcPts val="600"/>
+              </a:spcAft>
+              <a:defRPr sz="1400">
+                <a:solidFill>val="22344A"/&gt;</a:solidFill>
+              </a:defRPr>
+            </a:pPr>
+            <a:r>
+              <a:t>• En termes de savoir-faire :- Utiliser Moodle et le courriel institutionnel</a:t>
+            </a:r>
+            <a:br/>
+            <a:r>
+              <a:t>- Nommer et classer des outils numériques par fonction</a:t>
+            </a:r>
+            <a:br/>
+            <a:r>
+              <a:t>- Évaluer la fiabilité d'une source en ligne (introduction CRAP)</a:t>
+            </a:r>
+          </a:p>
+          <a:p>
+            <a:pPr>
+              <a:spcAft>
+                <a:spcPts val="600"/>
+              </a:spcAft>
+              <a:defRPr sz="1400">
+                <a:solidFill>val="22344A"/&gt;</a:solidFill>
+              </a:defRPr>
+            </a:pPr>
+            <a:r>
+              <a:t>• En termes de savoir-être :- Adopter une posture critique face au numérique</a:t>
+            </a:r>
+            <a:br/>
+            <a:r>
+              <a:t>- Respecter l'éthique académique (plagiat, vie privée)</a:t>
+            </a:r>
+          </a:p>
+          <a:p>
+            <a:pPr>
+              <a:spcAft>
+                <a:spcPts val="600"/>
+              </a:spcAft>
+              <a:defRPr sz="1400">
+                <a:solidFill>val="22344A"/&gt;</a:solidFill>
+              </a:defRPr>
+            </a:pPr>
+            <a:r>
+              <a:t>• Mode d'évaluation :TD 40 % (5 exercices) + QCM Moodle 20 % + participation 10 % + examen 30 %</a:t>
+            </a:r>
+          </a:p>
+        </p:txBody>
+      </p:sp>
+      <p:sp>
+        <p:nvSpPr>
+          <p:cNvPr id="990001" name="Pied de page FLE"/>
+          <p:cNvSpPr>
+            <a:spLocks noGrp="1"/>
+          </p:cNvSpPr>
+          <p:nvPr/>
+        </p:nvSpPr>
+        <p:spPr>
+          <a:xfrm>
+            <a:off x="-228600" y="6400800"/>
+            <a:ext cx="109728" cy="274320"/>
+          </a:xfrm>
+          <a:prstGeom prst="rect">
+            <a:avLst/>
+          </a:prstGeom>
+        </p:spPr>
+        <p:txBody>
+          <a:bodyPr anchor="b"/>
+          <a:lstStyle/>
+          <a:p>
+            <a:pPr algn="r">
+              <a:defRPr sz="900">
                 <a:solidFill>
-                  <a:srgbClr val="222222"/>
+                  <a:srgbClr val="9AA7B6"/>
                 </a:solidFill>
-              </a:defRPr>
-            </a:pPr>
-            <a:r>
-              <a:t>• En termes de savoir :- Définir les TIC et distinguer NTIC/TIC/ICT</a:t>
-            </a:r>
-            <a:br/>
-            <a:r>
-              <a:t>- Identifier les trois dimensions : technique, information, communication</a:t>
-            </a:r>
-            <a:br/>
-            <a:r>
-              <a:t>- Citer les fonctions : traitement, transmission, sauvegarde</a:t>
-            </a:r>
-          </a:p>
-          <a:p>
-            <a:pPr>
-              <a:spcAft>
-                <a:spcPts val="600"/>
-              </a:spcAft>
-              <a:defRPr sz="1400">
+                <a:latin typeface="Poppins"/>
+              </a:defRPr>
+            </a:pPr>
+            <a:r>
+              <a:rPr lang="fr-FR" sz="900">
                 <a:solidFill>
-                  <a:srgbClr val="222222"/>
+                  <a:srgbClr val="9AA7B6"/>
                 </a:solidFill>
-              </a:defRPr>
-            </a:pPr>
-            <a:r>
-              <a:t>• En termes de savoir-faire :- Utiliser Moodle et le courriel institutionnel</a:t>
-            </a:r>
-            <a:br/>
-            <a:r>
-              <a:t>- Nommer et classer des outils numériques par fonction</a:t>
-            </a:r>
-            <a:br/>
-            <a:r>
-              <a:t>- Évaluer la fiabilité d'une source en ligne (introduction CRAP)</a:t>
-            </a:r>
-          </a:p>
-          <a:p>
-            <a:pPr>
-              <a:spcAft>
-                <a:spcPts val="600"/>
-              </a:spcAft>
-              <a:defRPr sz="1400">
-                <a:solidFill>
-                  <a:srgbClr val="222222"/>
-                </a:solidFill>
-              </a:defRPr>
-            </a:pPr>
-            <a:r>
-              <a:t>• En termes de savoir-être :- Adopter une posture critique face au numérique</a:t>
-            </a:r>
-            <a:br/>
-            <a:r>
-              <a:t>- Respecter l'éthique académique (plagiat, vie privée)</a:t>
-            </a:r>
-          </a:p>
-          <a:p>
-            <a:pPr>
-              <a:spcAft>
-                <a:spcPts val="600"/>
-              </a:spcAft>
-              <a:defRPr sz="1400">
-                <a:solidFill>
-                  <a:srgbClr val="222222"/>
-                </a:solidFill>
-              </a:defRPr>
-            </a:pPr>
-            <a:r>
-              <a:t>• Mode d'évaluation :TD 40 % (5 exercices) + QCM Moodle 20 % + participation 10 % + examen 30 %</a:t>
+                <a:latin typeface="Poppins"/>
+              </a:rPr>
+              <a:t>Université de Mostaganem — Dr. Madani BELACEL</a:t>
             </a:r>
           </a:p>
         </p:txBody>
@@ -5000,9 +5305,7 @@
   <p:cSld>
     <p:bg>
       <p:bgPr>
-        <a:solidFill>
-          <a:srgbClr val="FFFFFF"/>
-        </a:solidFill>
+        <a:solidFill>val="FFFFFF"/&gt;</a:solidFill>
         <a:effectLst/>
       </p:bgPr>
     </p:bg>
@@ -5027,9 +5330,7 @@
           <a:prstGeom prst="rect">
             <a:avLst/>
           </a:prstGeom>
-          <a:solidFill>
-            <a:srgbClr val="2C6E49"/>
-          </a:solidFill>
+          <a:solidFill>val="00875B"/&gt;</a:solidFill>
           <a:ln>
             <a:noFill/>
           </a:ln>
@@ -5080,9 +5381,7 @@
           <a:p>
             <a:pPr algn="l">
               <a:defRPr sz="2200" b="1">
-                <a:solidFill>
-                  <a:srgbClr val="1A5C33"/>
-                </a:solidFill>
+                <a:solidFill>val="006847"/&gt;</a:solidFill>
               </a:defRPr>
             </a:pPr>
             <a:r>
@@ -5118,88 +5417,117 @@
                 <a:spcPts val="600"/>
               </a:spcAft>
               <a:defRPr sz="1400">
+                <a:solidFill>val="22344A"/&gt;</a:solidFill>
+              </a:defRPr>
+            </a:pPr>
+            <a:r>
+              <a:t>• Ce cours s'inscrit dans le cadre réglementaire algérien de la formation des enseignants :</a:t>
+            </a:r>
+          </a:p>
+          <a:p>
+            <a:pPr>
+              <a:spcAft>
+                <a:spcPts val="600"/>
+              </a:spcAft>
+              <a:defRPr sz="1400">
+                <a:solidFill>val="22344A"/&gt;</a:solidFill>
+              </a:defRPr>
+            </a:pPr>
+            <a:r>
+              <a:t>• Arrêté ministériel portant création des ENS (cycle Licence/Master)— définit le cadre institutionnel.</a:t>
+            </a:r>
+          </a:p>
+          <a:p>
+            <a:pPr>
+              <a:spcAft>
+                <a:spcPts val="600"/>
+              </a:spcAft>
+              <a:defRPr sz="1400">
+                <a:solidFill>val="22344A"/&gt;</a:solidFill>
+              </a:defRPr>
+            </a:pPr>
+            <a:r>
+              <a:t>• Arrêté 712 fixant le programme des concours ENS— programme des concours.</a:t>
+            </a:r>
+          </a:p>
+          <a:p>
+            <a:pPr>
+              <a:spcAft>
+                <a:spcPts val="600"/>
+              </a:spcAft>
+              <a:defRPr sz="1400">
+                <a:solidFill>val="22344A"/&gt;</a:solidFill>
+              </a:defRPr>
+            </a:pPr>
+            <a:r>
+              <a:t>• Programme national de TIC pour les filières de langues étrangères— objectifs et contenus.</a:t>
+            </a:r>
+          </a:p>
+          <a:p>
+            <a:pPr>
+              <a:spcAft>
+                <a:spcPts val="600"/>
+              </a:spcAft>
+              <a:defRPr sz="1400">
+                <a:solidFill>val="22344A"/&gt;</a:solidFill>
+              </a:defRPr>
+            </a:pPr>
+            <a:r>
+              <a:t>• Référentiel des compétences numériques algérien— compétences attendues.</a:t>
+            </a:r>
+          </a:p>
+          <a:p>
+            <a:pPr>
+              <a:spcAft>
+                <a:spcPts val="600"/>
+              </a:spcAft>
+              <a:defRPr sz="1400">
+                <a:solidFill>val="22344A"/&gt;</a:solidFill>
+              </a:defRPr>
+            </a:pPr>
+            <a:r>
+              <a:t>• Benchmark des 10 universités algériennes— standards nationaux (BENCHMARK_10_UNIVERSITES_ELEARNING.md).</a:t>
+            </a:r>
+          </a:p>
+        </p:txBody>
+      </p:sp>
+      <p:sp>
+        <p:nvSpPr>
+          <p:cNvPr id="990001" name="Pied de page FLE"/>
+          <p:cNvSpPr>
+            <a:spLocks noGrp="1"/>
+          </p:cNvSpPr>
+          <p:nvPr/>
+        </p:nvSpPr>
+        <p:spPr>
+          <a:xfrm>
+            <a:off x="-228600" y="6400800"/>
+            <a:ext cx="109728" cy="274320"/>
+          </a:xfrm>
+          <a:prstGeom prst="rect">
+            <a:avLst/>
+          </a:prstGeom>
+        </p:spPr>
+        <p:txBody>
+          <a:bodyPr anchor="b"/>
+          <a:lstStyle/>
+          <a:p>
+            <a:pPr algn="r">
+              <a:defRPr sz="900">
                 <a:solidFill>
-                  <a:srgbClr val="222222"/>
+                  <a:srgbClr val="9AA7B6"/>
                 </a:solidFill>
-              </a:defRPr>
-            </a:pPr>
-            <a:r>
-              <a:t>• Ce cours s'inscrit dans le cadre réglementaire algérien de la formation des enseignants :</a:t>
-            </a:r>
-          </a:p>
-          <a:p>
-            <a:pPr>
-              <a:spcAft>
-                <a:spcPts val="600"/>
-              </a:spcAft>
-              <a:defRPr sz="1400">
+                <a:latin typeface="Poppins"/>
+              </a:defRPr>
+            </a:pPr>
+            <a:r>
+              <a:rPr lang="fr-FR" sz="900">
                 <a:solidFill>
-                  <a:srgbClr val="222222"/>
+                  <a:srgbClr val="9AA7B6"/>
                 </a:solidFill>
-              </a:defRPr>
-            </a:pPr>
-            <a:r>
-              <a:t>• Arrêté ministériel portant création des ENS (cycle Licence/Master)— définit le cadre institutionnel.</a:t>
-            </a:r>
-          </a:p>
-          <a:p>
-            <a:pPr>
-              <a:spcAft>
-                <a:spcPts val="600"/>
-              </a:spcAft>
-              <a:defRPr sz="1400">
-                <a:solidFill>
-                  <a:srgbClr val="222222"/>
-                </a:solidFill>
-              </a:defRPr>
-            </a:pPr>
-            <a:r>
-              <a:t>• Arrêté 712 fixant le programme des concours ENS— programme des concours.</a:t>
-            </a:r>
-          </a:p>
-          <a:p>
-            <a:pPr>
-              <a:spcAft>
-                <a:spcPts val="600"/>
-              </a:spcAft>
-              <a:defRPr sz="1400">
-                <a:solidFill>
-                  <a:srgbClr val="222222"/>
-                </a:solidFill>
-              </a:defRPr>
-            </a:pPr>
-            <a:r>
-              <a:t>• Programme national de TIC pour les filières de langues étrangères— objectifs et contenus.</a:t>
-            </a:r>
-          </a:p>
-          <a:p>
-            <a:pPr>
-              <a:spcAft>
-                <a:spcPts val="600"/>
-              </a:spcAft>
-              <a:defRPr sz="1400">
-                <a:solidFill>
-                  <a:srgbClr val="222222"/>
-                </a:solidFill>
-              </a:defRPr>
-            </a:pPr>
-            <a:r>
-              <a:t>• Référentiel des compétences numériques algérien— compétences attendues.</a:t>
-            </a:r>
-          </a:p>
-          <a:p>
-            <a:pPr>
-              <a:spcAft>
-                <a:spcPts val="600"/>
-              </a:spcAft>
-              <a:defRPr sz="1400">
-                <a:solidFill>
-                  <a:srgbClr val="222222"/>
-                </a:solidFill>
-              </a:defRPr>
-            </a:pPr>
-            <a:r>
-              <a:t>• Benchmark des 10 universités algériennes— standards nationaux (BENCHMARK_10_UNIVERSITES_ELEARNING.md).</a:t>
+                <a:latin typeface="Poppins"/>
+              </a:rPr>
+              <a:t>Université de Mostaganem — Dr. Madani BELACEL</a:t>
             </a:r>
           </a:p>
         </p:txBody>
@@ -5217,9 +5545,7 @@
   <p:cSld>
     <p:bg>
       <p:bgPr>
-        <a:solidFill>
-          <a:srgbClr val="FFFFFF"/>
-        </a:solidFill>
+        <a:solidFill>val="FFFFFF"/&gt;</a:solidFill>
         <a:effectLst/>
       </p:bgPr>
     </p:bg>
@@ -5244,9 +5570,7 @@
           <a:prstGeom prst="rect">
             <a:avLst/>
           </a:prstGeom>
-          <a:solidFill>
-            <a:srgbClr val="2C6E49"/>
-          </a:solidFill>
+          <a:solidFill>val="00875B"/&gt;</a:solidFill>
           <a:ln>
             <a:noFill/>
           </a:ln>
@@ -5297,9 +5621,7 @@
           <a:p>
             <a:pPr algn="l">
               <a:defRPr sz="2200" b="1">
-                <a:solidFill>
-                  <a:srgbClr val="1A5C33"/>
-                </a:solidFill>
+                <a:solidFill>val="006847"/&gt;</a:solidFill>
               </a:defRPr>
             </a:pPr>
             <a:r>
@@ -5335,28 +5657,65 @@
                 <a:spcPts val="600"/>
               </a:spcAft>
               <a:defRPr sz="1400">
+                <a:solidFill>val="22344A"/&gt;</a:solidFill>
+              </a:defRPr>
+            </a:pPr>
+            <a:r>
+              <a:t>• UIT — définitions TIC ; UNESCO — compétences numériques ; Guide étudiant Moodle Univ. Boumerdès / Béjaïa</a:t>
+            </a:r>
+          </a:p>
+          <a:p>
+            <a:pPr>
+              <a:spcAft>
+                <a:spcPts val="600"/>
+              </a:spcAft>
+              <a:defRPr sz="1400">
+                <a:solidFill>val="22344A"/&gt;</a:solidFill>
+              </a:defRPr>
+            </a:pPr>
+            <a:r>
+              <a:t>• Contact enseignant :BELACEL Madani —madani.belacel@univ-mosta.dz</a:t>
+            </a:r>
+          </a:p>
+        </p:txBody>
+      </p:sp>
+      <p:sp>
+        <p:nvSpPr>
+          <p:cNvPr id="990001" name="Pied de page FLE"/>
+          <p:cNvSpPr>
+            <a:spLocks noGrp="1"/>
+          </p:cNvSpPr>
+          <p:nvPr/>
+        </p:nvSpPr>
+        <p:spPr>
+          <a:xfrm>
+            <a:off x="-228600" y="6400800"/>
+            <a:ext cx="109728" cy="274320"/>
+          </a:xfrm>
+          <a:prstGeom prst="rect">
+            <a:avLst/>
+          </a:prstGeom>
+        </p:spPr>
+        <p:txBody>
+          <a:bodyPr anchor="b"/>
+          <a:lstStyle/>
+          <a:p>
+            <a:pPr algn="r">
+              <a:defRPr sz="900">
                 <a:solidFill>
-                  <a:srgbClr val="222222"/>
+                  <a:srgbClr val="9AA7B6"/>
                 </a:solidFill>
-              </a:defRPr>
-            </a:pPr>
-            <a:r>
-              <a:t>• UIT — définitions TIC ; UNESCO — compétences numériques ; Guide étudiant Moodle Univ. Boumerdès / Béjaïa</a:t>
-            </a:r>
-          </a:p>
-          <a:p>
-            <a:pPr>
-              <a:spcAft>
-                <a:spcPts val="600"/>
-              </a:spcAft>
-              <a:defRPr sz="1400">
+                <a:latin typeface="Poppins"/>
+              </a:defRPr>
+            </a:pPr>
+            <a:r>
+              <a:rPr lang="fr-FR" sz="900">
                 <a:solidFill>
-                  <a:srgbClr val="222222"/>
+                  <a:srgbClr val="9AA7B6"/>
                 </a:solidFill>
-              </a:defRPr>
-            </a:pPr>
-            <a:r>
-              <a:t>• Contact enseignant :BELACEL Madani —madani.belacel@univ-mosta.dz</a:t>
+                <a:latin typeface="Poppins"/>
+              </a:rPr>
+              <a:t>Université de Mostaganem — Dr. Madani BELACEL</a:t>
             </a:r>
           </a:p>
         </p:txBody>
@@ -5374,9 +5733,7 @@
   <p:cSld>
     <p:bg>
       <p:bgPr>
-        <a:solidFill>
-          <a:srgbClr val="FFFFFF"/>
-        </a:solidFill>
+        <a:solidFill>val="FFFFFF"/&gt;</a:solidFill>
         <a:effectLst/>
       </p:bgPr>
     </p:bg>
@@ -5401,9 +5758,7 @@
           <a:prstGeom prst="rect">
             <a:avLst/>
           </a:prstGeom>
-          <a:solidFill>
-            <a:srgbClr val="2C6E49"/>
-          </a:solidFill>
+          <a:solidFill>val="00875B"/&gt;</a:solidFill>
           <a:ln>
             <a:noFill/>
           </a:ln>
@@ -5454,9 +5809,7 @@
           <a:p>
             <a:pPr algn="l">
               <a:defRPr sz="2200" b="1">
-                <a:solidFill>
-                  <a:srgbClr val="1A5C33"/>
-                </a:solidFill>
+                <a:solidFill>val="006847"/&gt;</a:solidFill>
               </a:defRPr>
             </a:pPr>
             <a:r>
@@ -5492,133 +5845,156 @@
                 <a:spcPts val="600"/>
               </a:spcAft>
               <a:defRPr sz="1400">
+                <a:solidFill>val="22344A"/&gt;</a:solidFill>
+              </a:defRPr>
+            </a:pPr>
+            <a:r>
+              <a:t>• Introduction et importance des TIC dans le monde contemporain</a:t>
+            </a:r>
+          </a:p>
+          <a:p>
+            <a:pPr>
+              <a:spcAft>
+                <a:spcPts val="600"/>
+              </a:spcAft>
+              <a:defRPr sz="1400">
+                <a:solidFill>val="22344A"/&gt;</a:solidFill>
+              </a:defRPr>
+            </a:pPr>
+            <a:r>
+              <a:t>• Définition détaillée des TIC</a:t>
+            </a:r>
+          </a:p>
+          <a:p>
+            <a:pPr>
+              <a:spcAft>
+                <a:spcPts val="600"/>
+              </a:spcAft>
+              <a:defRPr sz="1400">
+                <a:solidFill>val="22344A"/&gt;</a:solidFill>
+              </a:defRPr>
+            </a:pPr>
+            <a:r>
+              <a:t>• Évolution historique et terminologique (NTIC → TIC)</a:t>
+            </a:r>
+          </a:p>
+          <a:p>
+            <a:pPr>
+              <a:spcAft>
+                <a:spcPts val="600"/>
+              </a:spcAft>
+              <a:defRPr sz="1400">
+                <a:solidFill>val="22344A"/&gt;</a:solidFill>
+              </a:defRPr>
+            </a:pPr>
+            <a:r>
+              <a:t>• Les trois dimensions fondamentales des TIC</a:t>
+            </a:r>
+          </a:p>
+          <a:p>
+            <a:pPr>
+              <a:spcAft>
+                <a:spcPts val="600"/>
+              </a:spcAft>
+              <a:defRPr sz="1400">
+                <a:solidFill>val="22344A"/&gt;</a:solidFill>
+              </a:defRPr>
+            </a:pPr>
+            <a:r>
+              <a:t>• Rôle et fonctions des TIC (traitement, transmission, sauvegarde)</a:t>
+            </a:r>
+          </a:p>
+          <a:p>
+            <a:pPr>
+              <a:spcAft>
+                <a:spcPts val="600"/>
+              </a:spcAft>
+              <a:defRPr sz="1400">
+                <a:solidFill>val="22344A"/&gt;</a:solidFill>
+              </a:defRPr>
+            </a:pPr>
+            <a:r>
+              <a:t>• Services offerts par les TIC</a:t>
+            </a:r>
+          </a:p>
+          <a:p>
+            <a:pPr>
+              <a:spcAft>
+                <a:spcPts val="600"/>
+              </a:spcAft>
+              <a:defRPr sz="1400">
+                <a:solidFill>val="22344A"/&gt;</a:solidFill>
+              </a:defRPr>
+            </a:pPr>
+            <a:r>
+              <a:t>• Domaines d'application avec focus sur l'éducation</a:t>
+            </a:r>
+          </a:p>
+          <a:p>
+            <a:pPr>
+              <a:spcAft>
+                <a:spcPts val="600"/>
+              </a:spcAft>
+              <a:defRPr sz="1400">
+                <a:solidFill>val="22344A"/&gt;</a:solidFill>
+              </a:defRPr>
+            </a:pPr>
+            <a:r>
+              <a:t>• Compétences numériques attendues en Licence Langues</a:t>
+            </a:r>
+          </a:p>
+          <a:p>
+            <a:pPr>
+              <a:spcAft>
+                <a:spcPts val="600"/>
+              </a:spcAft>
+              <a:defRPr sz="1400">
+                <a:solidFill>val="22344A"/&gt;</a:solidFill>
+              </a:defRPr>
+            </a:pPr>
+            <a:r>
+              <a:t>• Conclusion et transition vers le cours suivant</a:t>
+            </a:r>
+          </a:p>
+        </p:txBody>
+      </p:sp>
+      <p:sp>
+        <p:nvSpPr>
+          <p:cNvPr id="990001" name="Pied de page FLE"/>
+          <p:cNvSpPr>
+            <a:spLocks noGrp="1"/>
+          </p:cNvSpPr>
+          <p:nvPr/>
+        </p:nvSpPr>
+        <p:spPr>
+          <a:xfrm>
+            <a:off x="-228600" y="6400800"/>
+            <a:ext cx="109728" cy="274320"/>
+          </a:xfrm>
+          <a:prstGeom prst="rect">
+            <a:avLst/>
+          </a:prstGeom>
+        </p:spPr>
+        <p:txBody>
+          <a:bodyPr anchor="b"/>
+          <a:lstStyle/>
+          <a:p>
+            <a:pPr algn="r">
+              <a:defRPr sz="900">
                 <a:solidFill>
-                  <a:srgbClr val="222222"/>
+                  <a:srgbClr val="9AA7B6"/>
                 </a:solidFill>
-              </a:defRPr>
-            </a:pPr>
-            <a:r>
-              <a:t>• Introduction et importance des TIC dans le monde contemporain</a:t>
-            </a:r>
-          </a:p>
-          <a:p>
-            <a:pPr>
-              <a:spcAft>
-                <a:spcPts val="600"/>
-              </a:spcAft>
-              <a:defRPr sz="1400">
+                <a:latin typeface="Poppins"/>
+              </a:defRPr>
+            </a:pPr>
+            <a:r>
+              <a:rPr lang="fr-FR" sz="900">
                 <a:solidFill>
-                  <a:srgbClr val="222222"/>
+                  <a:srgbClr val="9AA7B6"/>
                 </a:solidFill>
-              </a:defRPr>
-            </a:pPr>
-            <a:r>
-              <a:t>• Définition détaillée des TIC</a:t>
-            </a:r>
-          </a:p>
-          <a:p>
-            <a:pPr>
-              <a:spcAft>
-                <a:spcPts val="600"/>
-              </a:spcAft>
-              <a:defRPr sz="1400">
-                <a:solidFill>
-                  <a:srgbClr val="222222"/>
-                </a:solidFill>
-              </a:defRPr>
-            </a:pPr>
-            <a:r>
-              <a:t>• Évolution historique et terminologique (NTIC → TIC)</a:t>
-            </a:r>
-          </a:p>
-          <a:p>
-            <a:pPr>
-              <a:spcAft>
-                <a:spcPts val="600"/>
-              </a:spcAft>
-              <a:defRPr sz="1400">
-                <a:solidFill>
-                  <a:srgbClr val="222222"/>
-                </a:solidFill>
-              </a:defRPr>
-            </a:pPr>
-            <a:r>
-              <a:t>• Les trois dimensions fondamentales des TIC</a:t>
-            </a:r>
-          </a:p>
-          <a:p>
-            <a:pPr>
-              <a:spcAft>
-                <a:spcPts val="600"/>
-              </a:spcAft>
-              <a:defRPr sz="1400">
-                <a:solidFill>
-                  <a:srgbClr val="222222"/>
-                </a:solidFill>
-              </a:defRPr>
-            </a:pPr>
-            <a:r>
-              <a:t>• Rôle et fonctions des TIC (traitement, transmission, sauvegarde)</a:t>
-            </a:r>
-          </a:p>
-          <a:p>
-            <a:pPr>
-              <a:spcAft>
-                <a:spcPts val="600"/>
-              </a:spcAft>
-              <a:defRPr sz="1400">
-                <a:solidFill>
-                  <a:srgbClr val="222222"/>
-                </a:solidFill>
-              </a:defRPr>
-            </a:pPr>
-            <a:r>
-              <a:t>• Services offerts par les TIC</a:t>
-            </a:r>
-          </a:p>
-          <a:p>
-            <a:pPr>
-              <a:spcAft>
-                <a:spcPts val="600"/>
-              </a:spcAft>
-              <a:defRPr sz="1400">
-                <a:solidFill>
-                  <a:srgbClr val="222222"/>
-                </a:solidFill>
-              </a:defRPr>
-            </a:pPr>
-            <a:r>
-              <a:t>• Domaines d'application avec focus sur l'éducation</a:t>
-            </a:r>
-          </a:p>
-          <a:p>
-            <a:pPr>
-              <a:spcAft>
-                <a:spcPts val="600"/>
-              </a:spcAft>
-              <a:defRPr sz="1400">
-                <a:solidFill>
-                  <a:srgbClr val="222222"/>
-                </a:solidFill>
-              </a:defRPr>
-            </a:pPr>
-            <a:r>
-              <a:t>• Compétences numériques attendues en Licence Langues</a:t>
-            </a:r>
-          </a:p>
-          <a:p>
-            <a:pPr>
-              <a:spcAft>
-                <a:spcPts val="600"/>
-              </a:spcAft>
-              <a:defRPr sz="1400">
-                <a:solidFill>
-                  <a:srgbClr val="222222"/>
-                </a:solidFill>
-              </a:defRPr>
-            </a:pPr>
-            <a:r>
-              <a:t>• Conclusion et transition vers le cours suivant</a:t>
+                <a:latin typeface="Poppins"/>
+              </a:rPr>
+              <a:t>Université de Mostaganem — Dr. Madani BELACEL</a:t>
             </a:r>
           </a:p>
         </p:txBody>
@@ -5636,9 +6012,7 @@
   <p:cSld>
     <p:bg>
       <p:bgPr>
-        <a:solidFill>
-          <a:srgbClr val="FFFFFF"/>
-        </a:solidFill>
+        <a:solidFill>val="FFFFFF"/&gt;</a:solidFill>
         <a:effectLst/>
       </p:bgPr>
     </p:bg>
@@ -5663,9 +6037,7 @@
           <a:prstGeom prst="rect">
             <a:avLst/>
           </a:prstGeom>
-          <a:solidFill>
-            <a:srgbClr val="2C6E49"/>
-          </a:solidFill>
+          <a:solidFill>val="00875B"/&gt;</a:solidFill>
           <a:ln>
             <a:noFill/>
           </a:ln>
@@ -5716,9 +6088,7 @@
           <a:p>
             <a:pPr algn="l">
               <a:defRPr sz="2200" b="1">
-                <a:solidFill>
-                  <a:srgbClr val="1A5C33"/>
-                </a:solidFill>
+                <a:solidFill>val="006847"/&gt;</a:solidFill>
               </a:defRPr>
             </a:pPr>
             <a:r>
@@ -5754,103 +6124,130 @@
                 <a:spcPts val="600"/>
               </a:spcAft>
               <a:defRPr sz="1400">
+                <a:solidFill>val="22344A"/&gt;</a:solidFill>
+              </a:defRPr>
+            </a:pPr>
+            <a:r>
+              <a:t>• LesTechniques de l'Information et de la Communication(TIC) désignent l'ensemble des outils numériques qui permettent de créer, traiter, stocker, transmettre et partager l'information. Elles incluent ordinateurs, smartphones, réseaux sans fil et plateformes en ligne.</a:t>
+            </a:r>
+          </a:p>
+          <a:p>
+            <a:pPr>
+              <a:spcAft>
+                <a:spcPts val="600"/>
+              </a:spcAft>
+              <a:defRPr sz="1400">
+                <a:solidFill>val="22344A"/&gt;</a:solidFill>
+              </a:defRPr>
+            </a:pPr>
+            <a:r>
+              <a:t>• Pourquoi ce cours en Licence 1 ?Dès la première année, vous utilisez les TIC pour :</a:t>
+            </a:r>
+          </a:p>
+          <a:p>
+            <a:pPr>
+              <a:spcAft>
+                <a:spcPts val="600"/>
+              </a:spcAft>
+              <a:defRPr sz="1400">
+                <a:solidFill>val="22344A"/&gt;</a:solidFill>
+              </a:defRPr>
+            </a:pPr>
+            <a:r>
+              <a:t>• Accéder aux ressources: Moodle, bibliothèque numérique, polycopiés PDF</a:t>
+            </a:r>
+          </a:p>
+          <a:p>
+            <a:pPr>
+              <a:spcAft>
+                <a:spcPts val="600"/>
+              </a:spcAft>
+              <a:defRPr sz="1400">
+                <a:solidFill>val="22344A"/&gt;</a:solidFill>
+              </a:defRPr>
+            </a:pPr>
+            <a:r>
+              <a:t>• Communiquer: courriel institutionnel, forums de TD</a:t>
+            </a:r>
+          </a:p>
+          <a:p>
+            <a:pPr>
+              <a:spcAft>
+                <a:spcPts val="600"/>
+              </a:spcAft>
+              <a:defRPr sz="1400">
+                <a:solidFill>val="22344A"/&gt;</a:solidFill>
+              </a:defRPr>
+            </a:pPr>
+            <a:r>
+              <a:t>• Rechercher: bases documentaires, corpus linguistiques multilingues</a:t>
+            </a:r>
+          </a:p>
+          <a:p>
+            <a:pPr>
+              <a:spcAft>
+                <a:spcPts val="600"/>
+              </a:spcAft>
+              <a:defRPr sz="1400">
+                <a:solidFill>val="22344A"/&gt;</a:solidFill>
+              </a:defRPr>
+            </a:pPr>
+            <a:r>
+              <a:t>• Produire: devoirs Word, présentations PowerPoint, exposés</a:t>
+            </a:r>
+          </a:p>
+          <a:p>
+            <a:pPr>
+              <a:spcAft>
+                <a:spcPts val="600"/>
+              </a:spcAft>
+              <a:defRPr sz="1400">
+                <a:solidFill>val="22344A"/&gt;</a:solidFill>
+              </a:defRPr>
+            </a:pPr>
+            <a:r>
+              <a:t>• Objectif pédagogique :développer uneculture numériquesolide — savoir utiliser les outils, mais aussi comprendre leurs limites (fiabilité des sources, plagiat, vie privée).</a:t>
+            </a:r>
+          </a:p>
+        </p:txBody>
+      </p:sp>
+      <p:sp>
+        <p:nvSpPr>
+          <p:cNvPr id="990001" name="Pied de page FLE"/>
+          <p:cNvSpPr>
+            <a:spLocks noGrp="1"/>
+          </p:cNvSpPr>
+          <p:nvPr/>
+        </p:nvSpPr>
+        <p:spPr>
+          <a:xfrm>
+            <a:off x="-228600" y="6400800"/>
+            <a:ext cx="109728" cy="274320"/>
+          </a:xfrm>
+          <a:prstGeom prst="rect">
+            <a:avLst/>
+          </a:prstGeom>
+        </p:spPr>
+        <p:txBody>
+          <a:bodyPr anchor="b"/>
+          <a:lstStyle/>
+          <a:p>
+            <a:pPr algn="r">
+              <a:defRPr sz="900">
                 <a:solidFill>
-                  <a:srgbClr val="222222"/>
+                  <a:srgbClr val="9AA7B6"/>
                 </a:solidFill>
-              </a:defRPr>
-            </a:pPr>
-            <a:r>
-              <a:t>• LesTechniques de l'Information et de la Communication(TIC) désignent l'ensemble des outils numériques qui permettent de créer, traiter, stocker, transmettre et partager l'information. Elles incluent ordinateurs, smartphones, réseaux sans fil et plateformes en ligne.</a:t>
-            </a:r>
-          </a:p>
-          <a:p>
-            <a:pPr>
-              <a:spcAft>
-                <a:spcPts val="600"/>
-              </a:spcAft>
-              <a:defRPr sz="1400">
+                <a:latin typeface="Poppins"/>
+              </a:defRPr>
+            </a:pPr>
+            <a:r>
+              <a:rPr lang="fr-FR" sz="900">
                 <a:solidFill>
-                  <a:srgbClr val="222222"/>
+                  <a:srgbClr val="9AA7B6"/>
                 </a:solidFill>
-              </a:defRPr>
-            </a:pPr>
-            <a:r>
-              <a:t>• Pourquoi ce cours en Licence 1 ?Dès la première année, vous utilisez les TIC pour :</a:t>
-            </a:r>
-          </a:p>
-          <a:p>
-            <a:pPr>
-              <a:spcAft>
-                <a:spcPts val="600"/>
-              </a:spcAft>
-              <a:defRPr sz="1400">
-                <a:solidFill>
-                  <a:srgbClr val="222222"/>
-                </a:solidFill>
-              </a:defRPr>
-            </a:pPr>
-            <a:r>
-              <a:t>• Accéder aux ressources: Moodle, bibliothèque numérique, polycopiés PDF</a:t>
-            </a:r>
-          </a:p>
-          <a:p>
-            <a:pPr>
-              <a:spcAft>
-                <a:spcPts val="600"/>
-              </a:spcAft>
-              <a:defRPr sz="1400">
-                <a:solidFill>
-                  <a:srgbClr val="222222"/>
-                </a:solidFill>
-              </a:defRPr>
-            </a:pPr>
-            <a:r>
-              <a:t>• Communiquer: courriel institutionnel, forums de TD</a:t>
-            </a:r>
-          </a:p>
-          <a:p>
-            <a:pPr>
-              <a:spcAft>
-                <a:spcPts val="600"/>
-              </a:spcAft>
-              <a:defRPr sz="1400">
-                <a:solidFill>
-                  <a:srgbClr val="222222"/>
-                </a:solidFill>
-              </a:defRPr>
-            </a:pPr>
-            <a:r>
-              <a:t>• Rechercher: bases documentaires, corpus linguistiques multilingues</a:t>
-            </a:r>
-          </a:p>
-          <a:p>
-            <a:pPr>
-              <a:spcAft>
-                <a:spcPts val="600"/>
-              </a:spcAft>
-              <a:defRPr sz="1400">
-                <a:solidFill>
-                  <a:srgbClr val="222222"/>
-                </a:solidFill>
-              </a:defRPr>
-            </a:pPr>
-            <a:r>
-              <a:t>• Produire: devoirs Word, présentations PowerPoint, exposés</a:t>
-            </a:r>
-          </a:p>
-          <a:p>
-            <a:pPr>
-              <a:spcAft>
-                <a:spcPts val="600"/>
-              </a:spcAft>
-              <a:defRPr sz="1400">
-                <a:solidFill>
-                  <a:srgbClr val="222222"/>
-                </a:solidFill>
-              </a:defRPr>
-            </a:pPr>
-            <a:r>
-              <a:t>• Objectif pédagogique :développer uneculture numériquesolide — savoir utiliser les outils, mais aussi comprendre leurs limites (fiabilité des sources, plagiat, vie privée).</a:t>
+                <a:latin typeface="Poppins"/>
+              </a:rPr>
+              <a:t>Université de Mostaganem — Dr. Madani BELACEL</a:t>
             </a:r>
           </a:p>
         </p:txBody>
@@ -5906,7 +6303,7 @@
     </a:clrScheme>
     <a:fontScheme name="Office">
       <a:majorFont>
-        <a:latin typeface="Calibri"/>
+        <a:latin typeface="Poppins"/>
         <a:ea typeface=""/>
         <a:cs typeface=""/>
         <a:font script="Jpan" typeface="ＭＳ Ｐゴシック"/>
@@ -5941,7 +6338,7 @@
         <a:font script="Geor" typeface="Sylfaen"/>
       </a:majorFont>
       <a:minorFont>
-        <a:latin typeface="Calibri"/>
+        <a:latin typeface="Poppins"/>
         <a:ea typeface=""/>
         <a:cs typeface=""/>
         <a:font script="Jpan" typeface="ＭＳ Ｐゴシック"/>
